--- a/Vulcan Werke/VulkanWerke_Solution_Proposal_2.0.pptx
+++ b/Vulcan Werke/VulkanWerke_Solution_Proposal_2.0.pptx
@@ -6980,7 +6980,7 @@
         </p:nvSpPr>
         <p:spPr>
           <a:xfrm>
-            <a:off x="274320" y="841248"/>
+            <a:off x="274320" y="781812"/>
             <a:ext cx="4572000" cy="256032"/>
           </a:xfrm>
           <a:prstGeom prst="rect">
@@ -7019,7 +7019,7 @@
         </p:nvSpPr>
         <p:spPr>
           <a:xfrm>
-            <a:off x="274320" y="1188720"/>
+            <a:off x="274320" y="1069848"/>
             <a:ext cx="2176272" cy="713232"/>
           </a:xfrm>
           <a:prstGeom prst="rect">
@@ -7060,7 +7060,7 @@
         </p:nvSpPr>
         <p:spPr>
           <a:xfrm>
-            <a:off x="274320" y="1188720"/>
+            <a:off x="274320" y="1069848"/>
             <a:ext cx="54864" cy="713232"/>
           </a:xfrm>
           <a:prstGeom prst="rect">
@@ -7099,7 +7099,7 @@
         </p:nvSpPr>
         <p:spPr>
           <a:xfrm>
-            <a:off x="539496" y="1499616"/>
+            <a:off x="539496" y="1380744"/>
             <a:ext cx="91440" cy="91440"/>
           </a:xfrm>
           <a:prstGeom prst="ellipse">
@@ -7138,7 +7138,7 @@
         </p:nvSpPr>
         <p:spPr>
           <a:xfrm>
-            <a:off x="566014" y="1526134"/>
+            <a:off x="566014" y="1407262"/>
             <a:ext cx="38405" cy="38405"/>
           </a:xfrm>
           <a:prstGeom prst="ellipse">
@@ -7170,7 +7170,7 @@
         </p:nvSpPr>
         <p:spPr>
           <a:xfrm>
-            <a:off x="731520" y="1188720"/>
+            <a:off x="731520" y="1069848"/>
             <a:ext cx="1664208" cy="713232"/>
           </a:xfrm>
           <a:prstGeom prst="rect">
@@ -7209,7 +7209,7 @@
         </p:nvSpPr>
         <p:spPr>
           <a:xfrm>
-            <a:off x="2578608" y="1188720"/>
+            <a:off x="2578608" y="1069848"/>
             <a:ext cx="2176272" cy="713232"/>
           </a:xfrm>
           <a:prstGeom prst="rect">
@@ -7250,7 +7250,7 @@
         </p:nvSpPr>
         <p:spPr>
           <a:xfrm>
-            <a:off x="2578608" y="1188720"/>
+            <a:off x="2578608" y="1069848"/>
             <a:ext cx="54864" cy="713232"/>
           </a:xfrm>
           <a:prstGeom prst="rect">
@@ -7289,7 +7289,7 @@
         </p:nvSpPr>
         <p:spPr>
           <a:xfrm>
-            <a:off x="2843784" y="1499616"/>
+            <a:off x="2843784" y="1380744"/>
             <a:ext cx="91440" cy="91440"/>
           </a:xfrm>
           <a:prstGeom prst="ellipse">
@@ -7328,7 +7328,7 @@
         </p:nvSpPr>
         <p:spPr>
           <a:xfrm>
-            <a:off x="2870302" y="1526134"/>
+            <a:off x="2870302" y="1407262"/>
             <a:ext cx="38405" cy="38405"/>
           </a:xfrm>
           <a:prstGeom prst="ellipse">
@@ -7360,7 +7360,7 @@
         </p:nvSpPr>
         <p:spPr>
           <a:xfrm>
-            <a:off x="3035808" y="1188720"/>
+            <a:off x="3035808" y="1069848"/>
             <a:ext cx="1664208" cy="713232"/>
           </a:xfrm>
           <a:prstGeom prst="rect">
@@ -7399,7 +7399,7 @@
         </p:nvSpPr>
         <p:spPr>
           <a:xfrm>
-            <a:off x="274320" y="2029968"/>
+            <a:off x="274320" y="1911096"/>
             <a:ext cx="2176272" cy="713232"/>
           </a:xfrm>
           <a:prstGeom prst="rect">
@@ -7440,7 +7440,7 @@
         </p:nvSpPr>
         <p:spPr>
           <a:xfrm>
-            <a:off x="274320" y="2029968"/>
+            <a:off x="274320" y="1911096"/>
             <a:ext cx="54864" cy="713232"/>
           </a:xfrm>
           <a:prstGeom prst="rect">
@@ -7479,7 +7479,7 @@
         </p:nvSpPr>
         <p:spPr>
           <a:xfrm>
-            <a:off x="539496" y="2340864"/>
+            <a:off x="539496" y="2221992"/>
             <a:ext cx="91440" cy="91440"/>
           </a:xfrm>
           <a:prstGeom prst="ellipse">
@@ -7518,7 +7518,7 @@
         </p:nvSpPr>
         <p:spPr>
           <a:xfrm>
-            <a:off x="566014" y="2367382"/>
+            <a:off x="566014" y="2248510"/>
             <a:ext cx="38405" cy="38405"/>
           </a:xfrm>
           <a:prstGeom prst="ellipse">
@@ -7550,7 +7550,7 @@
         </p:nvSpPr>
         <p:spPr>
           <a:xfrm>
-            <a:off x="731520" y="2029968"/>
+            <a:off x="731520" y="1911096"/>
             <a:ext cx="1664208" cy="713232"/>
           </a:xfrm>
           <a:prstGeom prst="rect">
@@ -7589,7 +7589,7 @@
         </p:nvSpPr>
         <p:spPr>
           <a:xfrm>
-            <a:off x="2578608" y="2029968"/>
+            <a:off x="2578608" y="1911096"/>
             <a:ext cx="2176272" cy="713232"/>
           </a:xfrm>
           <a:prstGeom prst="rect">
@@ -7630,7 +7630,7 @@
         </p:nvSpPr>
         <p:spPr>
           <a:xfrm>
-            <a:off x="2578608" y="2029968"/>
+            <a:off x="2578608" y="1911096"/>
             <a:ext cx="54864" cy="713232"/>
           </a:xfrm>
           <a:prstGeom prst="rect">
@@ -7669,7 +7669,7 @@
         </p:nvSpPr>
         <p:spPr>
           <a:xfrm>
-            <a:off x="2843784" y="2340864"/>
+            <a:off x="2843784" y="2221992"/>
             <a:ext cx="91440" cy="91440"/>
           </a:xfrm>
           <a:prstGeom prst="ellipse">
@@ -7708,7 +7708,7 @@
         </p:nvSpPr>
         <p:spPr>
           <a:xfrm>
-            <a:off x="2870302" y="2367382"/>
+            <a:off x="2870302" y="2248510"/>
             <a:ext cx="38405" cy="38405"/>
           </a:xfrm>
           <a:prstGeom prst="ellipse">
@@ -7740,7 +7740,7 @@
         </p:nvSpPr>
         <p:spPr>
           <a:xfrm>
-            <a:off x="3035808" y="2029968"/>
+            <a:off x="3035808" y="1911096"/>
             <a:ext cx="1664208" cy="713232"/>
           </a:xfrm>
           <a:prstGeom prst="rect">
@@ -7779,7 +7779,7 @@
         </p:nvSpPr>
         <p:spPr>
           <a:xfrm>
-            <a:off x="274320" y="2871216"/>
+            <a:off x="274320" y="2752344"/>
             <a:ext cx="2176272" cy="713232"/>
           </a:xfrm>
           <a:prstGeom prst="rect">
@@ -7820,7 +7820,7 @@
         </p:nvSpPr>
         <p:spPr>
           <a:xfrm>
-            <a:off x="274320" y="2871216"/>
+            <a:off x="274320" y="2752344"/>
             <a:ext cx="54864" cy="713232"/>
           </a:xfrm>
           <a:prstGeom prst="rect">
@@ -7859,7 +7859,7 @@
         </p:nvSpPr>
         <p:spPr>
           <a:xfrm>
-            <a:off x="539496" y="3182112"/>
+            <a:off x="539496" y="3063240"/>
             <a:ext cx="91440" cy="91440"/>
           </a:xfrm>
           <a:prstGeom prst="ellipse">
@@ -7898,7 +7898,7 @@
         </p:nvSpPr>
         <p:spPr>
           <a:xfrm>
-            <a:off x="566014" y="3208630"/>
+            <a:off x="566014" y="3089758"/>
             <a:ext cx="38405" cy="38405"/>
           </a:xfrm>
           <a:prstGeom prst="ellipse">
@@ -7930,7 +7930,7 @@
         </p:nvSpPr>
         <p:spPr>
           <a:xfrm>
-            <a:off x="731520" y="2871216"/>
+            <a:off x="731520" y="2752344"/>
             <a:ext cx="1664208" cy="713232"/>
           </a:xfrm>
           <a:prstGeom prst="rect">
@@ -7969,7 +7969,7 @@
         </p:nvSpPr>
         <p:spPr>
           <a:xfrm>
-            <a:off x="2578608" y="2871216"/>
+            <a:off x="2578608" y="2752344"/>
             <a:ext cx="2176272" cy="713232"/>
           </a:xfrm>
           <a:prstGeom prst="rect">
@@ -8010,7 +8010,7 @@
         </p:nvSpPr>
         <p:spPr>
           <a:xfrm>
-            <a:off x="2578608" y="2871216"/>
+            <a:off x="2578608" y="2752344"/>
             <a:ext cx="54864" cy="713232"/>
           </a:xfrm>
           <a:prstGeom prst="rect">
@@ -8049,7 +8049,7 @@
         </p:nvSpPr>
         <p:spPr>
           <a:xfrm>
-            <a:off x="2843784" y="3182112"/>
+            <a:off x="2843784" y="3063240"/>
             <a:ext cx="91440" cy="91440"/>
           </a:xfrm>
           <a:prstGeom prst="ellipse">
@@ -8088,7 +8088,7 @@
         </p:nvSpPr>
         <p:spPr>
           <a:xfrm>
-            <a:off x="2870302" y="3208630"/>
+            <a:off x="2870302" y="3089758"/>
             <a:ext cx="38405" cy="38405"/>
           </a:xfrm>
           <a:prstGeom prst="ellipse">
@@ -8120,7 +8120,7 @@
         </p:nvSpPr>
         <p:spPr>
           <a:xfrm>
-            <a:off x="3035808" y="2871216"/>
+            <a:off x="3035808" y="2752344"/>
             <a:ext cx="1664208" cy="713232"/>
           </a:xfrm>
           <a:prstGeom prst="rect">
@@ -8159,7 +8159,7 @@
         </p:nvSpPr>
         <p:spPr>
           <a:xfrm>
-            <a:off x="274320" y="3712464"/>
+            <a:off x="274320" y="3593592"/>
             <a:ext cx="2176272" cy="713232"/>
           </a:xfrm>
           <a:prstGeom prst="rect">
@@ -8200,7 +8200,7 @@
         </p:nvSpPr>
         <p:spPr>
           <a:xfrm>
-            <a:off x="274320" y="3712464"/>
+            <a:off x="274320" y="3593592"/>
             <a:ext cx="54864" cy="713232"/>
           </a:xfrm>
           <a:prstGeom prst="rect">
@@ -8239,7 +8239,7 @@
         </p:nvSpPr>
         <p:spPr>
           <a:xfrm>
-            <a:off x="539496" y="4023360"/>
+            <a:off x="539496" y="3904488"/>
             <a:ext cx="91440" cy="91440"/>
           </a:xfrm>
           <a:prstGeom prst="ellipse">
@@ -8278,7 +8278,7 @@
         </p:nvSpPr>
         <p:spPr>
           <a:xfrm>
-            <a:off x="566014" y="4049878"/>
+            <a:off x="566014" y="3931006"/>
             <a:ext cx="38405" cy="38405"/>
           </a:xfrm>
           <a:prstGeom prst="ellipse">
@@ -8310,7 +8310,7 @@
         </p:nvSpPr>
         <p:spPr>
           <a:xfrm>
-            <a:off x="731520" y="3712464"/>
+            <a:off x="731520" y="3593592"/>
             <a:ext cx="1664208" cy="713232"/>
           </a:xfrm>
           <a:prstGeom prst="rect">
@@ -8349,7 +8349,7 @@
         </p:nvSpPr>
         <p:spPr>
           <a:xfrm>
-            <a:off x="2578608" y="3712464"/>
+            <a:off x="2578608" y="3593592"/>
             <a:ext cx="2176272" cy="713232"/>
           </a:xfrm>
           <a:prstGeom prst="rect">
@@ -8390,7 +8390,7 @@
         </p:nvSpPr>
         <p:spPr>
           <a:xfrm>
-            <a:off x="2578608" y="3712464"/>
+            <a:off x="2578608" y="3593592"/>
             <a:ext cx="54864" cy="713232"/>
           </a:xfrm>
           <a:prstGeom prst="rect">
@@ -8429,7 +8429,7 @@
         </p:nvSpPr>
         <p:spPr>
           <a:xfrm>
-            <a:off x="2843784" y="4023360"/>
+            <a:off x="2843784" y="3904488"/>
             <a:ext cx="91440" cy="91440"/>
           </a:xfrm>
           <a:prstGeom prst="ellipse">
@@ -8468,7 +8468,7 @@
         </p:nvSpPr>
         <p:spPr>
           <a:xfrm>
-            <a:off x="2870302" y="4049878"/>
+            <a:off x="2870302" y="3931006"/>
             <a:ext cx="38405" cy="38405"/>
           </a:xfrm>
           <a:prstGeom prst="ellipse">
@@ -8500,7 +8500,7 @@
         </p:nvSpPr>
         <p:spPr>
           <a:xfrm>
-            <a:off x="3035808" y="3712464"/>
+            <a:off x="3035808" y="3593592"/>
             <a:ext cx="1664208" cy="713232"/>
           </a:xfrm>
           <a:prstGeom prst="rect">
@@ -9112,6 +9112,83 @@
                 <a:cs typeface="Aptos" pitchFamily="34" charset="-120"/>
               </a:rPr>
               <a:t>Every AI-generated report, recommendation and investigation can be traced back to its source and reviewed by authorized personnel.</a:t>
+            </a:r>
+            <a:endParaRPr lang="en-US" sz="1050" dirty="0"/>
+          </a:p>
+        </p:txBody>
+      </p:sp>
+      <p:sp>
+        <p:nvSpPr>
+          <p:cNvPr id="83" name="Text 80">
+            <a:extLst>
+              <a:ext uri="{FF2B5EF4-FFF2-40B4-BE49-F238E27FC236}">
+                <a16:creationId xmlns:a16="http://schemas.microsoft.com/office/drawing/2014/main" id="{D1A0ABCB-79C7-9DB4-3B67-21D6BD6A80F6}"/>
+              </a:ext>
+            </a:extLst>
+          </p:cNvPr>
+          <p:cNvSpPr/>
+          <p:nvPr/>
+        </p:nvSpPr>
+        <p:spPr>
+          <a:xfrm>
+            <a:off x="182880" y="4434840"/>
+            <a:ext cx="4663440" cy="868680"/>
+          </a:xfrm>
+          <a:prstGeom prst="rect">
+            <a:avLst/>
+          </a:prstGeom>
+          <a:noFill/>
+          <a:ln/>
+        </p:spPr>
+        <p:txBody>
+          <a:bodyPr wrap="square" rtlCol="0" anchor="t"/>
+          <a:lstStyle/>
+          <a:p>
+            <a:pPr marL="0" indent="0" algn="ctr">
+              <a:buNone/>
+            </a:pPr>
+            <a:r>
+              <a:rPr lang="en-US" sz="1050" dirty="0" err="1">
+                <a:solidFill>
+                  <a:srgbClr val="9DBEF0"/>
+                </a:solidFill>
+                <a:latin typeface="Aptos" pitchFamily="34" charset="0"/>
+                <a:ea typeface="Aptos" pitchFamily="34" charset="-122"/>
+                <a:cs typeface="Aptos" pitchFamily="34" charset="-120"/>
+              </a:rPr>
+              <a:t>LangSmith</a:t>
+            </a:r>
+            <a:r>
+              <a:rPr lang="en-US" sz="1050" dirty="0">
+                <a:solidFill>
+                  <a:srgbClr val="9DBEF0"/>
+                </a:solidFill>
+                <a:latin typeface="Aptos" pitchFamily="34" charset="0"/>
+                <a:ea typeface="Aptos" pitchFamily="34" charset="-122"/>
+                <a:cs typeface="Aptos" pitchFamily="34" charset="-120"/>
+              </a:rPr>
+              <a:t> is not watching machines, it’s watching the AI itself. </a:t>
+            </a:r>
+            <a:br>
+              <a:rPr lang="en-US" sz="1050" dirty="0">
+                <a:solidFill>
+                  <a:srgbClr val="9DBEF0"/>
+                </a:solidFill>
+                <a:latin typeface="Aptos" pitchFamily="34" charset="0"/>
+                <a:ea typeface="Aptos" pitchFamily="34" charset="-122"/>
+                <a:cs typeface="Aptos" pitchFamily="34" charset="-120"/>
+              </a:rPr>
+            </a:br>
+            <a:r>
+              <a:rPr lang="en-US" sz="900" dirty="0">
+                <a:solidFill>
+                  <a:srgbClr val="9DBEF0"/>
+                </a:solidFill>
+                <a:latin typeface="Aptos" pitchFamily="34" charset="0"/>
+                <a:ea typeface="Aptos" pitchFamily="34" charset="-122"/>
+                <a:cs typeface="Aptos" pitchFamily="34" charset="-120"/>
+              </a:rPr>
+              <a:t>ensuring each draft, recommendation and investigation is traceable and reviewable</a:t>
             </a:r>
             <a:endParaRPr lang="en-US" sz="1050" dirty="0"/>
           </a:p>
@@ -16021,7 +16098,7 @@
           <a:bodyPr/>
           <a:lstStyle/>
           <a:p>
-            <a:endParaRPr lang="en-US"/>
+            <a:endParaRPr lang="en-US" dirty="0"/>
           </a:p>
         </p:txBody>
       </p:sp>

--- a/Vulcan Werke/VulkanWerke_Solution_Proposal_2.0.pptx
+++ b/Vulcan Werke/VulkanWerke_Solution_Proposal_2.0.pptx
@@ -10603,7 +10603,7 @@
                 <a:ea typeface="Aptos" pitchFamily="34" charset="-122"/>
                 <a:cs typeface="Aptos" pitchFamily="34" charset="-120"/>
               </a:rPr>
-              <a:t>Quality &amp; production data</a:t>
+              <a:t>Quality &amp; manufacturing data</a:t>
             </a:r>
             <a:endParaRPr lang="en-US" sz="800" dirty="0"/>
           </a:p>
@@ -18831,7 +18831,7 @@
                 <a:ea typeface="Aptos" pitchFamily="34" charset="-122"/>
                 <a:cs typeface="Aptos" pitchFamily="34" charset="-120"/>
               </a:rPr>
-              <a:t>Production, quality, and operational data live in systems that don't talk to each other. Root cause investigations are slow, quality issues surface too late, reporting eats time, and knowledge stays locked in a few heads.</a:t>
+              <a:t>Manufacturing, quality, and operational data live in systems that don't talk to each other. Root cause investigations are slow, quality issues surface too late, reporting eats time, and knowledge stays locked in a few heads.</a:t>
             </a:r>
             <a:endParaRPr lang="en-US" sz="1200" dirty="0"/>
           </a:p>
@@ -20631,7 +20631,7 @@
                 <a:ea typeface="Aptos" pitchFamily="34" charset="-122"/>
                 <a:cs typeface="Aptos" pitchFamily="34" charset="-120"/>
               </a:rPr>
-              <a:t>Production</a:t>
+              <a:t>Manufacturing</a:t>
             </a:r>
             <a:endParaRPr lang="en-US" sz="1500" dirty="0"/>
           </a:p>
@@ -33582,7 +33582,190 @@
                 <a:ea typeface="Aptos" pitchFamily="34" charset="-122"/>
                 <a:cs typeface="Aptos" pitchFamily="34" charset="-120"/>
               </a:rPr>
-              <a:t>Production</a:t>
+              <a:t>Manufacturing</a:t>
+            </a:r>
+            <a:endParaRPr lang="en-US" sz="1000" dirty="0"/>
+          </a:p>
+          <a:p>
+            <a:pPr marL="0" indent="0" algn="ctr">
+              <a:buNone/>
+            </a:pPr>
+            <a:r>
+              <a:rPr lang="en-US" sz="1000" b="1" dirty="0">
+                <a:solidFill>
+                  <a:srgbClr val="EAF2FF"/>
+                </a:solidFill>
+                <a:latin typeface="Aptos" pitchFamily="34" charset="0"/>
+                <a:ea typeface="Aptos" pitchFamily="34" charset="-122"/>
+                <a:cs typeface="Aptos" pitchFamily="34" charset="-120"/>
+              </a:rPr>
+              <a:t>Dashboard / </a:t>
+            </a:r>
+          </a:p>
+          <a:p>
+            <a:pPr marL="0" indent="0" algn="ctr">
+              <a:buNone/>
+            </a:pPr>
+            <a:r>
+              <a:rPr lang="en-US" sz="1000" b="1">
+                <a:solidFill>
+                  <a:srgbClr val="EAF2FF"/>
+                </a:solidFill>
+                <a:latin typeface="Aptos" pitchFamily="34" charset="0"/>
+                <a:ea typeface="Aptos" pitchFamily="34" charset="-122"/>
+                <a:cs typeface="Aptos" pitchFamily="34" charset="-120"/>
+              </a:rPr>
+              <a:t>Monitoring Alerts</a:t>
+            </a:r>
+          </a:p>
+        </p:txBody>
+      </p:sp>
+      <p:sp>
+        <p:nvSpPr>
+          <p:cNvPr id="35" name="Shape 33"/>
+          <p:cNvSpPr/>
+          <p:nvPr/>
+        </p:nvSpPr>
+        <p:spPr>
+          <a:xfrm>
+            <a:off x="1746504" y="1792224"/>
+            <a:ext cx="0" cy="0"/>
+          </a:xfrm>
+          <a:prstGeom prst="line">
+            <a:avLst/>
+          </a:prstGeom>
+          <a:noFill/>
+          <a:ln w="12700">
+            <a:solidFill>
+              <a:srgbClr val="36E0FF">
+                <a:alpha val="80000"/>
+              </a:srgbClr>
+            </a:solidFill>
+            <a:prstDash val="solid"/>
+          </a:ln>
+        </p:spPr>
+        <p:txBody>
+          <a:bodyPr/>
+          <a:lstStyle/>
+          <a:p>
+            <a:endParaRPr lang="en-US"/>
+          </a:p>
+        </p:txBody>
+      </p:sp>
+      <p:sp>
+        <p:nvSpPr>
+          <p:cNvPr id="36" name="Shape 34"/>
+          <p:cNvSpPr/>
+          <p:nvPr/>
+        </p:nvSpPr>
+        <p:spPr>
+          <a:xfrm>
+            <a:off x="2743200" y="822960"/>
+            <a:ext cx="1627632" cy="841248"/>
+          </a:xfrm>
+          <a:prstGeom prst="rect">
+            <a:avLst/>
+          </a:prstGeom>
+          <a:solidFill>
+            <a:srgbClr val="0A1430"/>
+          </a:solidFill>
+          <a:ln w="12700">
+            <a:solidFill>
+              <a:srgbClr val="3DEFC4">
+                <a:alpha val="65000"/>
+              </a:srgbClr>
+            </a:solidFill>
+            <a:prstDash val="solid"/>
+          </a:ln>
+          <a:effectLst>
+            <a:outerShdw blurRad="88900" dist="38100" dir="8100000" algn="bl" rotWithShape="0">
+              <a:srgbClr val="000000">
+                <a:alpha val="40000"/>
+              </a:srgbClr>
+            </a:outerShdw>
+          </a:effectLst>
+        </p:spPr>
+        <p:txBody>
+          <a:bodyPr/>
+          <a:lstStyle/>
+          <a:p>
+            <a:endParaRPr lang="en-US"/>
+          </a:p>
+        </p:txBody>
+      </p:sp>
+      <p:sp>
+        <p:nvSpPr>
+          <p:cNvPr id="37" name="Shape 35"/>
+          <p:cNvSpPr/>
+          <p:nvPr/>
+        </p:nvSpPr>
+        <p:spPr>
+          <a:xfrm>
+            <a:off x="2743200" y="822960"/>
+            <a:ext cx="1627632" cy="45720"/>
+          </a:xfrm>
+          <a:prstGeom prst="rect">
+            <a:avLst/>
+          </a:prstGeom>
+          <a:solidFill>
+            <a:srgbClr val="3DEFC4"/>
+          </a:solidFill>
+          <a:ln w="12700">
+            <a:solidFill>
+              <a:srgbClr val="3DEFC4"/>
+            </a:solidFill>
+            <a:prstDash val="solid"/>
+          </a:ln>
+          <a:effectLst>
+            <a:outerShdw blurRad="76200" dist="50800" dir="16200000" algn="bl" rotWithShape="0">
+              <a:srgbClr val="3DEFC4">
+                <a:alpha val="60000"/>
+              </a:srgbClr>
+            </a:outerShdw>
+          </a:effectLst>
+        </p:spPr>
+        <p:txBody>
+          <a:bodyPr/>
+          <a:lstStyle/>
+          <a:p>
+            <a:endParaRPr lang="en-US"/>
+          </a:p>
+        </p:txBody>
+      </p:sp>
+      <p:sp>
+        <p:nvSpPr>
+          <p:cNvPr id="38" name="Text 36"/>
+          <p:cNvSpPr/>
+          <p:nvPr/>
+        </p:nvSpPr>
+        <p:spPr>
+          <a:xfrm>
+            <a:off x="2798064" y="877824"/>
+            <a:ext cx="1517904" cy="713232"/>
+          </a:xfrm>
+          <a:prstGeom prst="rect">
+            <a:avLst/>
+          </a:prstGeom>
+          <a:noFill/>
+          <a:ln/>
+        </p:spPr>
+        <p:txBody>
+          <a:bodyPr wrap="square" rtlCol="0" anchor="ctr"/>
+          <a:lstStyle/>
+          <a:p>
+            <a:pPr marL="0" indent="0" algn="ctr">
+              <a:buNone/>
+            </a:pPr>
+            <a:r>
+              <a:rPr lang="en-US" sz="1000" b="1" dirty="0">
+                <a:solidFill>
+                  <a:srgbClr val="EAF2FF"/>
+                </a:solidFill>
+                <a:latin typeface="Aptos" pitchFamily="34" charset="0"/>
+                <a:ea typeface="Aptos" pitchFamily="34" charset="-122"/>
+                <a:cs typeface="Aptos" pitchFamily="34" charset="-120"/>
+              </a:rPr>
+              <a:t>Quality</a:t>
             </a:r>
             <a:endParaRPr lang="en-US" sz="1000" dirty="0"/>
           </a:p>
@@ -33607,174 +33790,6 @@
       </p:sp>
       <p:sp>
         <p:nvSpPr>
-          <p:cNvPr id="35" name="Shape 33"/>
-          <p:cNvSpPr/>
-          <p:nvPr/>
-        </p:nvSpPr>
-        <p:spPr>
-          <a:xfrm>
-            <a:off x="1746504" y="1792224"/>
-            <a:ext cx="0" cy="0"/>
-          </a:xfrm>
-          <a:prstGeom prst="line">
-            <a:avLst/>
-          </a:prstGeom>
-          <a:noFill/>
-          <a:ln w="12700">
-            <a:solidFill>
-              <a:srgbClr val="36E0FF">
-                <a:alpha val="80000"/>
-              </a:srgbClr>
-            </a:solidFill>
-            <a:prstDash val="solid"/>
-          </a:ln>
-        </p:spPr>
-        <p:txBody>
-          <a:bodyPr/>
-          <a:lstStyle/>
-          <a:p>
-            <a:endParaRPr lang="en-US"/>
-          </a:p>
-        </p:txBody>
-      </p:sp>
-      <p:sp>
-        <p:nvSpPr>
-          <p:cNvPr id="36" name="Shape 34"/>
-          <p:cNvSpPr/>
-          <p:nvPr/>
-        </p:nvSpPr>
-        <p:spPr>
-          <a:xfrm>
-            <a:off x="2743200" y="822960"/>
-            <a:ext cx="1627632" cy="841248"/>
-          </a:xfrm>
-          <a:prstGeom prst="rect">
-            <a:avLst/>
-          </a:prstGeom>
-          <a:solidFill>
-            <a:srgbClr val="0A1430"/>
-          </a:solidFill>
-          <a:ln w="12700">
-            <a:solidFill>
-              <a:srgbClr val="3DEFC4">
-                <a:alpha val="65000"/>
-              </a:srgbClr>
-            </a:solidFill>
-            <a:prstDash val="solid"/>
-          </a:ln>
-          <a:effectLst>
-            <a:outerShdw blurRad="88900" dist="38100" dir="8100000" algn="bl" rotWithShape="0">
-              <a:srgbClr val="000000">
-                <a:alpha val="40000"/>
-              </a:srgbClr>
-            </a:outerShdw>
-          </a:effectLst>
-        </p:spPr>
-        <p:txBody>
-          <a:bodyPr/>
-          <a:lstStyle/>
-          <a:p>
-            <a:endParaRPr lang="en-US"/>
-          </a:p>
-        </p:txBody>
-      </p:sp>
-      <p:sp>
-        <p:nvSpPr>
-          <p:cNvPr id="37" name="Shape 35"/>
-          <p:cNvSpPr/>
-          <p:nvPr/>
-        </p:nvSpPr>
-        <p:spPr>
-          <a:xfrm>
-            <a:off x="2743200" y="822960"/>
-            <a:ext cx="1627632" cy="45720"/>
-          </a:xfrm>
-          <a:prstGeom prst="rect">
-            <a:avLst/>
-          </a:prstGeom>
-          <a:solidFill>
-            <a:srgbClr val="3DEFC4"/>
-          </a:solidFill>
-          <a:ln w="12700">
-            <a:solidFill>
-              <a:srgbClr val="3DEFC4"/>
-            </a:solidFill>
-            <a:prstDash val="solid"/>
-          </a:ln>
-          <a:effectLst>
-            <a:outerShdw blurRad="76200" dist="50800" dir="16200000" algn="bl" rotWithShape="0">
-              <a:srgbClr val="3DEFC4">
-                <a:alpha val="60000"/>
-              </a:srgbClr>
-            </a:outerShdw>
-          </a:effectLst>
-        </p:spPr>
-        <p:txBody>
-          <a:bodyPr/>
-          <a:lstStyle/>
-          <a:p>
-            <a:endParaRPr lang="en-US"/>
-          </a:p>
-        </p:txBody>
-      </p:sp>
-      <p:sp>
-        <p:nvSpPr>
-          <p:cNvPr id="38" name="Text 36"/>
-          <p:cNvSpPr/>
-          <p:nvPr/>
-        </p:nvSpPr>
-        <p:spPr>
-          <a:xfrm>
-            <a:off x="2798064" y="877824"/>
-            <a:ext cx="1517904" cy="713232"/>
-          </a:xfrm>
-          <a:prstGeom prst="rect">
-            <a:avLst/>
-          </a:prstGeom>
-          <a:noFill/>
-          <a:ln/>
-        </p:spPr>
-        <p:txBody>
-          <a:bodyPr wrap="square" rtlCol="0" anchor="ctr"/>
-          <a:lstStyle/>
-          <a:p>
-            <a:pPr marL="0" indent="0" algn="ctr">
-              <a:buNone/>
-            </a:pPr>
-            <a:r>
-              <a:rPr lang="en-US" sz="1000" b="1" dirty="0">
-                <a:solidFill>
-                  <a:srgbClr val="EAF2FF"/>
-                </a:solidFill>
-                <a:latin typeface="Aptos" pitchFamily="34" charset="0"/>
-                <a:ea typeface="Aptos" pitchFamily="34" charset="-122"/>
-                <a:cs typeface="Aptos" pitchFamily="34" charset="-120"/>
-              </a:rPr>
-              <a:t>Quality</a:t>
-            </a:r>
-            <a:endParaRPr lang="en-US" sz="1000" dirty="0"/>
-          </a:p>
-          <a:p>
-            <a:pPr marL="0" indent="0" algn="ctr">
-              <a:buNone/>
-            </a:pPr>
-            <a:r>
-              <a:rPr lang="en-US" sz="1000" b="1" dirty="0">
-                <a:solidFill>
-                  <a:srgbClr val="EAF2FF"/>
-                </a:solidFill>
-                <a:latin typeface="Aptos" pitchFamily="34" charset="0"/>
-                <a:ea typeface="Aptos" pitchFamily="34" charset="-122"/>
-                <a:cs typeface="Aptos" pitchFamily="34" charset="-120"/>
-              </a:rPr>
-              <a:t>Dashboard</a:t>
-            </a:r>
-            <a:endParaRPr lang="en-US" sz="1000" dirty="0"/>
-          </a:p>
-        </p:txBody>
-      </p:sp>
-      <p:sp>
-        <p:nvSpPr>
           <p:cNvPr id="39" name="Shape 37"/>
           <p:cNvSpPr/>
           <p:nvPr/>
@@ -34646,8 +34661,8 @@
         </p:nvSpPr>
         <p:spPr>
           <a:xfrm>
-            <a:off x="3694176" y="2487168"/>
-            <a:ext cx="1152144" cy="245942"/>
+            <a:off x="3694176" y="2420112"/>
+            <a:ext cx="1152144" cy="300806"/>
           </a:xfrm>
           <a:prstGeom prst="rect">
             <a:avLst/>
@@ -34671,7 +34686,7 @@
                 <a:ea typeface="Aptos" pitchFamily="34" charset="-122"/>
                 <a:cs typeface="Aptos" pitchFamily="34" charset="-120"/>
               </a:rPr>
-              <a:t>ISO / audit reports</a:t>
+              <a:t>Manufacturing  / audit reports</a:t>
             </a:r>
             <a:endParaRPr lang="en-US" sz="750" dirty="0"/>
           </a:p>

--- a/Vulcan Werke/VulkanWerke_Solution_Proposal_2.0.pptx
+++ b/Vulcan Werke/VulkanWerke_Solution_Proposal_2.0.pptx
@@ -22329,10 +22329,8 @@
                   <a:srgbClr val="03060F"/>
                 </a:solidFill>
                 <a:latin typeface="Aptos" pitchFamily="34" charset="0"/>
-                <a:ea typeface="Aptos" pitchFamily="34" charset="-122"/>
-                <a:cs typeface="Aptos" pitchFamily="34" charset="-120"/>
               </a:rPr>
-              <a:t>3</a:t>
+              <a:t>4</a:t>
             </a:r>
             <a:endParaRPr lang="en-US" sz="900" dirty="0"/>
           </a:p>

--- a/Vulcan Werke/VulkanWerke_Solution_Proposal_2.0.pptx
+++ b/Vulcan Werke/VulkanWerke_Solution_Proposal_2.0.pptx
@@ -12,9 +12,9 @@
     <p:sldId id="257" r:id="rId3"/>
     <p:sldId id="258" r:id="rId4"/>
     <p:sldId id="262" r:id="rId5"/>
-    <p:sldId id="260" r:id="rId6"/>
-    <p:sldId id="259" r:id="rId7"/>
-    <p:sldId id="261" r:id="rId8"/>
+    <p:sldId id="259" r:id="rId6"/>
+    <p:sldId id="261" r:id="rId7"/>
+    <p:sldId id="260" r:id="rId8"/>
     <p:sldId id="267" r:id="rId9"/>
     <p:sldId id="264" r:id="rId10"/>
     <p:sldId id="265" r:id="rId11"/>
@@ -1218,90 +1218,6 @@
           <a:bodyPr/>
           <a:lstStyle/>
           <a:p>
-            <a:endParaRPr lang="en-US" dirty="0"/>
-          </a:p>
-        </p:txBody>
-      </p:sp>
-      <p:sp>
-        <p:nvSpPr>
-          <p:cNvPr id="4" name="Slide Number Placeholder 3"/>
-          <p:cNvSpPr>
-            <a:spLocks noGrp="1"/>
-          </p:cNvSpPr>
-          <p:nvPr>
-            <p:ph type="sldNum" sz="quarter" idx="10"/>
-          </p:nvPr>
-        </p:nvSpPr>
-        <p:spPr/>
-        <p:txBody>
-          <a:bodyPr/>
-          <a:lstStyle/>
-          <a:p>
-            <a:fld id="{F7021451-1387-4CA6-816F-3879F97B5CBC}" type="slidenum">
-              <a:rPr lang="en-US"/>
-              <a:t>6</a:t>
-            </a:fld>
-            <a:endParaRPr lang="en-US"/>
-          </a:p>
-        </p:txBody>
-      </p:sp>
-    </p:spTree>
-    <p:extLst>
-      <p:ext uri="{BB962C8B-B14F-4D97-AF65-F5344CB8AC3E}">
-        <p14:creationId xmlns:p14="http://schemas.microsoft.com/office/powerpoint/2010/main" val="1024086991"/>
-      </p:ext>
-    </p:extLst>
-  </p:cSld>
-  <p:clrMapOvr>
-    <a:masterClrMapping/>
-  </p:clrMapOvr>
-</p:notes>
-</file>
-
-<file path=ppt/notesSlides/notesSlide7.xml><?xml version="1.0" encoding="utf-8"?>
-<p:notes xmlns:a="http://schemas.openxmlformats.org/drawingml/2006/main" xmlns:r="http://schemas.openxmlformats.org/officeDocument/2006/relationships" xmlns:p="http://schemas.openxmlformats.org/presentationml/2006/main">
-  <p:cSld>
-    <p:spTree>
-      <p:nvGrpSpPr>
-        <p:cNvPr id="1" name=""/>
-        <p:cNvGrpSpPr/>
-        <p:nvPr/>
-      </p:nvGrpSpPr>
-      <p:grpSpPr>
-        <a:xfrm>
-          <a:off x="0" y="0"/>
-          <a:ext cx="0" cy="0"/>
-          <a:chOff x="0" y="0"/>
-          <a:chExt cx="0" cy="0"/>
-        </a:xfrm>
-      </p:grpSpPr>
-      <p:sp>
-        <p:nvSpPr>
-          <p:cNvPr id="2" name="Slide Image Placeholder 1"/>
-          <p:cNvSpPr>
-            <a:spLocks noGrp="1" noRot="1" noChangeAspect="1"/>
-          </p:cNvSpPr>
-          <p:nvPr>
-            <p:ph type="sldImg"/>
-          </p:nvPr>
-        </p:nvSpPr>
-        <p:spPr/>
-      </p:sp>
-      <p:sp>
-        <p:nvSpPr>
-          <p:cNvPr id="3" name="Notes Placeholder 2"/>
-          <p:cNvSpPr>
-            <a:spLocks noGrp="1"/>
-          </p:cNvSpPr>
-          <p:nvPr>
-            <p:ph type="body" idx="1"/>
-          </p:nvPr>
-        </p:nvSpPr>
-        <p:spPr/>
-        <p:txBody>
-          <a:bodyPr/>
-          <a:lstStyle/>
-          <a:p>
             <a:pPr marL="171450" indent="-171450">
               <a:buFontTx/>
               <a:buChar char="-"/>
@@ -1447,6 +1363,90 @@
               <a:buFontTx/>
               <a:buChar char="-"/>
             </a:pPr>
+            <a:endParaRPr lang="en-US" dirty="0"/>
+          </a:p>
+        </p:txBody>
+      </p:sp>
+      <p:sp>
+        <p:nvSpPr>
+          <p:cNvPr id="4" name="Slide Number Placeholder 3"/>
+          <p:cNvSpPr>
+            <a:spLocks noGrp="1"/>
+          </p:cNvSpPr>
+          <p:nvPr>
+            <p:ph type="sldNum" sz="quarter" idx="10"/>
+          </p:nvPr>
+        </p:nvSpPr>
+        <p:spPr/>
+        <p:txBody>
+          <a:bodyPr/>
+          <a:lstStyle/>
+          <a:p>
+            <a:fld id="{F7021451-1387-4CA6-816F-3879F97B5CBC}" type="slidenum">
+              <a:rPr lang="en-US"/>
+              <a:t>6</a:t>
+            </a:fld>
+            <a:endParaRPr lang="en-US"/>
+          </a:p>
+        </p:txBody>
+      </p:sp>
+    </p:spTree>
+    <p:extLst>
+      <p:ext uri="{BB962C8B-B14F-4D97-AF65-F5344CB8AC3E}">
+        <p14:creationId xmlns:p14="http://schemas.microsoft.com/office/powerpoint/2010/main" val="1024086991"/>
+      </p:ext>
+    </p:extLst>
+  </p:cSld>
+  <p:clrMapOvr>
+    <a:masterClrMapping/>
+  </p:clrMapOvr>
+</p:notes>
+</file>
+
+<file path=ppt/notesSlides/notesSlide7.xml><?xml version="1.0" encoding="utf-8"?>
+<p:notes xmlns:a="http://schemas.openxmlformats.org/drawingml/2006/main" xmlns:r="http://schemas.openxmlformats.org/officeDocument/2006/relationships" xmlns:p="http://schemas.openxmlformats.org/presentationml/2006/main">
+  <p:cSld>
+    <p:spTree>
+      <p:nvGrpSpPr>
+        <p:cNvPr id="1" name=""/>
+        <p:cNvGrpSpPr/>
+        <p:nvPr/>
+      </p:nvGrpSpPr>
+      <p:grpSpPr>
+        <a:xfrm>
+          <a:off x="0" y="0"/>
+          <a:ext cx="0" cy="0"/>
+          <a:chOff x="0" y="0"/>
+          <a:chExt cx="0" cy="0"/>
+        </a:xfrm>
+      </p:grpSpPr>
+      <p:sp>
+        <p:nvSpPr>
+          <p:cNvPr id="2" name="Slide Image Placeholder 1"/>
+          <p:cNvSpPr>
+            <a:spLocks noGrp="1" noRot="1" noChangeAspect="1"/>
+          </p:cNvSpPr>
+          <p:nvPr>
+            <p:ph type="sldImg"/>
+          </p:nvPr>
+        </p:nvSpPr>
+        <p:spPr/>
+      </p:sp>
+      <p:sp>
+        <p:nvSpPr>
+          <p:cNvPr id="3" name="Notes Placeholder 2"/>
+          <p:cNvSpPr>
+            <a:spLocks noGrp="1"/>
+          </p:cNvSpPr>
+          <p:nvPr>
+            <p:ph type="body" idx="1"/>
+          </p:nvPr>
+        </p:nvSpPr>
+        <p:spPr/>
+        <p:txBody>
+          <a:bodyPr/>
+          <a:lstStyle/>
+          <a:p>
             <a:endParaRPr lang="en-US" dirty="0"/>
           </a:p>
         </p:txBody>
@@ -9497,7 +9497,7 @@
                 <a:ea typeface="Aptos" pitchFamily="34" charset="-122"/>
                 <a:cs typeface="Aptos" pitchFamily="34" charset="-120"/>
               </a:rPr>
-              <a:t>8/13</a:t>
+              <a:t>12/13</a:t>
             </a:r>
             <a:endParaRPr lang="en-US" sz="750" dirty="0"/>
           </a:p>
@@ -13926,6 +13926,17 @@
               <a:defRPr/>
             </a:pPr>
             <a:r>
+              <a:rPr lang="en-US" sz="750" dirty="0">
+                <a:solidFill>
+                  <a:srgbClr val="3F5379"/>
+                </a:solidFill>
+                <a:latin typeface="Aptos" pitchFamily="34" charset="0"/>
+                <a:ea typeface="Aptos" pitchFamily="34" charset="-122"/>
+                <a:cs typeface="Aptos" pitchFamily="34" charset="-120"/>
+              </a:rPr>
+              <a:t>13</a:t>
+            </a:r>
+            <a:r>
               <a:rPr kumimoji="0" lang="en-US" sz="750" b="0" i="0" u="none" strike="noStrike" kern="1200" cap="none" spc="0" normalizeH="0" baseline="0" noProof="0" dirty="0">
                 <a:ln>
                   <a:noFill/>
@@ -13940,7 +13951,7 @@
                 <a:ea typeface="Aptos" pitchFamily="34" charset="-122"/>
                 <a:cs typeface="Aptos" pitchFamily="34" charset="-120"/>
               </a:rPr>
-              <a:t>8/13</a:t>
+              <a:t>/13</a:t>
             </a:r>
             <a:endParaRPr kumimoji="0" lang="en-US" sz="750" b="0" i="0" u="none" strike="noStrike" kern="1200" cap="none" spc="0" normalizeH="0" baseline="0" noProof="0" dirty="0">
               <a:ln>
@@ -15296,7 +15307,7 @@
                 <a:ea typeface="Aptos" pitchFamily="34" charset="-122"/>
                 <a:cs typeface="Aptos" pitchFamily="34" charset="-120"/>
               </a:rPr>
-              <a:t>4 CNC machines</a:t>
+              <a:t>6 CNC machines</a:t>
             </a:r>
           </a:p>
           <a:p>
@@ -15313,7 +15324,24 @@
                 <a:ea typeface="Aptos" pitchFamily="34" charset="-122"/>
                 <a:cs typeface="Aptos" pitchFamily="34" charset="-120"/>
               </a:rPr>
-              <a:t>4 bending machines</a:t>
+              <a:t>2 bending machines</a:t>
+            </a:r>
+          </a:p>
+          <a:p>
+            <a:pPr marL="171450" indent="-171450">
+              <a:buFont typeface="Arial" panose="020B0604020202020204" pitchFamily="34" charset="0"/>
+              <a:buChar char="•"/>
+            </a:pPr>
+            <a:r>
+              <a:rPr lang="en-US" sz="950" dirty="0">
+                <a:solidFill>
+                  <a:srgbClr val="9DBEF0"/>
+                </a:solidFill>
+                <a:latin typeface="Aptos" pitchFamily="34" charset="0"/>
+                <a:ea typeface="Aptos" pitchFamily="34" charset="-122"/>
+                <a:cs typeface="Aptos" pitchFamily="34" charset="-120"/>
+              </a:rPr>
+              <a:t>1 laser router</a:t>
             </a:r>
           </a:p>
           <a:p>
@@ -22683,7 +22711,7 @@
                 <a:ea typeface="Aptos" pitchFamily="34" charset="-122"/>
                 <a:cs typeface="Aptos" pitchFamily="34" charset="-120"/>
               </a:rPr>
-              <a:t>7/13</a:t>
+              <a:t>4/13</a:t>
             </a:r>
             <a:endParaRPr lang="en-US" sz="750" dirty="0"/>
           </a:p>
@@ -25042,3142 +25070,6 @@
 </file>
 
 <file path=ppt/slides/slide5.xml><?xml version="1.0" encoding="utf-8"?>
-<p:sld xmlns:a="http://schemas.openxmlformats.org/drawingml/2006/main" xmlns:r="http://schemas.openxmlformats.org/officeDocument/2006/relationships" xmlns:p="http://schemas.openxmlformats.org/presentationml/2006/main">
-  <p:cSld name="Slide 5">
-    <p:bg>
-      <p:bgPr>
-        <a:solidFill>
-          <a:srgbClr val="03060F"/>
-        </a:solidFill>
-        <a:effectLst/>
-      </p:bgPr>
-    </p:bg>
-    <p:spTree>
-      <p:nvGrpSpPr>
-        <p:cNvPr id="1" name=""/>
-        <p:cNvGrpSpPr/>
-        <p:nvPr/>
-      </p:nvGrpSpPr>
-      <p:grpSpPr>
-        <a:xfrm>
-          <a:off x="0" y="0"/>
-          <a:ext cx="0" cy="0"/>
-          <a:chOff x="0" y="0"/>
-          <a:chExt cx="0" cy="0"/>
-        </a:xfrm>
-      </p:grpSpPr>
-      <p:sp>
-        <p:nvSpPr>
-          <p:cNvPr id="2" name="Shape 0"/>
-          <p:cNvSpPr/>
-          <p:nvPr/>
-        </p:nvSpPr>
-        <p:spPr>
-          <a:xfrm>
-            <a:off x="6035040" y="-1828800"/>
-            <a:ext cx="5029200" cy="5029200"/>
-          </a:xfrm>
-          <a:prstGeom prst="ellipse">
-            <a:avLst/>
-          </a:prstGeom>
-          <a:solidFill>
-            <a:srgbClr val="0B1E4D">
-              <a:alpha val="20000"/>
-            </a:srgbClr>
-          </a:solidFill>
-          <a:ln w="12700">
-            <a:solidFill>
-              <a:srgbClr val="0B1E4D">
-                <a:alpha val="0"/>
-              </a:srgbClr>
-            </a:solidFill>
-            <a:prstDash val="solid"/>
-          </a:ln>
-        </p:spPr>
-        <p:txBody>
-          <a:bodyPr/>
-          <a:lstStyle/>
-          <a:p>
-            <a:endParaRPr lang="en-US"/>
-          </a:p>
-        </p:txBody>
-      </p:sp>
-      <p:sp>
-        <p:nvSpPr>
-          <p:cNvPr id="3" name="Shape 1"/>
-          <p:cNvSpPr/>
-          <p:nvPr/>
-        </p:nvSpPr>
-        <p:spPr>
-          <a:xfrm>
-            <a:off x="0" y="0"/>
-            <a:ext cx="9144000" cy="658368"/>
-          </a:xfrm>
-          <a:prstGeom prst="rect">
-            <a:avLst/>
-          </a:prstGeom>
-          <a:solidFill>
-            <a:srgbClr val="0B1733"/>
-          </a:solidFill>
-          <a:ln w="12700">
-            <a:solidFill>
-              <a:srgbClr val="0B1733"/>
-            </a:solidFill>
-            <a:prstDash val="solid"/>
-          </a:ln>
-        </p:spPr>
-        <p:txBody>
-          <a:bodyPr/>
-          <a:lstStyle/>
-          <a:p>
-            <a:endParaRPr lang="en-US"/>
-          </a:p>
-        </p:txBody>
-      </p:sp>
-      <p:sp>
-        <p:nvSpPr>
-          <p:cNvPr id="4" name="Shape 2"/>
-          <p:cNvSpPr/>
-          <p:nvPr/>
-        </p:nvSpPr>
-        <p:spPr>
-          <a:xfrm>
-            <a:off x="0" y="658368"/>
-            <a:ext cx="9144000" cy="20117"/>
-          </a:xfrm>
-          <a:prstGeom prst="rect">
-            <a:avLst/>
-          </a:prstGeom>
-          <a:solidFill>
-            <a:srgbClr val="36E0FF"/>
-          </a:solidFill>
-          <a:ln w="12700">
-            <a:solidFill>
-              <a:srgbClr val="36E0FF"/>
-            </a:solidFill>
-            <a:prstDash val="solid"/>
-          </a:ln>
-          <a:effectLst>
-            <a:outerShdw blurRad="114300" dist="50800" dir="16200000" algn="bl" rotWithShape="0">
-              <a:srgbClr val="36E0FF">
-                <a:alpha val="70000"/>
-              </a:srgbClr>
-            </a:outerShdw>
-          </a:effectLst>
-        </p:spPr>
-        <p:txBody>
-          <a:bodyPr/>
-          <a:lstStyle/>
-          <a:p>
-            <a:endParaRPr lang="en-US"/>
-          </a:p>
-        </p:txBody>
-      </p:sp>
-      <p:sp>
-        <p:nvSpPr>
-          <p:cNvPr id="5" name="Shape 3"/>
-          <p:cNvSpPr/>
-          <p:nvPr/>
-        </p:nvSpPr>
-        <p:spPr>
-          <a:xfrm>
-            <a:off x="0" y="0"/>
-            <a:ext cx="45720" cy="5143500"/>
-          </a:xfrm>
-          <a:prstGeom prst="rect">
-            <a:avLst/>
-          </a:prstGeom>
-          <a:solidFill>
-            <a:srgbClr val="36E0FF"/>
-          </a:solidFill>
-          <a:ln w="12700">
-            <a:solidFill>
-              <a:srgbClr val="36E0FF"/>
-            </a:solidFill>
-            <a:prstDash val="solid"/>
-          </a:ln>
-          <a:effectLst>
-            <a:outerShdw blurRad="88900" dist="50800" dir="16200000" algn="bl" rotWithShape="0">
-              <a:srgbClr val="36E0FF">
-                <a:alpha val="60000"/>
-              </a:srgbClr>
-            </a:outerShdw>
-          </a:effectLst>
-        </p:spPr>
-        <p:txBody>
-          <a:bodyPr/>
-          <a:lstStyle/>
-          <a:p>
-            <a:endParaRPr lang="en-US"/>
-          </a:p>
-        </p:txBody>
-      </p:sp>
-      <p:sp>
-        <p:nvSpPr>
-          <p:cNvPr id="6" name="Shape 4"/>
-          <p:cNvSpPr/>
-          <p:nvPr/>
-        </p:nvSpPr>
-        <p:spPr>
-          <a:xfrm>
-            <a:off x="-22860" y="1417320"/>
-            <a:ext cx="91440" cy="91440"/>
-          </a:xfrm>
-          <a:prstGeom prst="ellipse">
-            <a:avLst/>
-          </a:prstGeom>
-          <a:solidFill>
-            <a:srgbClr val="36E0FF"/>
-          </a:solidFill>
-          <a:ln w="6350">
-            <a:solidFill>
-              <a:srgbClr val="36E0FF"/>
-            </a:solidFill>
-            <a:prstDash val="solid"/>
-          </a:ln>
-          <a:effectLst>
-            <a:outerShdw blurRad="139700" dist="50800" dir="16200000" algn="bl" rotWithShape="0">
-              <a:srgbClr val="36E0FF">
-                <a:alpha val="70000"/>
-              </a:srgbClr>
-            </a:outerShdw>
-          </a:effectLst>
-        </p:spPr>
-        <p:txBody>
-          <a:bodyPr/>
-          <a:lstStyle/>
-          <a:p>
-            <a:endParaRPr lang="en-US"/>
-          </a:p>
-        </p:txBody>
-      </p:sp>
-      <p:sp>
-        <p:nvSpPr>
-          <p:cNvPr id="7" name="Shape 5"/>
-          <p:cNvSpPr/>
-          <p:nvPr/>
-        </p:nvSpPr>
-        <p:spPr>
-          <a:xfrm>
-            <a:off x="3658" y="1443838"/>
-            <a:ext cx="38405" cy="38405"/>
-          </a:xfrm>
-          <a:prstGeom prst="ellipse">
-            <a:avLst/>
-          </a:prstGeom>
-          <a:solidFill>
-            <a:srgbClr val="DCE9FF"/>
-          </a:solidFill>
-          <a:ln w="12700">
-            <a:solidFill>
-              <a:srgbClr val="DCE9FF"/>
-            </a:solidFill>
-            <a:prstDash val="solid"/>
-          </a:ln>
-        </p:spPr>
-        <p:txBody>
-          <a:bodyPr/>
-          <a:lstStyle/>
-          <a:p>
-            <a:endParaRPr lang="en-US"/>
-          </a:p>
-        </p:txBody>
-      </p:sp>
-      <p:sp>
-        <p:nvSpPr>
-          <p:cNvPr id="8" name="Shape 6"/>
-          <p:cNvSpPr/>
-          <p:nvPr/>
-        </p:nvSpPr>
-        <p:spPr>
-          <a:xfrm>
-            <a:off x="-13716" y="3072384"/>
-            <a:ext cx="73152" cy="73152"/>
-          </a:xfrm>
-          <a:prstGeom prst="ellipse">
-            <a:avLst/>
-          </a:prstGeom>
-          <a:solidFill>
-            <a:srgbClr val="36E0FF"/>
-          </a:solidFill>
-          <a:ln w="6350">
-            <a:solidFill>
-              <a:srgbClr val="36E0FF"/>
-            </a:solidFill>
-            <a:prstDash val="solid"/>
-          </a:ln>
-          <a:effectLst>
-            <a:outerShdw blurRad="139700" dist="50800" dir="16200000" algn="bl" rotWithShape="0">
-              <a:srgbClr val="36E0FF">
-                <a:alpha val="70000"/>
-              </a:srgbClr>
-            </a:outerShdw>
-          </a:effectLst>
-        </p:spPr>
-        <p:txBody>
-          <a:bodyPr/>
-          <a:lstStyle/>
-          <a:p>
-            <a:endParaRPr lang="en-US"/>
-          </a:p>
-        </p:txBody>
-      </p:sp>
-      <p:sp>
-        <p:nvSpPr>
-          <p:cNvPr id="9" name="Shape 7"/>
-          <p:cNvSpPr/>
-          <p:nvPr/>
-        </p:nvSpPr>
-        <p:spPr>
-          <a:xfrm>
-            <a:off x="7498" y="3093598"/>
-            <a:ext cx="30724" cy="30724"/>
-          </a:xfrm>
-          <a:prstGeom prst="ellipse">
-            <a:avLst/>
-          </a:prstGeom>
-          <a:solidFill>
-            <a:srgbClr val="DCE9FF"/>
-          </a:solidFill>
-          <a:ln w="12700">
-            <a:solidFill>
-              <a:srgbClr val="DCE9FF"/>
-            </a:solidFill>
-            <a:prstDash val="solid"/>
-          </a:ln>
-        </p:spPr>
-        <p:txBody>
-          <a:bodyPr/>
-          <a:lstStyle/>
-          <a:p>
-            <a:endParaRPr lang="en-US"/>
-          </a:p>
-        </p:txBody>
-      </p:sp>
-      <p:sp>
-        <p:nvSpPr>
-          <p:cNvPr id="10" name="Shape 8"/>
-          <p:cNvSpPr/>
-          <p:nvPr/>
-        </p:nvSpPr>
-        <p:spPr>
-          <a:xfrm>
-            <a:off x="7955280" y="310896"/>
-            <a:ext cx="502920" cy="0"/>
-          </a:xfrm>
-          <a:prstGeom prst="line">
-            <a:avLst/>
-          </a:prstGeom>
-          <a:noFill/>
-          <a:ln w="12700">
-            <a:solidFill>
-              <a:srgbClr val="36E0FF">
-                <a:alpha val="70000"/>
-              </a:srgbClr>
-            </a:solidFill>
-            <a:prstDash val="solid"/>
-          </a:ln>
-        </p:spPr>
-        <p:txBody>
-          <a:bodyPr/>
-          <a:lstStyle/>
-          <a:p>
-            <a:endParaRPr lang="en-US"/>
-          </a:p>
-        </p:txBody>
-      </p:sp>
-      <p:sp>
-        <p:nvSpPr>
-          <p:cNvPr id="11" name="Shape 9"/>
-          <p:cNvSpPr/>
-          <p:nvPr/>
-        </p:nvSpPr>
-        <p:spPr>
-          <a:xfrm>
-            <a:off x="8458200" y="182880"/>
-            <a:ext cx="338328" cy="274320"/>
-          </a:xfrm>
-          <a:prstGeom prst="line">
-            <a:avLst/>
-          </a:prstGeom>
-          <a:noFill/>
-          <a:ln w="12700">
-            <a:solidFill>
-              <a:srgbClr val="36E0FF">
-                <a:alpha val="70000"/>
-              </a:srgbClr>
-            </a:solidFill>
-            <a:prstDash val="solid"/>
-          </a:ln>
-        </p:spPr>
-        <p:txBody>
-          <a:bodyPr/>
-          <a:lstStyle/>
-          <a:p>
-            <a:endParaRPr lang="en-US"/>
-          </a:p>
-        </p:txBody>
-      </p:sp>
-      <p:sp>
-        <p:nvSpPr>
-          <p:cNvPr id="12" name="Shape 10"/>
-          <p:cNvSpPr/>
-          <p:nvPr/>
-        </p:nvSpPr>
-        <p:spPr>
-          <a:xfrm>
-            <a:off x="7955280" y="310896"/>
-            <a:ext cx="274320" cy="219456"/>
-          </a:xfrm>
-          <a:prstGeom prst="line">
-            <a:avLst/>
-          </a:prstGeom>
-          <a:noFill/>
-          <a:ln w="12700">
-            <a:solidFill>
-              <a:srgbClr val="36E0FF">
-                <a:alpha val="55000"/>
-              </a:srgbClr>
-            </a:solidFill>
-            <a:prstDash val="solid"/>
-          </a:ln>
-        </p:spPr>
-        <p:txBody>
-          <a:bodyPr/>
-          <a:lstStyle/>
-          <a:p>
-            <a:endParaRPr lang="en-US"/>
-          </a:p>
-        </p:txBody>
-      </p:sp>
-      <p:sp>
-        <p:nvSpPr>
-          <p:cNvPr id="13" name="Shape 11"/>
-          <p:cNvSpPr/>
-          <p:nvPr/>
-        </p:nvSpPr>
-        <p:spPr>
-          <a:xfrm>
-            <a:off x="7914132" y="269748"/>
-            <a:ext cx="82296" cy="82296"/>
-          </a:xfrm>
-          <a:prstGeom prst="ellipse">
-            <a:avLst/>
-          </a:prstGeom>
-          <a:solidFill>
-            <a:srgbClr val="36E0FF"/>
-          </a:solidFill>
-          <a:ln w="6350">
-            <a:solidFill>
-              <a:srgbClr val="36E0FF"/>
-            </a:solidFill>
-            <a:prstDash val="solid"/>
-          </a:ln>
-          <a:effectLst>
-            <a:outerShdw blurRad="139700" dist="50800" dir="16200000" algn="bl" rotWithShape="0">
-              <a:srgbClr val="36E0FF">
-                <a:alpha val="70000"/>
-              </a:srgbClr>
-            </a:outerShdw>
-          </a:effectLst>
-        </p:spPr>
-        <p:txBody>
-          <a:bodyPr/>
-          <a:lstStyle/>
-          <a:p>
-            <a:endParaRPr lang="en-US"/>
-          </a:p>
-        </p:txBody>
-      </p:sp>
-      <p:sp>
-        <p:nvSpPr>
-          <p:cNvPr id="14" name="Shape 12"/>
-          <p:cNvSpPr/>
-          <p:nvPr/>
-        </p:nvSpPr>
-        <p:spPr>
-          <a:xfrm>
-            <a:off x="7937998" y="293614"/>
-            <a:ext cx="34564" cy="34564"/>
-          </a:xfrm>
-          <a:prstGeom prst="ellipse">
-            <a:avLst/>
-          </a:prstGeom>
-          <a:solidFill>
-            <a:srgbClr val="DCE9FF"/>
-          </a:solidFill>
-          <a:ln w="12700">
-            <a:solidFill>
-              <a:srgbClr val="DCE9FF"/>
-            </a:solidFill>
-            <a:prstDash val="solid"/>
-          </a:ln>
-        </p:spPr>
-        <p:txBody>
-          <a:bodyPr/>
-          <a:lstStyle/>
-          <a:p>
-            <a:endParaRPr lang="en-US"/>
-          </a:p>
-        </p:txBody>
-      </p:sp>
-      <p:sp>
-        <p:nvSpPr>
-          <p:cNvPr id="15" name="Shape 13"/>
-          <p:cNvSpPr/>
-          <p:nvPr/>
-        </p:nvSpPr>
-        <p:spPr>
-          <a:xfrm>
-            <a:off x="8407908" y="132588"/>
-            <a:ext cx="100584" cy="100584"/>
-          </a:xfrm>
-          <a:prstGeom prst="ellipse">
-            <a:avLst/>
-          </a:prstGeom>
-          <a:solidFill>
-            <a:srgbClr val="36E0FF"/>
-          </a:solidFill>
-          <a:ln w="6350">
-            <a:solidFill>
-              <a:srgbClr val="36E0FF"/>
-            </a:solidFill>
-            <a:prstDash val="solid"/>
-          </a:ln>
-          <a:effectLst>
-            <a:outerShdw blurRad="139700" dist="50800" dir="16200000" algn="bl" rotWithShape="0">
-              <a:srgbClr val="36E0FF">
-                <a:alpha val="70000"/>
-              </a:srgbClr>
-            </a:outerShdw>
-          </a:effectLst>
-        </p:spPr>
-        <p:txBody>
-          <a:bodyPr/>
-          <a:lstStyle/>
-          <a:p>
-            <a:endParaRPr lang="en-US"/>
-          </a:p>
-        </p:txBody>
-      </p:sp>
-      <p:sp>
-        <p:nvSpPr>
-          <p:cNvPr id="16" name="Shape 14"/>
-          <p:cNvSpPr/>
-          <p:nvPr/>
-        </p:nvSpPr>
-        <p:spPr>
-          <a:xfrm>
-            <a:off x="8437077" y="161757"/>
-            <a:ext cx="42245" cy="42245"/>
-          </a:xfrm>
-          <a:prstGeom prst="ellipse">
-            <a:avLst/>
-          </a:prstGeom>
-          <a:solidFill>
-            <a:srgbClr val="DCE9FF"/>
-          </a:solidFill>
-          <a:ln w="12700">
-            <a:solidFill>
-              <a:srgbClr val="DCE9FF"/>
-            </a:solidFill>
-            <a:prstDash val="solid"/>
-          </a:ln>
-        </p:spPr>
-        <p:txBody>
-          <a:bodyPr/>
-          <a:lstStyle/>
-          <a:p>
-            <a:endParaRPr lang="en-US"/>
-          </a:p>
-        </p:txBody>
-      </p:sp>
-      <p:sp>
-        <p:nvSpPr>
-          <p:cNvPr id="17" name="Shape 15"/>
-          <p:cNvSpPr/>
-          <p:nvPr/>
-        </p:nvSpPr>
-        <p:spPr>
-          <a:xfrm>
-            <a:off x="8759952" y="420624"/>
-            <a:ext cx="73152" cy="73152"/>
-          </a:xfrm>
-          <a:prstGeom prst="ellipse">
-            <a:avLst/>
-          </a:prstGeom>
-          <a:solidFill>
-            <a:srgbClr val="36E0FF"/>
-          </a:solidFill>
-          <a:ln w="6350">
-            <a:solidFill>
-              <a:srgbClr val="36E0FF"/>
-            </a:solidFill>
-            <a:prstDash val="solid"/>
-          </a:ln>
-          <a:effectLst>
-            <a:outerShdw blurRad="139700" dist="50800" dir="16200000" algn="bl" rotWithShape="0">
-              <a:srgbClr val="36E0FF">
-                <a:alpha val="70000"/>
-              </a:srgbClr>
-            </a:outerShdw>
-          </a:effectLst>
-        </p:spPr>
-        <p:txBody>
-          <a:bodyPr/>
-          <a:lstStyle/>
-          <a:p>
-            <a:endParaRPr lang="en-US"/>
-          </a:p>
-        </p:txBody>
-      </p:sp>
-      <p:sp>
-        <p:nvSpPr>
-          <p:cNvPr id="18" name="Shape 16"/>
-          <p:cNvSpPr/>
-          <p:nvPr/>
-        </p:nvSpPr>
-        <p:spPr>
-          <a:xfrm>
-            <a:off x="8781166" y="441838"/>
-            <a:ext cx="30724" cy="30724"/>
-          </a:xfrm>
-          <a:prstGeom prst="ellipse">
-            <a:avLst/>
-          </a:prstGeom>
-          <a:solidFill>
-            <a:srgbClr val="DCE9FF"/>
-          </a:solidFill>
-          <a:ln w="12700">
-            <a:solidFill>
-              <a:srgbClr val="DCE9FF"/>
-            </a:solidFill>
-            <a:prstDash val="solid"/>
-          </a:ln>
-        </p:spPr>
-        <p:txBody>
-          <a:bodyPr/>
-          <a:lstStyle/>
-          <a:p>
-            <a:endParaRPr lang="en-US"/>
-          </a:p>
-        </p:txBody>
-      </p:sp>
-      <p:sp>
-        <p:nvSpPr>
-          <p:cNvPr id="19" name="Shape 17"/>
-          <p:cNvSpPr/>
-          <p:nvPr/>
-        </p:nvSpPr>
-        <p:spPr>
-          <a:xfrm>
-            <a:off x="8197596" y="498348"/>
-            <a:ext cx="64008" cy="64008"/>
-          </a:xfrm>
-          <a:prstGeom prst="ellipse">
-            <a:avLst/>
-          </a:prstGeom>
-          <a:solidFill>
-            <a:srgbClr val="5B9BFF"/>
-          </a:solidFill>
-          <a:ln w="6350">
-            <a:solidFill>
-              <a:srgbClr val="5B9BFF"/>
-            </a:solidFill>
-            <a:prstDash val="solid"/>
-          </a:ln>
-          <a:effectLst>
-            <a:outerShdw blurRad="139700" dist="50800" dir="16200000" algn="bl" rotWithShape="0">
-              <a:srgbClr val="5B9BFF">
-                <a:alpha val="70000"/>
-              </a:srgbClr>
-            </a:outerShdw>
-          </a:effectLst>
-        </p:spPr>
-        <p:txBody>
-          <a:bodyPr/>
-          <a:lstStyle/>
-          <a:p>
-            <a:endParaRPr lang="en-US"/>
-          </a:p>
-        </p:txBody>
-      </p:sp>
-      <p:sp>
-        <p:nvSpPr>
-          <p:cNvPr id="20" name="Shape 18"/>
-          <p:cNvSpPr/>
-          <p:nvPr/>
-        </p:nvSpPr>
-        <p:spPr>
-          <a:xfrm>
-            <a:off x="8216158" y="516910"/>
-            <a:ext cx="26883" cy="26883"/>
-          </a:xfrm>
-          <a:prstGeom prst="ellipse">
-            <a:avLst/>
-          </a:prstGeom>
-          <a:solidFill>
-            <a:srgbClr val="DCE9FF"/>
-          </a:solidFill>
-          <a:ln w="12700">
-            <a:solidFill>
-              <a:srgbClr val="DCE9FF"/>
-            </a:solidFill>
-            <a:prstDash val="solid"/>
-          </a:ln>
-        </p:spPr>
-        <p:txBody>
-          <a:bodyPr/>
-          <a:lstStyle/>
-          <a:p>
-            <a:endParaRPr lang="en-US"/>
-          </a:p>
-        </p:txBody>
-      </p:sp>
-      <p:sp>
-        <p:nvSpPr>
-          <p:cNvPr id="21" name="Text 19"/>
-          <p:cNvSpPr/>
-          <p:nvPr/>
-        </p:nvSpPr>
-        <p:spPr>
-          <a:xfrm>
-            <a:off x="274320" y="82296"/>
-            <a:ext cx="7315200" cy="347472"/>
-          </a:xfrm>
-          <a:prstGeom prst="rect">
-            <a:avLst/>
-          </a:prstGeom>
-          <a:noFill/>
-          <a:ln/>
-        </p:spPr>
-        <p:txBody>
-          <a:bodyPr wrap="square" rtlCol="0" anchor="ctr"/>
-          <a:lstStyle/>
-          <a:p>
-            <a:pPr marL="0" indent="0">
-              <a:buNone/>
-            </a:pPr>
-            <a:r>
-              <a:rPr lang="en-US" sz="2000" b="1" dirty="0">
-                <a:solidFill>
-                  <a:srgbClr val="EAF2FF"/>
-                </a:solidFill>
-                <a:latin typeface="Aptos" pitchFamily="34" charset="0"/>
-                <a:ea typeface="Aptos" pitchFamily="34" charset="-122"/>
-                <a:cs typeface="Aptos" pitchFamily="34" charset="-120"/>
-              </a:rPr>
-              <a:t>Data Flow</a:t>
-            </a:r>
-            <a:endParaRPr lang="en-US" sz="2000" dirty="0"/>
-          </a:p>
-        </p:txBody>
-      </p:sp>
-      <p:sp>
-        <p:nvSpPr>
-          <p:cNvPr id="22" name="Text 20"/>
-          <p:cNvSpPr/>
-          <p:nvPr/>
-        </p:nvSpPr>
-        <p:spPr>
-          <a:xfrm>
-            <a:off x="274320" y="420624"/>
-            <a:ext cx="7498080" cy="201168"/>
-          </a:xfrm>
-          <a:prstGeom prst="rect">
-            <a:avLst/>
-          </a:prstGeom>
-          <a:noFill/>
-          <a:ln/>
-        </p:spPr>
-        <p:txBody>
-          <a:bodyPr wrap="square" rtlCol="0" anchor="ctr"/>
-          <a:lstStyle/>
-          <a:p>
-            <a:pPr marL="0" indent="0">
-              <a:buNone/>
-            </a:pPr>
-            <a:r>
-              <a:rPr lang="en-US" sz="950" i="1" dirty="0">
-                <a:solidFill>
-                  <a:srgbClr val="9DBEF0"/>
-                </a:solidFill>
-                <a:latin typeface="Aptos" pitchFamily="34" charset="0"/>
-                <a:ea typeface="Aptos" pitchFamily="34" charset="-122"/>
-                <a:cs typeface="Aptos" pitchFamily="34" charset="-120"/>
-              </a:rPr>
-              <a:t>How a question becomes a trusted, traceable answer</a:t>
-            </a:r>
-            <a:endParaRPr lang="en-US" sz="950" dirty="0"/>
-          </a:p>
-        </p:txBody>
-      </p:sp>
-      <p:sp>
-        <p:nvSpPr>
-          <p:cNvPr id="23" name="Shape 21"/>
-          <p:cNvSpPr/>
-          <p:nvPr/>
-        </p:nvSpPr>
-        <p:spPr>
-          <a:xfrm>
-            <a:off x="0" y="4956048"/>
-            <a:ext cx="9144000" cy="187452"/>
-          </a:xfrm>
-          <a:prstGeom prst="rect">
-            <a:avLst/>
-          </a:prstGeom>
-          <a:solidFill>
-            <a:srgbClr val="0B1733"/>
-          </a:solidFill>
-          <a:ln w="12700">
-            <a:solidFill>
-              <a:srgbClr val="0B1733"/>
-            </a:solidFill>
-            <a:prstDash val="solid"/>
-          </a:ln>
-        </p:spPr>
-        <p:txBody>
-          <a:bodyPr/>
-          <a:lstStyle/>
-          <a:p>
-            <a:endParaRPr lang="en-US"/>
-          </a:p>
-        </p:txBody>
-      </p:sp>
-      <p:sp>
-        <p:nvSpPr>
-          <p:cNvPr id="24" name="Shape 22"/>
-          <p:cNvSpPr/>
-          <p:nvPr/>
-        </p:nvSpPr>
-        <p:spPr>
-          <a:xfrm>
-            <a:off x="0" y="4956048"/>
-            <a:ext cx="9144000" cy="16459"/>
-          </a:xfrm>
-          <a:prstGeom prst="rect">
-            <a:avLst/>
-          </a:prstGeom>
-          <a:solidFill>
-            <a:srgbClr val="2E5BC9"/>
-          </a:solidFill>
-          <a:ln w="12700">
-            <a:solidFill>
-              <a:srgbClr val="2E5BC9"/>
-            </a:solidFill>
-            <a:prstDash val="solid"/>
-          </a:ln>
-        </p:spPr>
-        <p:txBody>
-          <a:bodyPr/>
-          <a:lstStyle/>
-          <a:p>
-            <a:endParaRPr lang="en-US"/>
-          </a:p>
-        </p:txBody>
-      </p:sp>
-      <p:sp>
-        <p:nvSpPr>
-          <p:cNvPr id="25" name="Text 23"/>
-          <p:cNvSpPr/>
-          <p:nvPr/>
-        </p:nvSpPr>
-        <p:spPr>
-          <a:xfrm>
-            <a:off x="274320" y="4974336"/>
-            <a:ext cx="7315200" cy="164592"/>
-          </a:xfrm>
-          <a:prstGeom prst="rect">
-            <a:avLst/>
-          </a:prstGeom>
-          <a:noFill/>
-          <a:ln/>
-        </p:spPr>
-        <p:txBody>
-          <a:bodyPr wrap="square" rtlCol="0" anchor="ctr"/>
-          <a:lstStyle/>
-          <a:p>
-            <a:pPr marL="0" indent="0">
-              <a:buNone/>
-            </a:pPr>
-            <a:r>
-              <a:rPr lang="en-US" sz="750" dirty="0">
-                <a:solidFill>
-                  <a:srgbClr val="3F5379"/>
-                </a:solidFill>
-                <a:latin typeface="Aptos" pitchFamily="34" charset="0"/>
-                <a:ea typeface="Aptos" pitchFamily="34" charset="-122"/>
-                <a:cs typeface="Aptos" pitchFamily="34" charset="-120"/>
-              </a:rPr>
-              <a:t>Vulkan Werke  ·  SilverTrust Consulting  ·  Confidential</a:t>
-            </a:r>
-            <a:endParaRPr lang="en-US" sz="750" dirty="0"/>
-          </a:p>
-        </p:txBody>
-      </p:sp>
-      <p:sp>
-        <p:nvSpPr>
-          <p:cNvPr id="26" name="Text 24"/>
-          <p:cNvSpPr/>
-          <p:nvPr/>
-        </p:nvSpPr>
-        <p:spPr>
-          <a:xfrm>
-            <a:off x="8229600" y="4974336"/>
-            <a:ext cx="822960" cy="164592"/>
-          </a:xfrm>
-          <a:prstGeom prst="rect">
-            <a:avLst/>
-          </a:prstGeom>
-          <a:noFill/>
-          <a:ln/>
-        </p:spPr>
-        <p:txBody>
-          <a:bodyPr wrap="square" rtlCol="0" anchor="ctr"/>
-          <a:lstStyle/>
-          <a:p>
-            <a:pPr marL="0" indent="0" algn="r">
-              <a:buNone/>
-            </a:pPr>
-            <a:r>
-              <a:rPr lang="en-US" sz="750" dirty="0">
-                <a:solidFill>
-                  <a:srgbClr val="3F5379"/>
-                </a:solidFill>
-                <a:latin typeface="Aptos" pitchFamily="34" charset="0"/>
-                <a:ea typeface="Aptos" pitchFamily="34" charset="-122"/>
-                <a:cs typeface="Aptos" pitchFamily="34" charset="-120"/>
-              </a:rPr>
-              <a:t>5/13</a:t>
-            </a:r>
-            <a:endParaRPr lang="en-US" sz="750" dirty="0"/>
-          </a:p>
-        </p:txBody>
-      </p:sp>
-      <p:sp>
-        <p:nvSpPr>
-          <p:cNvPr id="27" name="Text 25"/>
-          <p:cNvSpPr/>
-          <p:nvPr/>
-        </p:nvSpPr>
-        <p:spPr>
-          <a:xfrm>
-            <a:off x="274320" y="841248"/>
-            <a:ext cx="3657600" cy="256032"/>
-          </a:xfrm>
-          <a:prstGeom prst="rect">
-            <a:avLst/>
-          </a:prstGeom>
-          <a:noFill/>
-          <a:ln/>
-        </p:spPr>
-        <p:txBody>
-          <a:bodyPr wrap="square" rtlCol="0" anchor="ctr"/>
-          <a:lstStyle/>
-          <a:p>
-            <a:pPr marL="0" indent="0">
-              <a:buNone/>
-            </a:pPr>
-            <a:r>
-              <a:rPr lang="en-US" sz="1100" b="1" dirty="0">
-                <a:solidFill>
-                  <a:srgbClr val="6B82B5"/>
-                </a:solidFill>
-                <a:latin typeface="Aptos" pitchFamily="34" charset="0"/>
-                <a:ea typeface="Aptos" pitchFamily="34" charset="-122"/>
-                <a:cs typeface="Aptos" pitchFamily="34" charset="-120"/>
-              </a:rPr>
-              <a:t>Process pipeline</a:t>
-            </a:r>
-            <a:endParaRPr lang="en-US" sz="1100" dirty="0"/>
-          </a:p>
-        </p:txBody>
-      </p:sp>
-      <p:sp>
-        <p:nvSpPr>
-          <p:cNvPr id="28" name="Shape 26"/>
-          <p:cNvSpPr/>
-          <p:nvPr/>
-        </p:nvSpPr>
-        <p:spPr>
-          <a:xfrm>
-            <a:off x="365760" y="1170432"/>
-            <a:ext cx="4206240" cy="402336"/>
-          </a:xfrm>
-          <a:prstGeom prst="rect">
-            <a:avLst/>
-          </a:prstGeom>
-          <a:solidFill>
-            <a:srgbClr val="0A1430"/>
-          </a:solidFill>
-          <a:ln w="10160">
-            <a:solidFill>
-              <a:srgbClr val="6B82B5">
-                <a:alpha val="60000"/>
-              </a:srgbClr>
-            </a:solidFill>
-            <a:prstDash val="solid"/>
-          </a:ln>
-        </p:spPr>
-        <p:txBody>
-          <a:bodyPr/>
-          <a:lstStyle/>
-          <a:p>
-            <a:endParaRPr lang="en-US"/>
-          </a:p>
-        </p:txBody>
-      </p:sp>
-      <p:sp>
-        <p:nvSpPr>
-          <p:cNvPr id="29" name="Shape 27"/>
-          <p:cNvSpPr/>
-          <p:nvPr/>
-        </p:nvSpPr>
-        <p:spPr>
-          <a:xfrm>
-            <a:off x="530352" y="1307592"/>
-            <a:ext cx="128016" cy="128016"/>
-          </a:xfrm>
-          <a:prstGeom prst="ellipse">
-            <a:avLst/>
-          </a:prstGeom>
-          <a:solidFill>
-            <a:srgbClr val="6B82B5"/>
-          </a:solidFill>
-          <a:ln w="6350">
-            <a:solidFill>
-              <a:srgbClr val="6B82B5"/>
-            </a:solidFill>
-            <a:prstDash val="solid"/>
-          </a:ln>
-          <a:effectLst>
-            <a:outerShdw blurRad="139700" dist="50800" dir="16200000" algn="bl" rotWithShape="0">
-              <a:srgbClr val="6B82B5">
-                <a:alpha val="70000"/>
-              </a:srgbClr>
-            </a:outerShdw>
-          </a:effectLst>
-        </p:spPr>
-        <p:txBody>
-          <a:bodyPr/>
-          <a:lstStyle/>
-          <a:p>
-            <a:endParaRPr lang="en-US"/>
-          </a:p>
-        </p:txBody>
-      </p:sp>
-      <p:sp>
-        <p:nvSpPr>
-          <p:cNvPr id="30" name="Shape 28"/>
-          <p:cNvSpPr/>
-          <p:nvPr/>
-        </p:nvSpPr>
-        <p:spPr>
-          <a:xfrm>
-            <a:off x="567477" y="1344717"/>
-            <a:ext cx="53767" cy="53767"/>
-          </a:xfrm>
-          <a:prstGeom prst="ellipse">
-            <a:avLst/>
-          </a:prstGeom>
-          <a:solidFill>
-            <a:srgbClr val="DCE9FF"/>
-          </a:solidFill>
-          <a:ln w="12700">
-            <a:solidFill>
-              <a:srgbClr val="DCE9FF"/>
-            </a:solidFill>
-            <a:prstDash val="solid"/>
-          </a:ln>
-        </p:spPr>
-        <p:txBody>
-          <a:bodyPr/>
-          <a:lstStyle/>
-          <a:p>
-            <a:endParaRPr lang="en-US"/>
-          </a:p>
-        </p:txBody>
-      </p:sp>
-      <p:sp>
-        <p:nvSpPr>
-          <p:cNvPr id="31" name="Text 29"/>
-          <p:cNvSpPr/>
-          <p:nvPr/>
-        </p:nvSpPr>
-        <p:spPr>
-          <a:xfrm>
-            <a:off x="457200" y="1234440"/>
-            <a:ext cx="274320" cy="274320"/>
-          </a:xfrm>
-          <a:prstGeom prst="rect">
-            <a:avLst/>
-          </a:prstGeom>
-          <a:noFill/>
-          <a:ln/>
-        </p:spPr>
-        <p:txBody>
-          <a:bodyPr wrap="square" lIns="0" tIns="0" rIns="0" bIns="0" rtlCol="0" anchor="ctr"/>
-          <a:lstStyle/>
-          <a:p>
-            <a:pPr marL="0" indent="0" algn="ctr">
-              <a:buNone/>
-            </a:pPr>
-            <a:r>
-              <a:rPr lang="en-US" sz="900" b="1" dirty="0">
-                <a:solidFill>
-                  <a:srgbClr val="03060F"/>
-                </a:solidFill>
-                <a:latin typeface="Aptos" pitchFamily="34" charset="0"/>
-                <a:ea typeface="Aptos" pitchFamily="34" charset="-122"/>
-                <a:cs typeface="Aptos" pitchFamily="34" charset="-120"/>
-              </a:rPr>
-              <a:t>1</a:t>
-            </a:r>
-            <a:endParaRPr lang="en-US" sz="900" dirty="0"/>
-          </a:p>
-        </p:txBody>
-      </p:sp>
-      <p:sp>
-        <p:nvSpPr>
-          <p:cNvPr id="32" name="Text 30"/>
-          <p:cNvSpPr/>
-          <p:nvPr/>
-        </p:nvSpPr>
-        <p:spPr>
-          <a:xfrm>
-            <a:off x="841248" y="1170432"/>
-            <a:ext cx="3657600" cy="402336"/>
-          </a:xfrm>
-          <a:prstGeom prst="rect">
-            <a:avLst/>
-          </a:prstGeom>
-          <a:noFill/>
-          <a:ln/>
-        </p:spPr>
-        <p:txBody>
-          <a:bodyPr wrap="square" rtlCol="0" anchor="ctr"/>
-          <a:lstStyle/>
-          <a:p>
-            <a:pPr marL="0" indent="0">
-              <a:buNone/>
-            </a:pPr>
-            <a:r>
-              <a:rPr lang="en-US" sz="1100" dirty="0">
-                <a:solidFill>
-                  <a:srgbClr val="EAF2FF"/>
-                </a:solidFill>
-                <a:latin typeface="Aptos" pitchFamily="34" charset="0"/>
-                <a:ea typeface="Aptos" pitchFamily="34" charset="-122"/>
-                <a:cs typeface="Aptos" pitchFamily="34" charset="-120"/>
-              </a:rPr>
-              <a:t>User Question	</a:t>
-            </a:r>
-            <a:endParaRPr lang="en-US" sz="1100" dirty="0"/>
-          </a:p>
-        </p:txBody>
-      </p:sp>
-      <p:sp>
-        <p:nvSpPr>
-          <p:cNvPr id="33" name="Shape 31"/>
-          <p:cNvSpPr/>
-          <p:nvPr/>
-        </p:nvSpPr>
-        <p:spPr>
-          <a:xfrm>
-            <a:off x="594360" y="1572768"/>
-            <a:ext cx="0" cy="109728"/>
-          </a:xfrm>
-          <a:prstGeom prst="line">
-            <a:avLst/>
-          </a:prstGeom>
-          <a:noFill/>
-          <a:ln w="12700">
-            <a:solidFill>
-              <a:srgbClr val="6B82B5">
-                <a:alpha val="65000"/>
-              </a:srgbClr>
-            </a:solidFill>
-            <a:prstDash val="solid"/>
-          </a:ln>
-        </p:spPr>
-        <p:txBody>
-          <a:bodyPr/>
-          <a:lstStyle/>
-          <a:p>
-            <a:endParaRPr lang="en-US"/>
-          </a:p>
-        </p:txBody>
-      </p:sp>
-      <p:sp>
-        <p:nvSpPr>
-          <p:cNvPr id="34" name="Shape 32"/>
-          <p:cNvSpPr/>
-          <p:nvPr/>
-        </p:nvSpPr>
-        <p:spPr>
-          <a:xfrm>
-            <a:off x="365760" y="1682496"/>
-            <a:ext cx="4206240" cy="402336"/>
-          </a:xfrm>
-          <a:prstGeom prst="rect">
-            <a:avLst/>
-          </a:prstGeom>
-          <a:solidFill>
-            <a:srgbClr val="0A1430"/>
-          </a:solidFill>
-          <a:ln w="10160">
-            <a:solidFill>
-              <a:srgbClr val="FF5FA8">
-                <a:alpha val="60000"/>
-              </a:srgbClr>
-            </a:solidFill>
-            <a:prstDash val="solid"/>
-          </a:ln>
-        </p:spPr>
-        <p:txBody>
-          <a:bodyPr/>
-          <a:lstStyle/>
-          <a:p>
-            <a:endParaRPr lang="en-US"/>
-          </a:p>
-        </p:txBody>
-      </p:sp>
-      <p:sp>
-        <p:nvSpPr>
-          <p:cNvPr id="35" name="Shape 33"/>
-          <p:cNvSpPr/>
-          <p:nvPr/>
-        </p:nvSpPr>
-        <p:spPr>
-          <a:xfrm>
-            <a:off x="530352" y="1819656"/>
-            <a:ext cx="128016" cy="128016"/>
-          </a:xfrm>
-          <a:prstGeom prst="ellipse">
-            <a:avLst/>
-          </a:prstGeom>
-          <a:solidFill>
-            <a:srgbClr val="FF5FA8"/>
-          </a:solidFill>
-          <a:ln w="6350">
-            <a:solidFill>
-              <a:srgbClr val="FF5FA8"/>
-            </a:solidFill>
-            <a:prstDash val="solid"/>
-          </a:ln>
-          <a:effectLst>
-            <a:outerShdw blurRad="139700" dist="50800" dir="16200000" algn="bl" rotWithShape="0">
-              <a:srgbClr val="FF5FA8">
-                <a:alpha val="70000"/>
-              </a:srgbClr>
-            </a:outerShdw>
-          </a:effectLst>
-        </p:spPr>
-        <p:txBody>
-          <a:bodyPr/>
-          <a:lstStyle/>
-          <a:p>
-            <a:endParaRPr lang="en-US"/>
-          </a:p>
-        </p:txBody>
-      </p:sp>
-      <p:sp>
-        <p:nvSpPr>
-          <p:cNvPr id="36" name="Shape 34"/>
-          <p:cNvSpPr/>
-          <p:nvPr/>
-        </p:nvSpPr>
-        <p:spPr>
-          <a:xfrm>
-            <a:off x="567477" y="1856781"/>
-            <a:ext cx="53767" cy="53767"/>
-          </a:xfrm>
-          <a:prstGeom prst="ellipse">
-            <a:avLst/>
-          </a:prstGeom>
-          <a:solidFill>
-            <a:srgbClr val="DCE9FF"/>
-          </a:solidFill>
-          <a:ln w="12700">
-            <a:solidFill>
-              <a:srgbClr val="DCE9FF"/>
-            </a:solidFill>
-            <a:prstDash val="solid"/>
-          </a:ln>
-        </p:spPr>
-        <p:txBody>
-          <a:bodyPr/>
-          <a:lstStyle/>
-          <a:p>
-            <a:endParaRPr lang="en-US"/>
-          </a:p>
-        </p:txBody>
-      </p:sp>
-      <p:sp>
-        <p:nvSpPr>
-          <p:cNvPr id="37" name="Text 35"/>
-          <p:cNvSpPr/>
-          <p:nvPr/>
-        </p:nvSpPr>
-        <p:spPr>
-          <a:xfrm>
-            <a:off x="457200" y="1746504"/>
-            <a:ext cx="274320" cy="274320"/>
-          </a:xfrm>
-          <a:prstGeom prst="rect">
-            <a:avLst/>
-          </a:prstGeom>
-          <a:noFill/>
-          <a:ln/>
-        </p:spPr>
-        <p:txBody>
-          <a:bodyPr wrap="square" lIns="0" tIns="0" rIns="0" bIns="0" rtlCol="0" anchor="ctr"/>
-          <a:lstStyle/>
-          <a:p>
-            <a:pPr marL="0" indent="0" algn="ctr">
-              <a:buNone/>
-            </a:pPr>
-            <a:r>
-              <a:rPr lang="en-US" sz="900" b="1" dirty="0">
-                <a:solidFill>
-                  <a:srgbClr val="03060F"/>
-                </a:solidFill>
-                <a:latin typeface="Aptos" pitchFamily="34" charset="0"/>
-                <a:ea typeface="Aptos" pitchFamily="34" charset="-122"/>
-                <a:cs typeface="Aptos" pitchFamily="34" charset="-120"/>
-              </a:rPr>
-              <a:t>2</a:t>
-            </a:r>
-            <a:endParaRPr lang="en-US" sz="900" dirty="0"/>
-          </a:p>
-        </p:txBody>
-      </p:sp>
-      <p:sp>
-        <p:nvSpPr>
-          <p:cNvPr id="38" name="Text 36"/>
-          <p:cNvSpPr/>
-          <p:nvPr/>
-        </p:nvSpPr>
-        <p:spPr>
-          <a:xfrm>
-            <a:off x="841248" y="1682496"/>
-            <a:ext cx="3657600" cy="402336"/>
-          </a:xfrm>
-          <a:prstGeom prst="rect">
-            <a:avLst/>
-          </a:prstGeom>
-          <a:noFill/>
-          <a:ln/>
-        </p:spPr>
-        <p:txBody>
-          <a:bodyPr wrap="square" rtlCol="0" anchor="ctr"/>
-          <a:lstStyle/>
-          <a:p>
-            <a:r>
-              <a:rPr lang="en-US" sz="1100" dirty="0">
-                <a:solidFill>
-                  <a:srgbClr val="EAF2FF"/>
-                </a:solidFill>
-                <a:latin typeface="Aptos" pitchFamily="34" charset="0"/>
-                <a:ea typeface="Aptos" pitchFamily="34" charset="-122"/>
-                <a:cs typeface="Aptos" pitchFamily="34" charset="-120"/>
-              </a:rPr>
-              <a:t>Permission Check</a:t>
-            </a:r>
-            <a:endParaRPr lang="en-US" sz="1100" dirty="0"/>
-          </a:p>
-        </p:txBody>
-      </p:sp>
-      <p:sp>
-        <p:nvSpPr>
-          <p:cNvPr id="39" name="Shape 37"/>
-          <p:cNvSpPr/>
-          <p:nvPr/>
-        </p:nvSpPr>
-        <p:spPr>
-          <a:xfrm>
-            <a:off x="594360" y="2084832"/>
-            <a:ext cx="0" cy="109728"/>
-          </a:xfrm>
-          <a:prstGeom prst="line">
-            <a:avLst/>
-          </a:prstGeom>
-          <a:noFill/>
-          <a:ln w="12700">
-            <a:solidFill>
-              <a:srgbClr val="FF5FA8">
-                <a:alpha val="65000"/>
-              </a:srgbClr>
-            </a:solidFill>
-            <a:prstDash val="solid"/>
-          </a:ln>
-        </p:spPr>
-        <p:txBody>
-          <a:bodyPr/>
-          <a:lstStyle/>
-          <a:p>
-            <a:endParaRPr lang="en-US"/>
-          </a:p>
-        </p:txBody>
-      </p:sp>
-      <p:sp>
-        <p:nvSpPr>
-          <p:cNvPr id="40" name="Shape 38"/>
-          <p:cNvSpPr/>
-          <p:nvPr/>
-        </p:nvSpPr>
-        <p:spPr>
-          <a:xfrm>
-            <a:off x="365760" y="2194560"/>
-            <a:ext cx="4206240" cy="402336"/>
-          </a:xfrm>
-          <a:prstGeom prst="rect">
-            <a:avLst/>
-          </a:prstGeom>
-          <a:solidFill>
-            <a:srgbClr val="0A1430"/>
-          </a:solidFill>
-          <a:ln w="10160">
-            <a:solidFill>
-              <a:srgbClr val="36E0FF">
-                <a:alpha val="60000"/>
-              </a:srgbClr>
-            </a:solidFill>
-            <a:prstDash val="solid"/>
-          </a:ln>
-        </p:spPr>
-        <p:txBody>
-          <a:bodyPr/>
-          <a:lstStyle/>
-          <a:p>
-            <a:endParaRPr lang="en-US"/>
-          </a:p>
-        </p:txBody>
-      </p:sp>
-      <p:sp>
-        <p:nvSpPr>
-          <p:cNvPr id="41" name="Shape 39"/>
-          <p:cNvSpPr/>
-          <p:nvPr/>
-        </p:nvSpPr>
-        <p:spPr>
-          <a:xfrm>
-            <a:off x="530352" y="2331720"/>
-            <a:ext cx="128016" cy="128016"/>
-          </a:xfrm>
-          <a:prstGeom prst="ellipse">
-            <a:avLst/>
-          </a:prstGeom>
-          <a:solidFill>
-            <a:srgbClr val="36E0FF"/>
-          </a:solidFill>
-          <a:ln w="6350">
-            <a:solidFill>
-              <a:srgbClr val="36E0FF"/>
-            </a:solidFill>
-            <a:prstDash val="solid"/>
-          </a:ln>
-          <a:effectLst>
-            <a:outerShdw blurRad="139700" dist="50800" dir="16200000" algn="bl" rotWithShape="0">
-              <a:srgbClr val="36E0FF">
-                <a:alpha val="70000"/>
-              </a:srgbClr>
-            </a:outerShdw>
-          </a:effectLst>
-        </p:spPr>
-        <p:txBody>
-          <a:bodyPr/>
-          <a:lstStyle/>
-          <a:p>
-            <a:endParaRPr lang="en-US"/>
-          </a:p>
-        </p:txBody>
-      </p:sp>
-      <p:sp>
-        <p:nvSpPr>
-          <p:cNvPr id="42" name="Shape 40"/>
-          <p:cNvSpPr/>
-          <p:nvPr/>
-        </p:nvSpPr>
-        <p:spPr>
-          <a:xfrm>
-            <a:off x="567477" y="2368845"/>
-            <a:ext cx="53767" cy="53767"/>
-          </a:xfrm>
-          <a:prstGeom prst="ellipse">
-            <a:avLst/>
-          </a:prstGeom>
-          <a:solidFill>
-            <a:srgbClr val="DCE9FF"/>
-          </a:solidFill>
-          <a:ln w="12700">
-            <a:solidFill>
-              <a:srgbClr val="DCE9FF"/>
-            </a:solidFill>
-            <a:prstDash val="solid"/>
-          </a:ln>
-        </p:spPr>
-        <p:txBody>
-          <a:bodyPr/>
-          <a:lstStyle/>
-          <a:p>
-            <a:endParaRPr lang="en-US"/>
-          </a:p>
-        </p:txBody>
-      </p:sp>
-      <p:sp>
-        <p:nvSpPr>
-          <p:cNvPr id="43" name="Text 41"/>
-          <p:cNvSpPr/>
-          <p:nvPr/>
-        </p:nvSpPr>
-        <p:spPr>
-          <a:xfrm>
-            <a:off x="457200" y="2258568"/>
-            <a:ext cx="274320" cy="274320"/>
-          </a:xfrm>
-          <a:prstGeom prst="rect">
-            <a:avLst/>
-          </a:prstGeom>
-          <a:noFill/>
-          <a:ln/>
-        </p:spPr>
-        <p:txBody>
-          <a:bodyPr wrap="square" lIns="0" tIns="0" rIns="0" bIns="0" rtlCol="0" anchor="ctr"/>
-          <a:lstStyle/>
-          <a:p>
-            <a:pPr marL="0" indent="0" algn="ctr">
-              <a:buNone/>
-            </a:pPr>
-            <a:r>
-              <a:rPr lang="en-US" sz="900" b="1" dirty="0">
-                <a:solidFill>
-                  <a:srgbClr val="03060F"/>
-                </a:solidFill>
-                <a:latin typeface="Aptos" pitchFamily="34" charset="0"/>
-                <a:ea typeface="Aptos" pitchFamily="34" charset="-122"/>
-                <a:cs typeface="Aptos" pitchFamily="34" charset="-120"/>
-              </a:rPr>
-              <a:t>3</a:t>
-            </a:r>
-            <a:endParaRPr lang="en-US" sz="900" dirty="0"/>
-          </a:p>
-        </p:txBody>
-      </p:sp>
-      <p:sp>
-        <p:nvSpPr>
-          <p:cNvPr id="44" name="Text 42"/>
-          <p:cNvSpPr/>
-          <p:nvPr/>
-        </p:nvSpPr>
-        <p:spPr>
-          <a:xfrm>
-            <a:off x="841248" y="2194560"/>
-            <a:ext cx="3657600" cy="402336"/>
-          </a:xfrm>
-          <a:prstGeom prst="rect">
-            <a:avLst/>
-          </a:prstGeom>
-          <a:noFill/>
-          <a:ln/>
-        </p:spPr>
-        <p:txBody>
-          <a:bodyPr wrap="square" rtlCol="0" anchor="ctr"/>
-          <a:lstStyle/>
-          <a:p>
-            <a:pPr marL="0" indent="0">
-              <a:buNone/>
-            </a:pPr>
-            <a:r>
-              <a:rPr lang="en-US" sz="1100" dirty="0">
-                <a:solidFill>
-                  <a:srgbClr val="EAF2FF"/>
-                </a:solidFill>
-                <a:latin typeface="Aptos" pitchFamily="34" charset="0"/>
-                <a:ea typeface="Aptos" pitchFamily="34" charset="-122"/>
-                <a:cs typeface="Aptos" pitchFamily="34" charset="-120"/>
-              </a:rPr>
-              <a:t>Relevant Data Selection</a:t>
-            </a:r>
-            <a:endParaRPr lang="en-US" sz="1100" dirty="0"/>
-          </a:p>
-        </p:txBody>
-      </p:sp>
-      <p:sp>
-        <p:nvSpPr>
-          <p:cNvPr id="45" name="Shape 43"/>
-          <p:cNvSpPr/>
-          <p:nvPr/>
-        </p:nvSpPr>
-        <p:spPr>
-          <a:xfrm>
-            <a:off x="594360" y="2596896"/>
-            <a:ext cx="0" cy="109728"/>
-          </a:xfrm>
-          <a:prstGeom prst="line">
-            <a:avLst/>
-          </a:prstGeom>
-          <a:noFill/>
-          <a:ln w="12700">
-            <a:solidFill>
-              <a:srgbClr val="36E0FF">
-                <a:alpha val="65000"/>
-              </a:srgbClr>
-            </a:solidFill>
-            <a:prstDash val="solid"/>
-          </a:ln>
-        </p:spPr>
-        <p:txBody>
-          <a:bodyPr/>
-          <a:lstStyle/>
-          <a:p>
-            <a:endParaRPr lang="en-US"/>
-          </a:p>
-        </p:txBody>
-      </p:sp>
-      <p:sp>
-        <p:nvSpPr>
-          <p:cNvPr id="46" name="Shape 44"/>
-          <p:cNvSpPr/>
-          <p:nvPr/>
-        </p:nvSpPr>
-        <p:spPr>
-          <a:xfrm>
-            <a:off x="365760" y="2706624"/>
-            <a:ext cx="4206240" cy="402336"/>
-          </a:xfrm>
-          <a:prstGeom prst="rect">
-            <a:avLst/>
-          </a:prstGeom>
-          <a:solidFill>
-            <a:srgbClr val="0A1430"/>
-          </a:solidFill>
-          <a:ln w="10160">
-            <a:solidFill>
-              <a:srgbClr val="FFC23D">
-                <a:alpha val="60000"/>
-              </a:srgbClr>
-            </a:solidFill>
-            <a:prstDash val="solid"/>
-          </a:ln>
-        </p:spPr>
-        <p:txBody>
-          <a:bodyPr/>
-          <a:lstStyle/>
-          <a:p>
-            <a:endParaRPr lang="en-US"/>
-          </a:p>
-        </p:txBody>
-      </p:sp>
-      <p:sp>
-        <p:nvSpPr>
-          <p:cNvPr id="47" name="Shape 45"/>
-          <p:cNvSpPr/>
-          <p:nvPr/>
-        </p:nvSpPr>
-        <p:spPr>
-          <a:xfrm>
-            <a:off x="530352" y="2843784"/>
-            <a:ext cx="128016" cy="128016"/>
-          </a:xfrm>
-          <a:prstGeom prst="ellipse">
-            <a:avLst/>
-          </a:prstGeom>
-          <a:solidFill>
-            <a:srgbClr val="FFC23D"/>
-          </a:solidFill>
-          <a:ln w="6350">
-            <a:solidFill>
-              <a:srgbClr val="FFC23D"/>
-            </a:solidFill>
-            <a:prstDash val="solid"/>
-          </a:ln>
-          <a:effectLst>
-            <a:outerShdw blurRad="139700" dist="50800" dir="16200000" algn="bl" rotWithShape="0">
-              <a:srgbClr val="FFC23D">
-                <a:alpha val="70000"/>
-              </a:srgbClr>
-            </a:outerShdw>
-          </a:effectLst>
-        </p:spPr>
-        <p:txBody>
-          <a:bodyPr/>
-          <a:lstStyle/>
-          <a:p>
-            <a:endParaRPr lang="en-US"/>
-          </a:p>
-        </p:txBody>
-      </p:sp>
-      <p:sp>
-        <p:nvSpPr>
-          <p:cNvPr id="48" name="Shape 46"/>
-          <p:cNvSpPr/>
-          <p:nvPr/>
-        </p:nvSpPr>
-        <p:spPr>
-          <a:xfrm>
-            <a:off x="567477" y="2880909"/>
-            <a:ext cx="53767" cy="53767"/>
-          </a:xfrm>
-          <a:prstGeom prst="ellipse">
-            <a:avLst/>
-          </a:prstGeom>
-          <a:solidFill>
-            <a:srgbClr val="DCE9FF"/>
-          </a:solidFill>
-          <a:ln w="12700">
-            <a:solidFill>
-              <a:srgbClr val="DCE9FF"/>
-            </a:solidFill>
-            <a:prstDash val="solid"/>
-          </a:ln>
-        </p:spPr>
-        <p:txBody>
-          <a:bodyPr/>
-          <a:lstStyle/>
-          <a:p>
-            <a:endParaRPr lang="en-US"/>
-          </a:p>
-        </p:txBody>
-      </p:sp>
-      <p:sp>
-        <p:nvSpPr>
-          <p:cNvPr id="49" name="Text 47"/>
-          <p:cNvSpPr/>
-          <p:nvPr/>
-        </p:nvSpPr>
-        <p:spPr>
-          <a:xfrm>
-            <a:off x="457200" y="2770632"/>
-            <a:ext cx="274320" cy="274320"/>
-          </a:xfrm>
-          <a:prstGeom prst="rect">
-            <a:avLst/>
-          </a:prstGeom>
-          <a:noFill/>
-          <a:ln/>
-        </p:spPr>
-        <p:txBody>
-          <a:bodyPr wrap="square" lIns="0" tIns="0" rIns="0" bIns="0" rtlCol="0" anchor="ctr"/>
-          <a:lstStyle/>
-          <a:p>
-            <a:pPr marL="0" indent="0" algn="ctr">
-              <a:buNone/>
-            </a:pPr>
-            <a:r>
-              <a:rPr lang="en-US" sz="900" b="1" dirty="0">
-                <a:solidFill>
-                  <a:srgbClr val="03060F"/>
-                </a:solidFill>
-                <a:latin typeface="Aptos" pitchFamily="34" charset="0"/>
-                <a:ea typeface="Aptos" pitchFamily="34" charset="-122"/>
-                <a:cs typeface="Aptos" pitchFamily="34" charset="-120"/>
-              </a:rPr>
-              <a:t>4</a:t>
-            </a:r>
-            <a:endParaRPr lang="en-US" sz="900" dirty="0"/>
-          </a:p>
-        </p:txBody>
-      </p:sp>
-      <p:sp>
-        <p:nvSpPr>
-          <p:cNvPr id="50" name="Text 48"/>
-          <p:cNvSpPr/>
-          <p:nvPr/>
-        </p:nvSpPr>
-        <p:spPr>
-          <a:xfrm>
-            <a:off x="841248" y="2706624"/>
-            <a:ext cx="3657600" cy="402336"/>
-          </a:xfrm>
-          <a:prstGeom prst="rect">
-            <a:avLst/>
-          </a:prstGeom>
-          <a:noFill/>
-          <a:ln/>
-        </p:spPr>
-        <p:txBody>
-          <a:bodyPr wrap="square" rtlCol="0" anchor="ctr"/>
-          <a:lstStyle/>
-          <a:p>
-            <a:pPr marL="0" indent="0">
-              <a:buNone/>
-            </a:pPr>
-            <a:r>
-              <a:rPr lang="en-US" sz="1100" dirty="0">
-                <a:solidFill>
-                  <a:srgbClr val="EAF2FF"/>
-                </a:solidFill>
-                <a:latin typeface="Aptos" pitchFamily="34" charset="0"/>
-                <a:ea typeface="Aptos" pitchFamily="34" charset="-122"/>
-                <a:cs typeface="Aptos" pitchFamily="34" charset="-120"/>
-              </a:rPr>
-              <a:t>KPI Calculation</a:t>
-            </a:r>
-            <a:endParaRPr lang="en-US" sz="1100" dirty="0"/>
-          </a:p>
-        </p:txBody>
-      </p:sp>
-      <p:sp>
-        <p:nvSpPr>
-          <p:cNvPr id="51" name="Shape 49"/>
-          <p:cNvSpPr/>
-          <p:nvPr/>
-        </p:nvSpPr>
-        <p:spPr>
-          <a:xfrm>
-            <a:off x="594360" y="3108960"/>
-            <a:ext cx="0" cy="109728"/>
-          </a:xfrm>
-          <a:prstGeom prst="line">
-            <a:avLst/>
-          </a:prstGeom>
-          <a:noFill/>
-          <a:ln w="12700">
-            <a:solidFill>
-              <a:srgbClr val="FFC23D">
-                <a:alpha val="65000"/>
-              </a:srgbClr>
-            </a:solidFill>
-            <a:prstDash val="solid"/>
-          </a:ln>
-        </p:spPr>
-        <p:txBody>
-          <a:bodyPr/>
-          <a:lstStyle/>
-          <a:p>
-            <a:endParaRPr lang="en-US"/>
-          </a:p>
-        </p:txBody>
-      </p:sp>
-      <p:sp>
-        <p:nvSpPr>
-          <p:cNvPr id="52" name="Shape 50"/>
-          <p:cNvSpPr/>
-          <p:nvPr/>
-        </p:nvSpPr>
-        <p:spPr>
-          <a:xfrm>
-            <a:off x="365760" y="3218688"/>
-            <a:ext cx="4206240" cy="402336"/>
-          </a:xfrm>
-          <a:prstGeom prst="rect">
-            <a:avLst/>
-          </a:prstGeom>
-          <a:solidFill>
-            <a:srgbClr val="0A1430"/>
-          </a:solidFill>
-          <a:ln w="10160">
-            <a:solidFill>
-              <a:srgbClr val="5B9BFF">
-                <a:alpha val="60000"/>
-              </a:srgbClr>
-            </a:solidFill>
-            <a:prstDash val="solid"/>
-          </a:ln>
-        </p:spPr>
-        <p:txBody>
-          <a:bodyPr/>
-          <a:lstStyle/>
-          <a:p>
-            <a:endParaRPr lang="en-US"/>
-          </a:p>
-        </p:txBody>
-      </p:sp>
-      <p:sp>
-        <p:nvSpPr>
-          <p:cNvPr id="53" name="Shape 51"/>
-          <p:cNvSpPr/>
-          <p:nvPr/>
-        </p:nvSpPr>
-        <p:spPr>
-          <a:xfrm>
-            <a:off x="530352" y="3355848"/>
-            <a:ext cx="128016" cy="128016"/>
-          </a:xfrm>
-          <a:prstGeom prst="ellipse">
-            <a:avLst/>
-          </a:prstGeom>
-          <a:solidFill>
-            <a:srgbClr val="5B9BFF"/>
-          </a:solidFill>
-          <a:ln w="6350">
-            <a:solidFill>
-              <a:srgbClr val="5B9BFF"/>
-            </a:solidFill>
-            <a:prstDash val="solid"/>
-          </a:ln>
-          <a:effectLst>
-            <a:outerShdw blurRad="139700" dist="50800" dir="16200000" algn="bl" rotWithShape="0">
-              <a:srgbClr val="5B9BFF">
-                <a:alpha val="70000"/>
-              </a:srgbClr>
-            </a:outerShdw>
-          </a:effectLst>
-        </p:spPr>
-        <p:txBody>
-          <a:bodyPr/>
-          <a:lstStyle/>
-          <a:p>
-            <a:endParaRPr lang="en-US"/>
-          </a:p>
-        </p:txBody>
-      </p:sp>
-      <p:sp>
-        <p:nvSpPr>
-          <p:cNvPr id="54" name="Shape 52"/>
-          <p:cNvSpPr/>
-          <p:nvPr/>
-        </p:nvSpPr>
-        <p:spPr>
-          <a:xfrm>
-            <a:off x="567477" y="3392973"/>
-            <a:ext cx="53767" cy="53767"/>
-          </a:xfrm>
-          <a:prstGeom prst="ellipse">
-            <a:avLst/>
-          </a:prstGeom>
-          <a:solidFill>
-            <a:srgbClr val="DCE9FF"/>
-          </a:solidFill>
-          <a:ln w="12700">
-            <a:solidFill>
-              <a:srgbClr val="DCE9FF"/>
-            </a:solidFill>
-            <a:prstDash val="solid"/>
-          </a:ln>
-        </p:spPr>
-        <p:txBody>
-          <a:bodyPr/>
-          <a:lstStyle/>
-          <a:p>
-            <a:endParaRPr lang="en-US"/>
-          </a:p>
-        </p:txBody>
-      </p:sp>
-      <p:sp>
-        <p:nvSpPr>
-          <p:cNvPr id="55" name="Text 53"/>
-          <p:cNvSpPr/>
-          <p:nvPr/>
-        </p:nvSpPr>
-        <p:spPr>
-          <a:xfrm>
-            <a:off x="457200" y="3282696"/>
-            <a:ext cx="274320" cy="274320"/>
-          </a:xfrm>
-          <a:prstGeom prst="rect">
-            <a:avLst/>
-          </a:prstGeom>
-          <a:noFill/>
-          <a:ln/>
-        </p:spPr>
-        <p:txBody>
-          <a:bodyPr wrap="square" lIns="0" tIns="0" rIns="0" bIns="0" rtlCol="0" anchor="ctr"/>
-          <a:lstStyle/>
-          <a:p>
-            <a:pPr marL="0" indent="0" algn="ctr">
-              <a:buNone/>
-            </a:pPr>
-            <a:r>
-              <a:rPr lang="en-US" sz="900" b="1" dirty="0">
-                <a:solidFill>
-                  <a:srgbClr val="03060F"/>
-                </a:solidFill>
-                <a:latin typeface="Aptos" pitchFamily="34" charset="0"/>
-                <a:ea typeface="Aptos" pitchFamily="34" charset="-122"/>
-                <a:cs typeface="Aptos" pitchFamily="34" charset="-120"/>
-              </a:rPr>
-              <a:t>5</a:t>
-            </a:r>
-            <a:endParaRPr lang="en-US" sz="900" dirty="0"/>
-          </a:p>
-        </p:txBody>
-      </p:sp>
-      <p:sp>
-        <p:nvSpPr>
-          <p:cNvPr id="56" name="Text 54"/>
-          <p:cNvSpPr/>
-          <p:nvPr/>
-        </p:nvSpPr>
-        <p:spPr>
-          <a:xfrm>
-            <a:off x="841248" y="3218688"/>
-            <a:ext cx="3657600" cy="402336"/>
-          </a:xfrm>
-          <a:prstGeom prst="rect">
-            <a:avLst/>
-          </a:prstGeom>
-          <a:noFill/>
-          <a:ln/>
-        </p:spPr>
-        <p:txBody>
-          <a:bodyPr wrap="square" rtlCol="0" anchor="ctr"/>
-          <a:lstStyle/>
-          <a:p>
-            <a:r>
-              <a:rPr lang="en-US" sz="1100" dirty="0">
-                <a:solidFill>
-                  <a:srgbClr val="EAF2FF"/>
-                </a:solidFill>
-                <a:latin typeface="Aptos" pitchFamily="34" charset="0"/>
-                <a:ea typeface="Aptos" pitchFamily="34" charset="-122"/>
-                <a:cs typeface="Aptos" pitchFamily="34" charset="-120"/>
-              </a:rPr>
-              <a:t>Context Package</a:t>
-            </a:r>
-            <a:endParaRPr lang="en-US" sz="1100" dirty="0"/>
-          </a:p>
-        </p:txBody>
-      </p:sp>
-      <p:sp>
-        <p:nvSpPr>
-          <p:cNvPr id="57" name="Shape 55"/>
-          <p:cNvSpPr/>
-          <p:nvPr/>
-        </p:nvSpPr>
-        <p:spPr>
-          <a:xfrm>
-            <a:off x="594360" y="3621024"/>
-            <a:ext cx="0" cy="109728"/>
-          </a:xfrm>
-          <a:prstGeom prst="line">
-            <a:avLst/>
-          </a:prstGeom>
-          <a:noFill/>
-          <a:ln w="12700">
-            <a:solidFill>
-              <a:srgbClr val="5B9BFF">
-                <a:alpha val="65000"/>
-              </a:srgbClr>
-            </a:solidFill>
-            <a:prstDash val="solid"/>
-          </a:ln>
-        </p:spPr>
-        <p:txBody>
-          <a:bodyPr/>
-          <a:lstStyle/>
-          <a:p>
-            <a:endParaRPr lang="en-US"/>
-          </a:p>
-        </p:txBody>
-      </p:sp>
-      <p:sp>
-        <p:nvSpPr>
-          <p:cNvPr id="58" name="Shape 56"/>
-          <p:cNvSpPr/>
-          <p:nvPr/>
-        </p:nvSpPr>
-        <p:spPr>
-          <a:xfrm>
-            <a:off x="365760" y="3730752"/>
-            <a:ext cx="4206240" cy="402336"/>
-          </a:xfrm>
-          <a:prstGeom prst="rect">
-            <a:avLst/>
-          </a:prstGeom>
-          <a:solidFill>
-            <a:srgbClr val="0A1430"/>
-          </a:solidFill>
-          <a:ln w="10160">
-            <a:solidFill>
-              <a:srgbClr val="3DEFC4">
-                <a:alpha val="60000"/>
-              </a:srgbClr>
-            </a:solidFill>
-            <a:prstDash val="solid"/>
-          </a:ln>
-        </p:spPr>
-        <p:txBody>
-          <a:bodyPr/>
-          <a:lstStyle/>
-          <a:p>
-            <a:endParaRPr lang="en-US"/>
-          </a:p>
-        </p:txBody>
-      </p:sp>
-      <p:sp>
-        <p:nvSpPr>
-          <p:cNvPr id="59" name="Shape 57"/>
-          <p:cNvSpPr/>
-          <p:nvPr/>
-        </p:nvSpPr>
-        <p:spPr>
-          <a:xfrm>
-            <a:off x="530352" y="3867912"/>
-            <a:ext cx="128016" cy="128016"/>
-          </a:xfrm>
-          <a:prstGeom prst="ellipse">
-            <a:avLst/>
-          </a:prstGeom>
-          <a:solidFill>
-            <a:srgbClr val="3DEFC4"/>
-          </a:solidFill>
-          <a:ln w="6350">
-            <a:solidFill>
-              <a:srgbClr val="3DEFC4"/>
-            </a:solidFill>
-            <a:prstDash val="solid"/>
-          </a:ln>
-          <a:effectLst>
-            <a:outerShdw blurRad="139700" dist="50800" dir="16200000" algn="bl" rotWithShape="0">
-              <a:srgbClr val="3DEFC4">
-                <a:alpha val="70000"/>
-              </a:srgbClr>
-            </a:outerShdw>
-          </a:effectLst>
-        </p:spPr>
-        <p:txBody>
-          <a:bodyPr/>
-          <a:lstStyle/>
-          <a:p>
-            <a:endParaRPr lang="en-US"/>
-          </a:p>
-        </p:txBody>
-      </p:sp>
-      <p:sp>
-        <p:nvSpPr>
-          <p:cNvPr id="60" name="Shape 58"/>
-          <p:cNvSpPr/>
-          <p:nvPr/>
-        </p:nvSpPr>
-        <p:spPr>
-          <a:xfrm>
-            <a:off x="567477" y="3905037"/>
-            <a:ext cx="53767" cy="53767"/>
-          </a:xfrm>
-          <a:prstGeom prst="ellipse">
-            <a:avLst/>
-          </a:prstGeom>
-          <a:solidFill>
-            <a:srgbClr val="DCE9FF"/>
-          </a:solidFill>
-          <a:ln w="12700">
-            <a:solidFill>
-              <a:srgbClr val="DCE9FF"/>
-            </a:solidFill>
-            <a:prstDash val="solid"/>
-          </a:ln>
-        </p:spPr>
-        <p:txBody>
-          <a:bodyPr/>
-          <a:lstStyle/>
-          <a:p>
-            <a:endParaRPr lang="en-US"/>
-          </a:p>
-        </p:txBody>
-      </p:sp>
-      <p:sp>
-        <p:nvSpPr>
-          <p:cNvPr id="61" name="Text 59"/>
-          <p:cNvSpPr/>
-          <p:nvPr/>
-        </p:nvSpPr>
-        <p:spPr>
-          <a:xfrm>
-            <a:off x="457200" y="3794760"/>
-            <a:ext cx="274320" cy="274320"/>
-          </a:xfrm>
-          <a:prstGeom prst="rect">
-            <a:avLst/>
-          </a:prstGeom>
-          <a:noFill/>
-          <a:ln/>
-        </p:spPr>
-        <p:txBody>
-          <a:bodyPr wrap="square" lIns="0" tIns="0" rIns="0" bIns="0" rtlCol="0" anchor="ctr"/>
-          <a:lstStyle/>
-          <a:p>
-            <a:pPr marL="0" indent="0" algn="ctr">
-              <a:buNone/>
-            </a:pPr>
-            <a:r>
-              <a:rPr lang="en-US" sz="900" b="1" dirty="0">
-                <a:solidFill>
-                  <a:srgbClr val="03060F"/>
-                </a:solidFill>
-                <a:latin typeface="Aptos" pitchFamily="34" charset="0"/>
-                <a:ea typeface="Aptos" pitchFamily="34" charset="-122"/>
-                <a:cs typeface="Aptos" pitchFamily="34" charset="-120"/>
-              </a:rPr>
-              <a:t>6</a:t>
-            </a:r>
-            <a:endParaRPr lang="en-US" sz="900" dirty="0"/>
-          </a:p>
-        </p:txBody>
-      </p:sp>
-      <p:sp>
-        <p:nvSpPr>
-          <p:cNvPr id="62" name="Text 60"/>
-          <p:cNvSpPr/>
-          <p:nvPr/>
-        </p:nvSpPr>
-        <p:spPr>
-          <a:xfrm>
-            <a:off x="841248" y="3730752"/>
-            <a:ext cx="3657600" cy="402336"/>
-          </a:xfrm>
-          <a:prstGeom prst="rect">
-            <a:avLst/>
-          </a:prstGeom>
-          <a:noFill/>
-          <a:ln/>
-        </p:spPr>
-        <p:txBody>
-          <a:bodyPr wrap="square" rtlCol="0" anchor="ctr"/>
-          <a:lstStyle/>
-          <a:p>
-            <a:r>
-              <a:rPr lang="en-US" sz="1100" dirty="0">
-                <a:solidFill>
-                  <a:srgbClr val="EAF2FF"/>
-                </a:solidFill>
-                <a:latin typeface="Aptos" pitchFamily="34" charset="0"/>
-                <a:ea typeface="Aptos" pitchFamily="34" charset="-122"/>
-                <a:cs typeface="Aptos" pitchFamily="34" charset="-120"/>
-              </a:rPr>
-              <a:t>LLM Analysis</a:t>
-            </a:r>
-            <a:endParaRPr lang="en-US" sz="1100" dirty="0"/>
-          </a:p>
-        </p:txBody>
-      </p:sp>
-      <p:sp>
-        <p:nvSpPr>
-          <p:cNvPr id="63" name="Shape 61"/>
-          <p:cNvSpPr/>
-          <p:nvPr/>
-        </p:nvSpPr>
-        <p:spPr>
-          <a:xfrm>
-            <a:off x="594360" y="4133088"/>
-            <a:ext cx="0" cy="109728"/>
-          </a:xfrm>
-          <a:prstGeom prst="line">
-            <a:avLst/>
-          </a:prstGeom>
-          <a:noFill/>
-          <a:ln w="12700">
-            <a:solidFill>
-              <a:srgbClr val="3DEFC4">
-                <a:alpha val="65000"/>
-              </a:srgbClr>
-            </a:solidFill>
-            <a:prstDash val="solid"/>
-          </a:ln>
-        </p:spPr>
-        <p:txBody>
-          <a:bodyPr/>
-          <a:lstStyle/>
-          <a:p>
-            <a:endParaRPr lang="en-US"/>
-          </a:p>
-        </p:txBody>
-      </p:sp>
-      <p:sp>
-        <p:nvSpPr>
-          <p:cNvPr id="64" name="Shape 62"/>
-          <p:cNvSpPr/>
-          <p:nvPr/>
-        </p:nvSpPr>
-        <p:spPr>
-          <a:xfrm>
-            <a:off x="365760" y="4242816"/>
-            <a:ext cx="4206240" cy="402336"/>
-          </a:xfrm>
-          <a:prstGeom prst="rect">
-            <a:avLst/>
-          </a:prstGeom>
-          <a:solidFill>
-            <a:srgbClr val="0A1430"/>
-          </a:solidFill>
-          <a:ln w="10160">
-            <a:solidFill>
-              <a:srgbClr val="A78BFF">
-                <a:alpha val="60000"/>
-              </a:srgbClr>
-            </a:solidFill>
-            <a:prstDash val="solid"/>
-          </a:ln>
-        </p:spPr>
-        <p:txBody>
-          <a:bodyPr/>
-          <a:lstStyle/>
-          <a:p>
-            <a:endParaRPr lang="en-US"/>
-          </a:p>
-        </p:txBody>
-      </p:sp>
-      <p:sp>
-        <p:nvSpPr>
-          <p:cNvPr id="65" name="Shape 63"/>
-          <p:cNvSpPr/>
-          <p:nvPr/>
-        </p:nvSpPr>
-        <p:spPr>
-          <a:xfrm>
-            <a:off x="530352" y="4379976"/>
-            <a:ext cx="128016" cy="128016"/>
-          </a:xfrm>
-          <a:prstGeom prst="ellipse">
-            <a:avLst/>
-          </a:prstGeom>
-          <a:solidFill>
-            <a:srgbClr val="A78BFF"/>
-          </a:solidFill>
-          <a:ln w="6350">
-            <a:solidFill>
-              <a:srgbClr val="A78BFF"/>
-            </a:solidFill>
-            <a:prstDash val="solid"/>
-          </a:ln>
-          <a:effectLst>
-            <a:outerShdw blurRad="139700" dist="50800" dir="16200000" algn="bl" rotWithShape="0">
-              <a:srgbClr val="A78BFF">
-                <a:alpha val="70000"/>
-              </a:srgbClr>
-            </a:outerShdw>
-          </a:effectLst>
-        </p:spPr>
-        <p:txBody>
-          <a:bodyPr/>
-          <a:lstStyle/>
-          <a:p>
-            <a:endParaRPr lang="en-US"/>
-          </a:p>
-        </p:txBody>
-      </p:sp>
-      <p:sp>
-        <p:nvSpPr>
-          <p:cNvPr id="66" name="Shape 64"/>
-          <p:cNvSpPr/>
-          <p:nvPr/>
-        </p:nvSpPr>
-        <p:spPr>
-          <a:xfrm>
-            <a:off x="567477" y="4417101"/>
-            <a:ext cx="53767" cy="53767"/>
-          </a:xfrm>
-          <a:prstGeom prst="ellipse">
-            <a:avLst/>
-          </a:prstGeom>
-          <a:solidFill>
-            <a:srgbClr val="DCE9FF"/>
-          </a:solidFill>
-          <a:ln w="12700">
-            <a:solidFill>
-              <a:srgbClr val="DCE9FF"/>
-            </a:solidFill>
-            <a:prstDash val="solid"/>
-          </a:ln>
-        </p:spPr>
-        <p:txBody>
-          <a:bodyPr/>
-          <a:lstStyle/>
-          <a:p>
-            <a:endParaRPr lang="en-US"/>
-          </a:p>
-        </p:txBody>
-      </p:sp>
-      <p:sp>
-        <p:nvSpPr>
-          <p:cNvPr id="67" name="Text 65"/>
-          <p:cNvSpPr/>
-          <p:nvPr/>
-        </p:nvSpPr>
-        <p:spPr>
-          <a:xfrm>
-            <a:off x="457200" y="4306824"/>
-            <a:ext cx="274320" cy="274320"/>
-          </a:xfrm>
-          <a:prstGeom prst="rect">
-            <a:avLst/>
-          </a:prstGeom>
-          <a:noFill/>
-          <a:ln/>
-        </p:spPr>
-        <p:txBody>
-          <a:bodyPr wrap="square" lIns="0" tIns="0" rIns="0" bIns="0" rtlCol="0" anchor="ctr"/>
-          <a:lstStyle/>
-          <a:p>
-            <a:pPr marL="0" indent="0" algn="ctr">
-              <a:buNone/>
-            </a:pPr>
-            <a:r>
-              <a:rPr lang="en-US" sz="900" b="1" dirty="0">
-                <a:solidFill>
-                  <a:srgbClr val="03060F"/>
-                </a:solidFill>
-                <a:latin typeface="Aptos" pitchFamily="34" charset="0"/>
-                <a:ea typeface="Aptos" pitchFamily="34" charset="-122"/>
-                <a:cs typeface="Aptos" pitchFamily="34" charset="-120"/>
-              </a:rPr>
-              <a:t>7</a:t>
-            </a:r>
-            <a:endParaRPr lang="en-US" sz="900" dirty="0"/>
-          </a:p>
-        </p:txBody>
-      </p:sp>
-      <p:sp>
-        <p:nvSpPr>
-          <p:cNvPr id="68" name="Text 66"/>
-          <p:cNvSpPr/>
-          <p:nvPr/>
-        </p:nvSpPr>
-        <p:spPr>
-          <a:xfrm>
-            <a:off x="841248" y="4242816"/>
-            <a:ext cx="3657600" cy="402336"/>
-          </a:xfrm>
-          <a:prstGeom prst="rect">
-            <a:avLst/>
-          </a:prstGeom>
-          <a:noFill/>
-          <a:ln/>
-        </p:spPr>
-        <p:txBody>
-          <a:bodyPr wrap="square" rtlCol="0" anchor="ctr"/>
-          <a:lstStyle/>
-          <a:p>
-            <a:r>
-              <a:rPr lang="en-US" sz="1100" dirty="0">
-                <a:solidFill>
-                  <a:srgbClr val="EAF2FF"/>
-                </a:solidFill>
-                <a:latin typeface="Aptos" pitchFamily="34" charset="0"/>
-                <a:ea typeface="Aptos" pitchFamily="34" charset="-122"/>
-                <a:cs typeface="Aptos" pitchFamily="34" charset="-120"/>
-              </a:rPr>
-              <a:t>Human Review → Final Decision</a:t>
-            </a:r>
-            <a:endParaRPr lang="en-US" sz="1100" dirty="0"/>
-          </a:p>
-        </p:txBody>
-      </p:sp>
-      <p:sp>
-        <p:nvSpPr>
-          <p:cNvPr id="69" name="Shape 67"/>
-          <p:cNvSpPr/>
-          <p:nvPr/>
-        </p:nvSpPr>
-        <p:spPr>
-          <a:xfrm>
-            <a:off x="4892040" y="841248"/>
-            <a:ext cx="3995928" cy="3913632"/>
-          </a:xfrm>
-          <a:prstGeom prst="rect">
-            <a:avLst/>
-          </a:prstGeom>
-          <a:solidFill>
-            <a:srgbClr val="0A1430"/>
-          </a:solidFill>
-          <a:ln w="12700">
-            <a:solidFill>
-              <a:srgbClr val="36E0FF">
-                <a:alpha val="65000"/>
-              </a:srgbClr>
-            </a:solidFill>
-            <a:prstDash val="solid"/>
-          </a:ln>
-          <a:effectLst>
-            <a:outerShdw blurRad="88900" dist="38100" dir="8100000" algn="bl" rotWithShape="0">
-              <a:srgbClr val="000000">
-                <a:alpha val="40000"/>
-              </a:srgbClr>
-            </a:outerShdw>
-          </a:effectLst>
-        </p:spPr>
-        <p:txBody>
-          <a:bodyPr/>
-          <a:lstStyle/>
-          <a:p>
-            <a:endParaRPr lang="en-US"/>
-          </a:p>
-        </p:txBody>
-      </p:sp>
-      <p:sp>
-        <p:nvSpPr>
-          <p:cNvPr id="70" name="Shape 68"/>
-          <p:cNvSpPr/>
-          <p:nvPr/>
-        </p:nvSpPr>
-        <p:spPr>
-          <a:xfrm>
-            <a:off x="4892040" y="841248"/>
-            <a:ext cx="3995928" cy="54864"/>
-          </a:xfrm>
-          <a:prstGeom prst="rect">
-            <a:avLst/>
-          </a:prstGeom>
-          <a:solidFill>
-            <a:srgbClr val="36E0FF">
-              <a:alpha val="18000"/>
-            </a:srgbClr>
-          </a:solidFill>
-          <a:ln w="12700">
-            <a:solidFill>
-              <a:srgbClr val="36E0FF">
-                <a:alpha val="18000"/>
-              </a:srgbClr>
-            </a:solidFill>
-            <a:prstDash val="solid"/>
-          </a:ln>
-        </p:spPr>
-        <p:txBody>
-          <a:bodyPr/>
-          <a:lstStyle/>
-          <a:p>
-            <a:endParaRPr lang="en-US"/>
-          </a:p>
-        </p:txBody>
-      </p:sp>
-      <p:sp>
-        <p:nvSpPr>
-          <p:cNvPr id="71" name="Text 69"/>
-          <p:cNvSpPr/>
-          <p:nvPr/>
-        </p:nvSpPr>
-        <p:spPr>
-          <a:xfrm>
-            <a:off x="5074920" y="1005840"/>
-            <a:ext cx="3657600" cy="274320"/>
-          </a:xfrm>
-          <a:prstGeom prst="rect">
-            <a:avLst/>
-          </a:prstGeom>
-          <a:noFill/>
-          <a:ln/>
-        </p:spPr>
-        <p:txBody>
-          <a:bodyPr wrap="square" rtlCol="0" anchor="ctr"/>
-          <a:lstStyle/>
-          <a:p>
-            <a:pPr marL="0" indent="0">
-              <a:buNone/>
-            </a:pPr>
-            <a:r>
-              <a:rPr lang="en-US" sz="1100" b="1" dirty="0">
-                <a:solidFill>
-                  <a:srgbClr val="36E0FF"/>
-                </a:solidFill>
-                <a:latin typeface="Aptos" pitchFamily="34" charset="0"/>
-                <a:ea typeface="Aptos" pitchFamily="34" charset="-122"/>
-                <a:cs typeface="Aptos" pitchFamily="34" charset="-120"/>
-              </a:rPr>
-              <a:t>Worked example</a:t>
-            </a:r>
-            <a:endParaRPr lang="en-US" sz="1100" dirty="0"/>
-          </a:p>
-        </p:txBody>
-      </p:sp>
-      <p:sp>
-        <p:nvSpPr>
-          <p:cNvPr id="72" name="Shape 70"/>
-          <p:cNvSpPr/>
-          <p:nvPr/>
-        </p:nvSpPr>
-        <p:spPr>
-          <a:xfrm>
-            <a:off x="5074920" y="1335024"/>
-            <a:ext cx="3630168" cy="548640"/>
-          </a:xfrm>
-          <a:prstGeom prst="rect">
-            <a:avLst/>
-          </a:prstGeom>
-          <a:solidFill>
-            <a:srgbClr val="08112A"/>
-          </a:solidFill>
-          <a:ln w="10160">
-            <a:solidFill>
-              <a:srgbClr val="36E0FF">
-                <a:alpha val="50000"/>
-              </a:srgbClr>
-            </a:solidFill>
-            <a:prstDash val="solid"/>
-          </a:ln>
-        </p:spPr>
-        <p:txBody>
-          <a:bodyPr/>
-          <a:lstStyle/>
-          <a:p>
-            <a:endParaRPr lang="en-US"/>
-          </a:p>
-        </p:txBody>
-      </p:sp>
-      <p:sp>
-        <p:nvSpPr>
-          <p:cNvPr id="73" name="Text 71"/>
-          <p:cNvSpPr/>
-          <p:nvPr/>
-        </p:nvSpPr>
-        <p:spPr>
-          <a:xfrm>
-            <a:off x="5184648" y="1335024"/>
-            <a:ext cx="3410712" cy="548640"/>
-          </a:xfrm>
-          <a:prstGeom prst="rect">
-            <a:avLst/>
-          </a:prstGeom>
-          <a:noFill/>
-          <a:ln/>
-        </p:spPr>
-        <p:txBody>
-          <a:bodyPr wrap="square" rtlCol="0" anchor="ctr"/>
-          <a:lstStyle/>
-          <a:p>
-            <a:pPr marL="0" indent="0">
-              <a:buNone/>
-            </a:pPr>
-            <a:r>
-              <a:rPr lang="en-US" sz="1150" b="1" i="1" dirty="0">
-                <a:solidFill>
-                  <a:srgbClr val="EAF2FF"/>
-                </a:solidFill>
-                <a:latin typeface="Aptos" pitchFamily="34" charset="0"/>
-                <a:ea typeface="Aptos" pitchFamily="34" charset="-122"/>
-                <a:cs typeface="Aptos" pitchFamily="34" charset="-120"/>
-              </a:rPr>
-              <a:t>"Why did rework increase on Line 3 last week?"</a:t>
-            </a:r>
-            <a:endParaRPr lang="en-US" sz="1150" dirty="0"/>
-          </a:p>
-        </p:txBody>
-      </p:sp>
-      <p:sp>
-        <p:nvSpPr>
-          <p:cNvPr id="74" name="Text 72"/>
-          <p:cNvSpPr/>
-          <p:nvPr/>
-        </p:nvSpPr>
-        <p:spPr>
-          <a:xfrm>
-            <a:off x="5074920" y="2029968"/>
-            <a:ext cx="3657600" cy="237744"/>
-          </a:xfrm>
-          <a:prstGeom prst="rect">
-            <a:avLst/>
-          </a:prstGeom>
-          <a:noFill/>
-          <a:ln/>
-        </p:spPr>
-        <p:txBody>
-          <a:bodyPr wrap="square" rtlCol="0" anchor="ctr"/>
-          <a:lstStyle/>
-          <a:p>
-            <a:pPr marL="0" indent="0">
-              <a:buNone/>
-            </a:pPr>
-            <a:r>
-              <a:rPr lang="en-US" sz="950" b="1" dirty="0">
-                <a:solidFill>
-                  <a:srgbClr val="6B82B5"/>
-                </a:solidFill>
-                <a:latin typeface="Aptos" pitchFamily="34" charset="0"/>
-                <a:ea typeface="Aptos" pitchFamily="34" charset="-122"/>
-                <a:cs typeface="Aptos" pitchFamily="34" charset="-120"/>
-              </a:rPr>
-              <a:t>Context package sent to the AI</a:t>
-            </a:r>
-            <a:endParaRPr lang="en-US" sz="950" dirty="0"/>
-          </a:p>
-        </p:txBody>
-      </p:sp>
-      <p:sp>
-        <p:nvSpPr>
-          <p:cNvPr id="75" name="Shape 73"/>
-          <p:cNvSpPr/>
-          <p:nvPr/>
-        </p:nvSpPr>
-        <p:spPr>
-          <a:xfrm>
-            <a:off x="5074920" y="2340864"/>
-            <a:ext cx="3630168" cy="384048"/>
-          </a:xfrm>
-          <a:prstGeom prst="rect">
-            <a:avLst/>
-          </a:prstGeom>
-          <a:solidFill>
-            <a:srgbClr val="08112A"/>
-          </a:solidFill>
-          <a:ln w="6350">
-            <a:solidFill>
-              <a:srgbClr val="3DEFC4">
-                <a:alpha val="40000"/>
-              </a:srgbClr>
-            </a:solidFill>
-            <a:prstDash val="solid"/>
-          </a:ln>
-        </p:spPr>
-        <p:txBody>
-          <a:bodyPr/>
-          <a:lstStyle/>
-          <a:p>
-            <a:endParaRPr lang="en-US"/>
-          </a:p>
-        </p:txBody>
-      </p:sp>
-      <p:sp>
-        <p:nvSpPr>
-          <p:cNvPr id="76" name="Shape 74"/>
-          <p:cNvSpPr/>
-          <p:nvPr/>
-        </p:nvSpPr>
-        <p:spPr>
-          <a:xfrm>
-            <a:off x="5074920" y="2340864"/>
-            <a:ext cx="54864" cy="384048"/>
-          </a:xfrm>
-          <a:prstGeom prst="rect">
-            <a:avLst/>
-          </a:prstGeom>
-          <a:solidFill>
-            <a:srgbClr val="3DEFC4"/>
-          </a:solidFill>
-          <a:ln w="12700">
-            <a:solidFill>
-              <a:srgbClr val="3DEFC4"/>
-            </a:solidFill>
-            <a:prstDash val="solid"/>
-          </a:ln>
-          <a:effectLst>
-            <a:outerShdw blurRad="63500" dist="50800" dir="16200000" algn="bl" rotWithShape="0">
-              <a:srgbClr val="3DEFC4">
-                <a:alpha val="60000"/>
-              </a:srgbClr>
-            </a:outerShdw>
-          </a:effectLst>
-        </p:spPr>
-        <p:txBody>
-          <a:bodyPr/>
-          <a:lstStyle/>
-          <a:p>
-            <a:endParaRPr lang="en-US"/>
-          </a:p>
-        </p:txBody>
-      </p:sp>
-      <p:sp>
-        <p:nvSpPr>
-          <p:cNvPr id="77" name="Text 75"/>
-          <p:cNvSpPr/>
-          <p:nvPr/>
-        </p:nvSpPr>
-        <p:spPr>
-          <a:xfrm>
-            <a:off x="5239512" y="2340864"/>
-            <a:ext cx="3401568" cy="384048"/>
-          </a:xfrm>
-          <a:prstGeom prst="rect">
-            <a:avLst/>
-          </a:prstGeom>
-          <a:noFill/>
-          <a:ln/>
-        </p:spPr>
-        <p:txBody>
-          <a:bodyPr wrap="square" rtlCol="0" anchor="ctr"/>
-          <a:lstStyle/>
-          <a:p>
-            <a:pPr marL="0" indent="0">
-              <a:buNone/>
-            </a:pPr>
-            <a:r>
-              <a:rPr lang="en-US" sz="1000" dirty="0">
-                <a:solidFill>
-                  <a:srgbClr val="9DBEF0"/>
-                </a:solidFill>
-                <a:latin typeface="Aptos" pitchFamily="34" charset="0"/>
-                <a:ea typeface="Aptos" pitchFamily="34" charset="-122"/>
-                <a:cs typeface="Aptos" pitchFamily="34" charset="-120"/>
-              </a:rPr>
-              <a:t>Rework increased from 3.2% to 7.4%</a:t>
-            </a:r>
-            <a:endParaRPr lang="en-US" sz="1000" dirty="0"/>
-          </a:p>
-        </p:txBody>
-      </p:sp>
-      <p:sp>
-        <p:nvSpPr>
-          <p:cNvPr id="78" name="Shape 76"/>
-          <p:cNvSpPr/>
-          <p:nvPr/>
-        </p:nvSpPr>
-        <p:spPr>
-          <a:xfrm>
-            <a:off x="5074920" y="2798064"/>
-            <a:ext cx="3630168" cy="384048"/>
-          </a:xfrm>
-          <a:prstGeom prst="rect">
-            <a:avLst/>
-          </a:prstGeom>
-          <a:solidFill>
-            <a:srgbClr val="08112A"/>
-          </a:solidFill>
-          <a:ln w="6350">
-            <a:solidFill>
-              <a:srgbClr val="3DEFC4">
-                <a:alpha val="40000"/>
-              </a:srgbClr>
-            </a:solidFill>
-            <a:prstDash val="solid"/>
-          </a:ln>
-        </p:spPr>
-        <p:txBody>
-          <a:bodyPr/>
-          <a:lstStyle/>
-          <a:p>
-            <a:endParaRPr lang="en-US"/>
-          </a:p>
-        </p:txBody>
-      </p:sp>
-      <p:sp>
-        <p:nvSpPr>
-          <p:cNvPr id="79" name="Shape 77"/>
-          <p:cNvSpPr/>
-          <p:nvPr/>
-        </p:nvSpPr>
-        <p:spPr>
-          <a:xfrm>
-            <a:off x="5074920" y="2798064"/>
-            <a:ext cx="54864" cy="384048"/>
-          </a:xfrm>
-          <a:prstGeom prst="rect">
-            <a:avLst/>
-          </a:prstGeom>
-          <a:solidFill>
-            <a:srgbClr val="3DEFC4"/>
-          </a:solidFill>
-          <a:ln w="12700">
-            <a:solidFill>
-              <a:srgbClr val="3DEFC4"/>
-            </a:solidFill>
-            <a:prstDash val="solid"/>
-          </a:ln>
-          <a:effectLst>
-            <a:outerShdw blurRad="63500" dist="50800" dir="16200000" algn="bl" rotWithShape="0">
-              <a:srgbClr val="3DEFC4">
-                <a:alpha val="60000"/>
-              </a:srgbClr>
-            </a:outerShdw>
-          </a:effectLst>
-        </p:spPr>
-        <p:txBody>
-          <a:bodyPr/>
-          <a:lstStyle/>
-          <a:p>
-            <a:endParaRPr lang="en-US"/>
-          </a:p>
-        </p:txBody>
-      </p:sp>
-      <p:sp>
-        <p:nvSpPr>
-          <p:cNvPr id="80" name="Text 78"/>
-          <p:cNvSpPr/>
-          <p:nvPr/>
-        </p:nvSpPr>
-        <p:spPr>
-          <a:xfrm>
-            <a:off x="5239512" y="2798064"/>
-            <a:ext cx="3401568" cy="384048"/>
-          </a:xfrm>
-          <a:prstGeom prst="rect">
-            <a:avLst/>
-          </a:prstGeom>
-          <a:noFill/>
-          <a:ln/>
-        </p:spPr>
-        <p:txBody>
-          <a:bodyPr wrap="square" rtlCol="0" anchor="ctr"/>
-          <a:lstStyle/>
-          <a:p>
-            <a:pPr marL="0" indent="0">
-              <a:buNone/>
-            </a:pPr>
-            <a:r>
-              <a:rPr lang="en-US" sz="1000" dirty="0">
-                <a:solidFill>
-                  <a:srgbClr val="9DBEF0"/>
-                </a:solidFill>
-                <a:latin typeface="Aptos" pitchFamily="34" charset="0"/>
-                <a:ea typeface="Aptos" pitchFamily="34" charset="-122"/>
-                <a:cs typeface="Aptos" pitchFamily="34" charset="-120"/>
-              </a:rPr>
-              <a:t>Torque station alarms up by 38%</a:t>
-            </a:r>
-            <a:endParaRPr lang="en-US" sz="1000" dirty="0"/>
-          </a:p>
-        </p:txBody>
-      </p:sp>
-      <p:sp>
-        <p:nvSpPr>
-          <p:cNvPr id="81" name="Shape 79"/>
-          <p:cNvSpPr/>
-          <p:nvPr/>
-        </p:nvSpPr>
-        <p:spPr>
-          <a:xfrm>
-            <a:off x="5074920" y="3255264"/>
-            <a:ext cx="3630168" cy="384048"/>
-          </a:xfrm>
-          <a:prstGeom prst="rect">
-            <a:avLst/>
-          </a:prstGeom>
-          <a:solidFill>
-            <a:srgbClr val="08112A"/>
-          </a:solidFill>
-          <a:ln w="6350">
-            <a:solidFill>
-              <a:srgbClr val="3DEFC4">
-                <a:alpha val="40000"/>
-              </a:srgbClr>
-            </a:solidFill>
-            <a:prstDash val="solid"/>
-          </a:ln>
-        </p:spPr>
-        <p:txBody>
-          <a:bodyPr/>
-          <a:lstStyle/>
-          <a:p>
-            <a:endParaRPr lang="en-US"/>
-          </a:p>
-        </p:txBody>
-      </p:sp>
-      <p:sp>
-        <p:nvSpPr>
-          <p:cNvPr id="82" name="Shape 80"/>
-          <p:cNvSpPr/>
-          <p:nvPr/>
-        </p:nvSpPr>
-        <p:spPr>
-          <a:xfrm>
-            <a:off x="5074920" y="3255264"/>
-            <a:ext cx="54864" cy="384048"/>
-          </a:xfrm>
-          <a:prstGeom prst="rect">
-            <a:avLst/>
-          </a:prstGeom>
-          <a:solidFill>
-            <a:srgbClr val="3DEFC4"/>
-          </a:solidFill>
-          <a:ln w="12700">
-            <a:solidFill>
-              <a:srgbClr val="3DEFC4"/>
-            </a:solidFill>
-            <a:prstDash val="solid"/>
-          </a:ln>
-          <a:effectLst>
-            <a:outerShdw blurRad="63500" dist="50800" dir="16200000" algn="bl" rotWithShape="0">
-              <a:srgbClr val="3DEFC4">
-                <a:alpha val="60000"/>
-              </a:srgbClr>
-            </a:outerShdw>
-          </a:effectLst>
-        </p:spPr>
-        <p:txBody>
-          <a:bodyPr/>
-          <a:lstStyle/>
-          <a:p>
-            <a:endParaRPr lang="en-US"/>
-          </a:p>
-        </p:txBody>
-      </p:sp>
-      <p:sp>
-        <p:nvSpPr>
-          <p:cNvPr id="83" name="Text 81"/>
-          <p:cNvSpPr/>
-          <p:nvPr/>
-        </p:nvSpPr>
-        <p:spPr>
-          <a:xfrm>
-            <a:off x="5239512" y="3255264"/>
-            <a:ext cx="3401568" cy="384048"/>
-          </a:xfrm>
-          <a:prstGeom prst="rect">
-            <a:avLst/>
-          </a:prstGeom>
-          <a:noFill/>
-          <a:ln/>
-        </p:spPr>
-        <p:txBody>
-          <a:bodyPr wrap="square" rtlCol="0" anchor="ctr"/>
-          <a:lstStyle/>
-          <a:p>
-            <a:pPr marL="0" indent="0">
-              <a:buNone/>
-            </a:pPr>
-            <a:r>
-              <a:rPr lang="en-US" sz="1000" dirty="0">
-                <a:solidFill>
-                  <a:srgbClr val="9DBEF0"/>
-                </a:solidFill>
-                <a:latin typeface="Aptos" pitchFamily="34" charset="0"/>
-                <a:ea typeface="Aptos" pitchFamily="34" charset="-122"/>
-                <a:cs typeface="Aptos" pitchFamily="34" charset="-120"/>
-              </a:rPr>
-              <a:t>Maintenance intervention occurred Tuesday</a:t>
-            </a:r>
-            <a:endParaRPr lang="en-US" sz="1000" dirty="0"/>
-          </a:p>
-        </p:txBody>
-      </p:sp>
-      <p:sp>
-        <p:nvSpPr>
-          <p:cNvPr id="84" name="Shape 82"/>
-          <p:cNvSpPr/>
-          <p:nvPr/>
-        </p:nvSpPr>
-        <p:spPr>
-          <a:xfrm>
-            <a:off x="5074920" y="3712464"/>
-            <a:ext cx="3630168" cy="384048"/>
-          </a:xfrm>
-          <a:prstGeom prst="rect">
-            <a:avLst/>
-          </a:prstGeom>
-          <a:solidFill>
-            <a:srgbClr val="08112A"/>
-          </a:solidFill>
-          <a:ln w="6350">
-            <a:solidFill>
-              <a:srgbClr val="3DEFC4">
-                <a:alpha val="40000"/>
-              </a:srgbClr>
-            </a:solidFill>
-            <a:prstDash val="solid"/>
-          </a:ln>
-        </p:spPr>
-        <p:txBody>
-          <a:bodyPr/>
-          <a:lstStyle/>
-          <a:p>
-            <a:endParaRPr lang="en-US"/>
-          </a:p>
-        </p:txBody>
-      </p:sp>
-      <p:sp>
-        <p:nvSpPr>
-          <p:cNvPr id="85" name="Shape 83"/>
-          <p:cNvSpPr/>
-          <p:nvPr/>
-        </p:nvSpPr>
-        <p:spPr>
-          <a:xfrm>
-            <a:off x="5074920" y="3712464"/>
-            <a:ext cx="54864" cy="384048"/>
-          </a:xfrm>
-          <a:prstGeom prst="rect">
-            <a:avLst/>
-          </a:prstGeom>
-          <a:solidFill>
-            <a:srgbClr val="3DEFC4"/>
-          </a:solidFill>
-          <a:ln w="12700">
-            <a:solidFill>
-              <a:srgbClr val="3DEFC4"/>
-            </a:solidFill>
-            <a:prstDash val="solid"/>
-          </a:ln>
-          <a:effectLst>
-            <a:outerShdw blurRad="63500" dist="50800" dir="16200000" algn="bl" rotWithShape="0">
-              <a:srgbClr val="3DEFC4">
-                <a:alpha val="60000"/>
-              </a:srgbClr>
-            </a:outerShdw>
-          </a:effectLst>
-        </p:spPr>
-        <p:txBody>
-          <a:bodyPr/>
-          <a:lstStyle/>
-          <a:p>
-            <a:endParaRPr lang="en-US"/>
-          </a:p>
-        </p:txBody>
-      </p:sp>
-      <p:sp>
-        <p:nvSpPr>
-          <p:cNvPr id="86" name="Text 84"/>
-          <p:cNvSpPr/>
-          <p:nvPr/>
-        </p:nvSpPr>
-        <p:spPr>
-          <a:xfrm>
-            <a:off x="5239512" y="3712464"/>
-            <a:ext cx="3401568" cy="384048"/>
-          </a:xfrm>
-          <a:prstGeom prst="rect">
-            <a:avLst/>
-          </a:prstGeom>
-          <a:noFill/>
-          <a:ln/>
-        </p:spPr>
-        <p:txBody>
-          <a:bodyPr wrap="square" rtlCol="0" anchor="ctr"/>
-          <a:lstStyle/>
-          <a:p>
-            <a:pPr marL="0" indent="0">
-              <a:buNone/>
-            </a:pPr>
-            <a:r>
-              <a:rPr lang="en-US" sz="1000" dirty="0">
-                <a:solidFill>
-                  <a:srgbClr val="9DBEF0"/>
-                </a:solidFill>
-                <a:latin typeface="Aptos" pitchFamily="34" charset="0"/>
-                <a:ea typeface="Aptos" pitchFamily="34" charset="-122"/>
-                <a:cs typeface="Aptos" pitchFamily="34" charset="-120"/>
-              </a:rPr>
-              <a:t>Similar event recorded in March</a:t>
-            </a:r>
-            <a:endParaRPr lang="en-US" sz="1000" dirty="0"/>
-          </a:p>
-        </p:txBody>
-      </p:sp>
-      <p:sp>
-        <p:nvSpPr>
-          <p:cNvPr id="87" name="Text 85"/>
-          <p:cNvSpPr/>
-          <p:nvPr/>
-        </p:nvSpPr>
-        <p:spPr>
-          <a:xfrm>
-            <a:off x="5074920" y="4224528"/>
-            <a:ext cx="3630168" cy="457200"/>
-          </a:xfrm>
-          <a:prstGeom prst="rect">
-            <a:avLst/>
-          </a:prstGeom>
-          <a:noFill/>
-          <a:ln/>
-        </p:spPr>
-        <p:txBody>
-          <a:bodyPr wrap="square" rtlCol="0" anchor="t"/>
-          <a:lstStyle/>
-          <a:p>
-            <a:pPr marL="0" indent="0">
-              <a:buNone/>
-            </a:pPr>
-            <a:r>
-              <a:rPr lang="en-US" sz="900" i="1" dirty="0">
-                <a:solidFill>
-                  <a:srgbClr val="36E0FF"/>
-                </a:solidFill>
-                <a:latin typeface="Aptos" pitchFamily="34" charset="0"/>
-                <a:ea typeface="Aptos" pitchFamily="34" charset="-122"/>
-                <a:cs typeface="Aptos" pitchFamily="34" charset="-120"/>
-              </a:rPr>
-              <a:t>→ The AI receives only this filtered context — never the full production databases or customer data.</a:t>
-            </a:r>
-            <a:endParaRPr lang="en-US" sz="900" dirty="0"/>
-          </a:p>
-        </p:txBody>
-      </p:sp>
-    </p:spTree>
-  </p:cSld>
-  <p:clrMapOvr>
-    <a:masterClrMapping/>
-  </p:clrMapOvr>
-</p:sld>
-</file>
-
-<file path=ppt/slides/slide6.xml><?xml version="1.0" encoding="utf-8"?>
 <p:sld xmlns:a="http://schemas.openxmlformats.org/drawingml/2006/main" xmlns:r="http://schemas.openxmlformats.org/officeDocument/2006/relationships" xmlns:p="http://schemas.openxmlformats.org/presentationml/2006/main">
   <p:cSld name="Slide 4">
     <p:bg>
@@ -28942,7 +25834,7 @@
                 <a:ea typeface="Aptos" pitchFamily="34" charset="-122"/>
                 <a:cs typeface="Aptos" pitchFamily="34" charset="-120"/>
               </a:rPr>
-              <a:t>4/13</a:t>
+              <a:t>5/13</a:t>
             </a:r>
             <a:endParaRPr lang="en-US" sz="750" dirty="0"/>
           </a:p>
@@ -33257,7 +30149,7 @@
 </p:sld>
 </file>
 
-<file path=ppt/slides/slide7.xml><?xml version="1.0" encoding="utf-8"?>
+<file path=ppt/slides/slide6.xml><?xml version="1.0" encoding="utf-8"?>
 <p:sld xmlns:a="http://schemas.openxmlformats.org/drawingml/2006/main" xmlns:r="http://schemas.openxmlformats.org/officeDocument/2006/relationships" xmlns:p="http://schemas.openxmlformats.org/presentationml/2006/main">
   <p:cSld name="Slide 6">
     <p:bg>
@@ -36832,6 +33724,3142 @@
 </p:sld>
 </file>
 
+<file path=ppt/slides/slide7.xml><?xml version="1.0" encoding="utf-8"?>
+<p:sld xmlns:a="http://schemas.openxmlformats.org/drawingml/2006/main" xmlns:r="http://schemas.openxmlformats.org/officeDocument/2006/relationships" xmlns:p="http://schemas.openxmlformats.org/presentationml/2006/main">
+  <p:cSld name="Slide 5">
+    <p:bg>
+      <p:bgPr>
+        <a:solidFill>
+          <a:srgbClr val="03060F"/>
+        </a:solidFill>
+        <a:effectLst/>
+      </p:bgPr>
+    </p:bg>
+    <p:spTree>
+      <p:nvGrpSpPr>
+        <p:cNvPr id="1" name=""/>
+        <p:cNvGrpSpPr/>
+        <p:nvPr/>
+      </p:nvGrpSpPr>
+      <p:grpSpPr>
+        <a:xfrm>
+          <a:off x="0" y="0"/>
+          <a:ext cx="0" cy="0"/>
+          <a:chOff x="0" y="0"/>
+          <a:chExt cx="0" cy="0"/>
+        </a:xfrm>
+      </p:grpSpPr>
+      <p:sp>
+        <p:nvSpPr>
+          <p:cNvPr id="2" name="Shape 0"/>
+          <p:cNvSpPr/>
+          <p:nvPr/>
+        </p:nvSpPr>
+        <p:spPr>
+          <a:xfrm>
+            <a:off x="6035040" y="-1828800"/>
+            <a:ext cx="5029200" cy="5029200"/>
+          </a:xfrm>
+          <a:prstGeom prst="ellipse">
+            <a:avLst/>
+          </a:prstGeom>
+          <a:solidFill>
+            <a:srgbClr val="0B1E4D">
+              <a:alpha val="20000"/>
+            </a:srgbClr>
+          </a:solidFill>
+          <a:ln w="12700">
+            <a:solidFill>
+              <a:srgbClr val="0B1E4D">
+                <a:alpha val="0"/>
+              </a:srgbClr>
+            </a:solidFill>
+            <a:prstDash val="solid"/>
+          </a:ln>
+        </p:spPr>
+        <p:txBody>
+          <a:bodyPr/>
+          <a:lstStyle/>
+          <a:p>
+            <a:endParaRPr lang="en-US"/>
+          </a:p>
+        </p:txBody>
+      </p:sp>
+      <p:sp>
+        <p:nvSpPr>
+          <p:cNvPr id="3" name="Shape 1"/>
+          <p:cNvSpPr/>
+          <p:nvPr/>
+        </p:nvSpPr>
+        <p:spPr>
+          <a:xfrm>
+            <a:off x="0" y="0"/>
+            <a:ext cx="9144000" cy="658368"/>
+          </a:xfrm>
+          <a:prstGeom prst="rect">
+            <a:avLst/>
+          </a:prstGeom>
+          <a:solidFill>
+            <a:srgbClr val="0B1733"/>
+          </a:solidFill>
+          <a:ln w="12700">
+            <a:solidFill>
+              <a:srgbClr val="0B1733"/>
+            </a:solidFill>
+            <a:prstDash val="solid"/>
+          </a:ln>
+        </p:spPr>
+        <p:txBody>
+          <a:bodyPr/>
+          <a:lstStyle/>
+          <a:p>
+            <a:endParaRPr lang="en-US"/>
+          </a:p>
+        </p:txBody>
+      </p:sp>
+      <p:sp>
+        <p:nvSpPr>
+          <p:cNvPr id="4" name="Shape 2"/>
+          <p:cNvSpPr/>
+          <p:nvPr/>
+        </p:nvSpPr>
+        <p:spPr>
+          <a:xfrm>
+            <a:off x="0" y="658368"/>
+            <a:ext cx="9144000" cy="20117"/>
+          </a:xfrm>
+          <a:prstGeom prst="rect">
+            <a:avLst/>
+          </a:prstGeom>
+          <a:solidFill>
+            <a:srgbClr val="36E0FF"/>
+          </a:solidFill>
+          <a:ln w="12700">
+            <a:solidFill>
+              <a:srgbClr val="36E0FF"/>
+            </a:solidFill>
+            <a:prstDash val="solid"/>
+          </a:ln>
+          <a:effectLst>
+            <a:outerShdw blurRad="114300" dist="50800" dir="16200000" algn="bl" rotWithShape="0">
+              <a:srgbClr val="36E0FF">
+                <a:alpha val="70000"/>
+              </a:srgbClr>
+            </a:outerShdw>
+          </a:effectLst>
+        </p:spPr>
+        <p:txBody>
+          <a:bodyPr/>
+          <a:lstStyle/>
+          <a:p>
+            <a:endParaRPr lang="en-US"/>
+          </a:p>
+        </p:txBody>
+      </p:sp>
+      <p:sp>
+        <p:nvSpPr>
+          <p:cNvPr id="5" name="Shape 3"/>
+          <p:cNvSpPr/>
+          <p:nvPr/>
+        </p:nvSpPr>
+        <p:spPr>
+          <a:xfrm>
+            <a:off x="0" y="0"/>
+            <a:ext cx="45720" cy="5143500"/>
+          </a:xfrm>
+          <a:prstGeom prst="rect">
+            <a:avLst/>
+          </a:prstGeom>
+          <a:solidFill>
+            <a:srgbClr val="36E0FF"/>
+          </a:solidFill>
+          <a:ln w="12700">
+            <a:solidFill>
+              <a:srgbClr val="36E0FF"/>
+            </a:solidFill>
+            <a:prstDash val="solid"/>
+          </a:ln>
+          <a:effectLst>
+            <a:outerShdw blurRad="88900" dist="50800" dir="16200000" algn="bl" rotWithShape="0">
+              <a:srgbClr val="36E0FF">
+                <a:alpha val="60000"/>
+              </a:srgbClr>
+            </a:outerShdw>
+          </a:effectLst>
+        </p:spPr>
+        <p:txBody>
+          <a:bodyPr/>
+          <a:lstStyle/>
+          <a:p>
+            <a:endParaRPr lang="en-US"/>
+          </a:p>
+        </p:txBody>
+      </p:sp>
+      <p:sp>
+        <p:nvSpPr>
+          <p:cNvPr id="6" name="Shape 4"/>
+          <p:cNvSpPr/>
+          <p:nvPr/>
+        </p:nvSpPr>
+        <p:spPr>
+          <a:xfrm>
+            <a:off x="-22860" y="1417320"/>
+            <a:ext cx="91440" cy="91440"/>
+          </a:xfrm>
+          <a:prstGeom prst="ellipse">
+            <a:avLst/>
+          </a:prstGeom>
+          <a:solidFill>
+            <a:srgbClr val="36E0FF"/>
+          </a:solidFill>
+          <a:ln w="6350">
+            <a:solidFill>
+              <a:srgbClr val="36E0FF"/>
+            </a:solidFill>
+            <a:prstDash val="solid"/>
+          </a:ln>
+          <a:effectLst>
+            <a:outerShdw blurRad="139700" dist="50800" dir="16200000" algn="bl" rotWithShape="0">
+              <a:srgbClr val="36E0FF">
+                <a:alpha val="70000"/>
+              </a:srgbClr>
+            </a:outerShdw>
+          </a:effectLst>
+        </p:spPr>
+        <p:txBody>
+          <a:bodyPr/>
+          <a:lstStyle/>
+          <a:p>
+            <a:endParaRPr lang="en-US"/>
+          </a:p>
+        </p:txBody>
+      </p:sp>
+      <p:sp>
+        <p:nvSpPr>
+          <p:cNvPr id="7" name="Shape 5"/>
+          <p:cNvSpPr/>
+          <p:nvPr/>
+        </p:nvSpPr>
+        <p:spPr>
+          <a:xfrm>
+            <a:off x="3658" y="1443838"/>
+            <a:ext cx="38405" cy="38405"/>
+          </a:xfrm>
+          <a:prstGeom prst="ellipse">
+            <a:avLst/>
+          </a:prstGeom>
+          <a:solidFill>
+            <a:srgbClr val="DCE9FF"/>
+          </a:solidFill>
+          <a:ln w="12700">
+            <a:solidFill>
+              <a:srgbClr val="DCE9FF"/>
+            </a:solidFill>
+            <a:prstDash val="solid"/>
+          </a:ln>
+        </p:spPr>
+        <p:txBody>
+          <a:bodyPr/>
+          <a:lstStyle/>
+          <a:p>
+            <a:endParaRPr lang="en-US"/>
+          </a:p>
+        </p:txBody>
+      </p:sp>
+      <p:sp>
+        <p:nvSpPr>
+          <p:cNvPr id="8" name="Shape 6"/>
+          <p:cNvSpPr/>
+          <p:nvPr/>
+        </p:nvSpPr>
+        <p:spPr>
+          <a:xfrm>
+            <a:off x="-13716" y="3072384"/>
+            <a:ext cx="73152" cy="73152"/>
+          </a:xfrm>
+          <a:prstGeom prst="ellipse">
+            <a:avLst/>
+          </a:prstGeom>
+          <a:solidFill>
+            <a:srgbClr val="36E0FF"/>
+          </a:solidFill>
+          <a:ln w="6350">
+            <a:solidFill>
+              <a:srgbClr val="36E0FF"/>
+            </a:solidFill>
+            <a:prstDash val="solid"/>
+          </a:ln>
+          <a:effectLst>
+            <a:outerShdw blurRad="139700" dist="50800" dir="16200000" algn="bl" rotWithShape="0">
+              <a:srgbClr val="36E0FF">
+                <a:alpha val="70000"/>
+              </a:srgbClr>
+            </a:outerShdw>
+          </a:effectLst>
+        </p:spPr>
+        <p:txBody>
+          <a:bodyPr/>
+          <a:lstStyle/>
+          <a:p>
+            <a:endParaRPr lang="en-US"/>
+          </a:p>
+        </p:txBody>
+      </p:sp>
+      <p:sp>
+        <p:nvSpPr>
+          <p:cNvPr id="9" name="Shape 7"/>
+          <p:cNvSpPr/>
+          <p:nvPr/>
+        </p:nvSpPr>
+        <p:spPr>
+          <a:xfrm>
+            <a:off x="7498" y="3093598"/>
+            <a:ext cx="30724" cy="30724"/>
+          </a:xfrm>
+          <a:prstGeom prst="ellipse">
+            <a:avLst/>
+          </a:prstGeom>
+          <a:solidFill>
+            <a:srgbClr val="DCE9FF"/>
+          </a:solidFill>
+          <a:ln w="12700">
+            <a:solidFill>
+              <a:srgbClr val="DCE9FF"/>
+            </a:solidFill>
+            <a:prstDash val="solid"/>
+          </a:ln>
+        </p:spPr>
+        <p:txBody>
+          <a:bodyPr/>
+          <a:lstStyle/>
+          <a:p>
+            <a:endParaRPr lang="en-US"/>
+          </a:p>
+        </p:txBody>
+      </p:sp>
+      <p:sp>
+        <p:nvSpPr>
+          <p:cNvPr id="10" name="Shape 8"/>
+          <p:cNvSpPr/>
+          <p:nvPr/>
+        </p:nvSpPr>
+        <p:spPr>
+          <a:xfrm>
+            <a:off x="7955280" y="310896"/>
+            <a:ext cx="502920" cy="0"/>
+          </a:xfrm>
+          <a:prstGeom prst="line">
+            <a:avLst/>
+          </a:prstGeom>
+          <a:noFill/>
+          <a:ln w="12700">
+            <a:solidFill>
+              <a:srgbClr val="36E0FF">
+                <a:alpha val="70000"/>
+              </a:srgbClr>
+            </a:solidFill>
+            <a:prstDash val="solid"/>
+          </a:ln>
+        </p:spPr>
+        <p:txBody>
+          <a:bodyPr/>
+          <a:lstStyle/>
+          <a:p>
+            <a:endParaRPr lang="en-US"/>
+          </a:p>
+        </p:txBody>
+      </p:sp>
+      <p:sp>
+        <p:nvSpPr>
+          <p:cNvPr id="11" name="Shape 9"/>
+          <p:cNvSpPr/>
+          <p:nvPr/>
+        </p:nvSpPr>
+        <p:spPr>
+          <a:xfrm>
+            <a:off x="8458200" y="182880"/>
+            <a:ext cx="338328" cy="274320"/>
+          </a:xfrm>
+          <a:prstGeom prst="line">
+            <a:avLst/>
+          </a:prstGeom>
+          <a:noFill/>
+          <a:ln w="12700">
+            <a:solidFill>
+              <a:srgbClr val="36E0FF">
+                <a:alpha val="70000"/>
+              </a:srgbClr>
+            </a:solidFill>
+            <a:prstDash val="solid"/>
+          </a:ln>
+        </p:spPr>
+        <p:txBody>
+          <a:bodyPr/>
+          <a:lstStyle/>
+          <a:p>
+            <a:endParaRPr lang="en-US"/>
+          </a:p>
+        </p:txBody>
+      </p:sp>
+      <p:sp>
+        <p:nvSpPr>
+          <p:cNvPr id="12" name="Shape 10"/>
+          <p:cNvSpPr/>
+          <p:nvPr/>
+        </p:nvSpPr>
+        <p:spPr>
+          <a:xfrm>
+            <a:off x="7955280" y="310896"/>
+            <a:ext cx="274320" cy="219456"/>
+          </a:xfrm>
+          <a:prstGeom prst="line">
+            <a:avLst/>
+          </a:prstGeom>
+          <a:noFill/>
+          <a:ln w="12700">
+            <a:solidFill>
+              <a:srgbClr val="36E0FF">
+                <a:alpha val="55000"/>
+              </a:srgbClr>
+            </a:solidFill>
+            <a:prstDash val="solid"/>
+          </a:ln>
+        </p:spPr>
+        <p:txBody>
+          <a:bodyPr/>
+          <a:lstStyle/>
+          <a:p>
+            <a:endParaRPr lang="en-US"/>
+          </a:p>
+        </p:txBody>
+      </p:sp>
+      <p:sp>
+        <p:nvSpPr>
+          <p:cNvPr id="13" name="Shape 11"/>
+          <p:cNvSpPr/>
+          <p:nvPr/>
+        </p:nvSpPr>
+        <p:spPr>
+          <a:xfrm>
+            <a:off x="7914132" y="269748"/>
+            <a:ext cx="82296" cy="82296"/>
+          </a:xfrm>
+          <a:prstGeom prst="ellipse">
+            <a:avLst/>
+          </a:prstGeom>
+          <a:solidFill>
+            <a:srgbClr val="36E0FF"/>
+          </a:solidFill>
+          <a:ln w="6350">
+            <a:solidFill>
+              <a:srgbClr val="36E0FF"/>
+            </a:solidFill>
+            <a:prstDash val="solid"/>
+          </a:ln>
+          <a:effectLst>
+            <a:outerShdw blurRad="139700" dist="50800" dir="16200000" algn="bl" rotWithShape="0">
+              <a:srgbClr val="36E0FF">
+                <a:alpha val="70000"/>
+              </a:srgbClr>
+            </a:outerShdw>
+          </a:effectLst>
+        </p:spPr>
+        <p:txBody>
+          <a:bodyPr/>
+          <a:lstStyle/>
+          <a:p>
+            <a:endParaRPr lang="en-US"/>
+          </a:p>
+        </p:txBody>
+      </p:sp>
+      <p:sp>
+        <p:nvSpPr>
+          <p:cNvPr id="14" name="Shape 12"/>
+          <p:cNvSpPr/>
+          <p:nvPr/>
+        </p:nvSpPr>
+        <p:spPr>
+          <a:xfrm>
+            <a:off x="7937998" y="293614"/>
+            <a:ext cx="34564" cy="34564"/>
+          </a:xfrm>
+          <a:prstGeom prst="ellipse">
+            <a:avLst/>
+          </a:prstGeom>
+          <a:solidFill>
+            <a:srgbClr val="DCE9FF"/>
+          </a:solidFill>
+          <a:ln w="12700">
+            <a:solidFill>
+              <a:srgbClr val="DCE9FF"/>
+            </a:solidFill>
+            <a:prstDash val="solid"/>
+          </a:ln>
+        </p:spPr>
+        <p:txBody>
+          <a:bodyPr/>
+          <a:lstStyle/>
+          <a:p>
+            <a:endParaRPr lang="en-US"/>
+          </a:p>
+        </p:txBody>
+      </p:sp>
+      <p:sp>
+        <p:nvSpPr>
+          <p:cNvPr id="15" name="Shape 13"/>
+          <p:cNvSpPr/>
+          <p:nvPr/>
+        </p:nvSpPr>
+        <p:spPr>
+          <a:xfrm>
+            <a:off x="8407908" y="132588"/>
+            <a:ext cx="100584" cy="100584"/>
+          </a:xfrm>
+          <a:prstGeom prst="ellipse">
+            <a:avLst/>
+          </a:prstGeom>
+          <a:solidFill>
+            <a:srgbClr val="36E0FF"/>
+          </a:solidFill>
+          <a:ln w="6350">
+            <a:solidFill>
+              <a:srgbClr val="36E0FF"/>
+            </a:solidFill>
+            <a:prstDash val="solid"/>
+          </a:ln>
+          <a:effectLst>
+            <a:outerShdw blurRad="139700" dist="50800" dir="16200000" algn="bl" rotWithShape="0">
+              <a:srgbClr val="36E0FF">
+                <a:alpha val="70000"/>
+              </a:srgbClr>
+            </a:outerShdw>
+          </a:effectLst>
+        </p:spPr>
+        <p:txBody>
+          <a:bodyPr/>
+          <a:lstStyle/>
+          <a:p>
+            <a:endParaRPr lang="en-US"/>
+          </a:p>
+        </p:txBody>
+      </p:sp>
+      <p:sp>
+        <p:nvSpPr>
+          <p:cNvPr id="16" name="Shape 14"/>
+          <p:cNvSpPr/>
+          <p:nvPr/>
+        </p:nvSpPr>
+        <p:spPr>
+          <a:xfrm>
+            <a:off x="8437077" y="161757"/>
+            <a:ext cx="42245" cy="42245"/>
+          </a:xfrm>
+          <a:prstGeom prst="ellipse">
+            <a:avLst/>
+          </a:prstGeom>
+          <a:solidFill>
+            <a:srgbClr val="DCE9FF"/>
+          </a:solidFill>
+          <a:ln w="12700">
+            <a:solidFill>
+              <a:srgbClr val="DCE9FF"/>
+            </a:solidFill>
+            <a:prstDash val="solid"/>
+          </a:ln>
+        </p:spPr>
+        <p:txBody>
+          <a:bodyPr/>
+          <a:lstStyle/>
+          <a:p>
+            <a:endParaRPr lang="en-US"/>
+          </a:p>
+        </p:txBody>
+      </p:sp>
+      <p:sp>
+        <p:nvSpPr>
+          <p:cNvPr id="17" name="Shape 15"/>
+          <p:cNvSpPr/>
+          <p:nvPr/>
+        </p:nvSpPr>
+        <p:spPr>
+          <a:xfrm>
+            <a:off x="8759952" y="420624"/>
+            <a:ext cx="73152" cy="73152"/>
+          </a:xfrm>
+          <a:prstGeom prst="ellipse">
+            <a:avLst/>
+          </a:prstGeom>
+          <a:solidFill>
+            <a:srgbClr val="36E0FF"/>
+          </a:solidFill>
+          <a:ln w="6350">
+            <a:solidFill>
+              <a:srgbClr val="36E0FF"/>
+            </a:solidFill>
+            <a:prstDash val="solid"/>
+          </a:ln>
+          <a:effectLst>
+            <a:outerShdw blurRad="139700" dist="50800" dir="16200000" algn="bl" rotWithShape="0">
+              <a:srgbClr val="36E0FF">
+                <a:alpha val="70000"/>
+              </a:srgbClr>
+            </a:outerShdw>
+          </a:effectLst>
+        </p:spPr>
+        <p:txBody>
+          <a:bodyPr/>
+          <a:lstStyle/>
+          <a:p>
+            <a:endParaRPr lang="en-US"/>
+          </a:p>
+        </p:txBody>
+      </p:sp>
+      <p:sp>
+        <p:nvSpPr>
+          <p:cNvPr id="18" name="Shape 16"/>
+          <p:cNvSpPr/>
+          <p:nvPr/>
+        </p:nvSpPr>
+        <p:spPr>
+          <a:xfrm>
+            <a:off x="8781166" y="441838"/>
+            <a:ext cx="30724" cy="30724"/>
+          </a:xfrm>
+          <a:prstGeom prst="ellipse">
+            <a:avLst/>
+          </a:prstGeom>
+          <a:solidFill>
+            <a:srgbClr val="DCE9FF"/>
+          </a:solidFill>
+          <a:ln w="12700">
+            <a:solidFill>
+              <a:srgbClr val="DCE9FF"/>
+            </a:solidFill>
+            <a:prstDash val="solid"/>
+          </a:ln>
+        </p:spPr>
+        <p:txBody>
+          <a:bodyPr/>
+          <a:lstStyle/>
+          <a:p>
+            <a:endParaRPr lang="en-US"/>
+          </a:p>
+        </p:txBody>
+      </p:sp>
+      <p:sp>
+        <p:nvSpPr>
+          <p:cNvPr id="19" name="Shape 17"/>
+          <p:cNvSpPr/>
+          <p:nvPr/>
+        </p:nvSpPr>
+        <p:spPr>
+          <a:xfrm>
+            <a:off x="8197596" y="498348"/>
+            <a:ext cx="64008" cy="64008"/>
+          </a:xfrm>
+          <a:prstGeom prst="ellipse">
+            <a:avLst/>
+          </a:prstGeom>
+          <a:solidFill>
+            <a:srgbClr val="5B9BFF"/>
+          </a:solidFill>
+          <a:ln w="6350">
+            <a:solidFill>
+              <a:srgbClr val="5B9BFF"/>
+            </a:solidFill>
+            <a:prstDash val="solid"/>
+          </a:ln>
+          <a:effectLst>
+            <a:outerShdw blurRad="139700" dist="50800" dir="16200000" algn="bl" rotWithShape="0">
+              <a:srgbClr val="5B9BFF">
+                <a:alpha val="70000"/>
+              </a:srgbClr>
+            </a:outerShdw>
+          </a:effectLst>
+        </p:spPr>
+        <p:txBody>
+          <a:bodyPr/>
+          <a:lstStyle/>
+          <a:p>
+            <a:endParaRPr lang="en-US"/>
+          </a:p>
+        </p:txBody>
+      </p:sp>
+      <p:sp>
+        <p:nvSpPr>
+          <p:cNvPr id="20" name="Shape 18"/>
+          <p:cNvSpPr/>
+          <p:nvPr/>
+        </p:nvSpPr>
+        <p:spPr>
+          <a:xfrm>
+            <a:off x="8216158" y="516910"/>
+            <a:ext cx="26883" cy="26883"/>
+          </a:xfrm>
+          <a:prstGeom prst="ellipse">
+            <a:avLst/>
+          </a:prstGeom>
+          <a:solidFill>
+            <a:srgbClr val="DCE9FF"/>
+          </a:solidFill>
+          <a:ln w="12700">
+            <a:solidFill>
+              <a:srgbClr val="DCE9FF"/>
+            </a:solidFill>
+            <a:prstDash val="solid"/>
+          </a:ln>
+        </p:spPr>
+        <p:txBody>
+          <a:bodyPr/>
+          <a:lstStyle/>
+          <a:p>
+            <a:endParaRPr lang="en-US"/>
+          </a:p>
+        </p:txBody>
+      </p:sp>
+      <p:sp>
+        <p:nvSpPr>
+          <p:cNvPr id="21" name="Text 19"/>
+          <p:cNvSpPr/>
+          <p:nvPr/>
+        </p:nvSpPr>
+        <p:spPr>
+          <a:xfrm>
+            <a:off x="274320" y="82296"/>
+            <a:ext cx="7315200" cy="347472"/>
+          </a:xfrm>
+          <a:prstGeom prst="rect">
+            <a:avLst/>
+          </a:prstGeom>
+          <a:noFill/>
+          <a:ln/>
+        </p:spPr>
+        <p:txBody>
+          <a:bodyPr wrap="square" rtlCol="0" anchor="ctr"/>
+          <a:lstStyle/>
+          <a:p>
+            <a:pPr marL="0" indent="0">
+              <a:buNone/>
+            </a:pPr>
+            <a:r>
+              <a:rPr lang="en-US" sz="2000" b="1" dirty="0">
+                <a:solidFill>
+                  <a:srgbClr val="EAF2FF"/>
+                </a:solidFill>
+                <a:latin typeface="Aptos" pitchFamily="34" charset="0"/>
+                <a:ea typeface="Aptos" pitchFamily="34" charset="-122"/>
+                <a:cs typeface="Aptos" pitchFamily="34" charset="-120"/>
+              </a:rPr>
+              <a:t>Data Flow</a:t>
+            </a:r>
+            <a:endParaRPr lang="en-US" sz="2000" dirty="0"/>
+          </a:p>
+        </p:txBody>
+      </p:sp>
+      <p:sp>
+        <p:nvSpPr>
+          <p:cNvPr id="22" name="Text 20"/>
+          <p:cNvSpPr/>
+          <p:nvPr/>
+        </p:nvSpPr>
+        <p:spPr>
+          <a:xfrm>
+            <a:off x="274320" y="420624"/>
+            <a:ext cx="7498080" cy="201168"/>
+          </a:xfrm>
+          <a:prstGeom prst="rect">
+            <a:avLst/>
+          </a:prstGeom>
+          <a:noFill/>
+          <a:ln/>
+        </p:spPr>
+        <p:txBody>
+          <a:bodyPr wrap="square" rtlCol="0" anchor="ctr"/>
+          <a:lstStyle/>
+          <a:p>
+            <a:pPr marL="0" indent="0">
+              <a:buNone/>
+            </a:pPr>
+            <a:r>
+              <a:rPr lang="en-US" sz="950" i="1" dirty="0">
+                <a:solidFill>
+                  <a:srgbClr val="9DBEF0"/>
+                </a:solidFill>
+                <a:latin typeface="Aptos" pitchFamily="34" charset="0"/>
+                <a:ea typeface="Aptos" pitchFamily="34" charset="-122"/>
+                <a:cs typeface="Aptos" pitchFamily="34" charset="-120"/>
+              </a:rPr>
+              <a:t>How a question becomes a trusted, traceable answer</a:t>
+            </a:r>
+            <a:endParaRPr lang="en-US" sz="950" dirty="0"/>
+          </a:p>
+        </p:txBody>
+      </p:sp>
+      <p:sp>
+        <p:nvSpPr>
+          <p:cNvPr id="23" name="Shape 21"/>
+          <p:cNvSpPr/>
+          <p:nvPr/>
+        </p:nvSpPr>
+        <p:spPr>
+          <a:xfrm>
+            <a:off x="0" y="4956048"/>
+            <a:ext cx="9144000" cy="187452"/>
+          </a:xfrm>
+          <a:prstGeom prst="rect">
+            <a:avLst/>
+          </a:prstGeom>
+          <a:solidFill>
+            <a:srgbClr val="0B1733"/>
+          </a:solidFill>
+          <a:ln w="12700">
+            <a:solidFill>
+              <a:srgbClr val="0B1733"/>
+            </a:solidFill>
+            <a:prstDash val="solid"/>
+          </a:ln>
+        </p:spPr>
+        <p:txBody>
+          <a:bodyPr/>
+          <a:lstStyle/>
+          <a:p>
+            <a:endParaRPr lang="en-US"/>
+          </a:p>
+        </p:txBody>
+      </p:sp>
+      <p:sp>
+        <p:nvSpPr>
+          <p:cNvPr id="24" name="Shape 22"/>
+          <p:cNvSpPr/>
+          <p:nvPr/>
+        </p:nvSpPr>
+        <p:spPr>
+          <a:xfrm>
+            <a:off x="0" y="4956048"/>
+            <a:ext cx="9144000" cy="16459"/>
+          </a:xfrm>
+          <a:prstGeom prst="rect">
+            <a:avLst/>
+          </a:prstGeom>
+          <a:solidFill>
+            <a:srgbClr val="2E5BC9"/>
+          </a:solidFill>
+          <a:ln w="12700">
+            <a:solidFill>
+              <a:srgbClr val="2E5BC9"/>
+            </a:solidFill>
+            <a:prstDash val="solid"/>
+          </a:ln>
+        </p:spPr>
+        <p:txBody>
+          <a:bodyPr/>
+          <a:lstStyle/>
+          <a:p>
+            <a:endParaRPr lang="en-US"/>
+          </a:p>
+        </p:txBody>
+      </p:sp>
+      <p:sp>
+        <p:nvSpPr>
+          <p:cNvPr id="25" name="Text 23"/>
+          <p:cNvSpPr/>
+          <p:nvPr/>
+        </p:nvSpPr>
+        <p:spPr>
+          <a:xfrm>
+            <a:off x="274320" y="4974336"/>
+            <a:ext cx="7315200" cy="164592"/>
+          </a:xfrm>
+          <a:prstGeom prst="rect">
+            <a:avLst/>
+          </a:prstGeom>
+          <a:noFill/>
+          <a:ln/>
+        </p:spPr>
+        <p:txBody>
+          <a:bodyPr wrap="square" rtlCol="0" anchor="ctr"/>
+          <a:lstStyle/>
+          <a:p>
+            <a:pPr marL="0" indent="0">
+              <a:buNone/>
+            </a:pPr>
+            <a:r>
+              <a:rPr lang="en-US" sz="750" dirty="0">
+                <a:solidFill>
+                  <a:srgbClr val="3F5379"/>
+                </a:solidFill>
+                <a:latin typeface="Aptos" pitchFamily="34" charset="0"/>
+                <a:ea typeface="Aptos" pitchFamily="34" charset="-122"/>
+                <a:cs typeface="Aptos" pitchFamily="34" charset="-120"/>
+              </a:rPr>
+              <a:t>Vulkan Werke  ·  SilverTrust Consulting  ·  Confidential</a:t>
+            </a:r>
+            <a:endParaRPr lang="en-US" sz="750" dirty="0"/>
+          </a:p>
+        </p:txBody>
+      </p:sp>
+      <p:sp>
+        <p:nvSpPr>
+          <p:cNvPr id="26" name="Text 24"/>
+          <p:cNvSpPr/>
+          <p:nvPr/>
+        </p:nvSpPr>
+        <p:spPr>
+          <a:xfrm>
+            <a:off x="8229600" y="4974336"/>
+            <a:ext cx="822960" cy="164592"/>
+          </a:xfrm>
+          <a:prstGeom prst="rect">
+            <a:avLst/>
+          </a:prstGeom>
+          <a:noFill/>
+          <a:ln/>
+        </p:spPr>
+        <p:txBody>
+          <a:bodyPr wrap="square" rtlCol="0" anchor="ctr"/>
+          <a:lstStyle/>
+          <a:p>
+            <a:pPr marL="0" indent="0" algn="r">
+              <a:buNone/>
+            </a:pPr>
+            <a:r>
+              <a:rPr lang="en-US" sz="750" dirty="0">
+                <a:solidFill>
+                  <a:srgbClr val="3F5379"/>
+                </a:solidFill>
+                <a:latin typeface="Aptos" pitchFamily="34" charset="0"/>
+                <a:ea typeface="Aptos" pitchFamily="34" charset="-122"/>
+                <a:cs typeface="Aptos" pitchFamily="34" charset="-120"/>
+              </a:rPr>
+              <a:t>7/13</a:t>
+            </a:r>
+            <a:endParaRPr lang="en-US" sz="750" dirty="0"/>
+          </a:p>
+        </p:txBody>
+      </p:sp>
+      <p:sp>
+        <p:nvSpPr>
+          <p:cNvPr id="27" name="Text 25"/>
+          <p:cNvSpPr/>
+          <p:nvPr/>
+        </p:nvSpPr>
+        <p:spPr>
+          <a:xfrm>
+            <a:off x="274320" y="841248"/>
+            <a:ext cx="3657600" cy="256032"/>
+          </a:xfrm>
+          <a:prstGeom prst="rect">
+            <a:avLst/>
+          </a:prstGeom>
+          <a:noFill/>
+          <a:ln/>
+        </p:spPr>
+        <p:txBody>
+          <a:bodyPr wrap="square" rtlCol="0" anchor="ctr"/>
+          <a:lstStyle/>
+          <a:p>
+            <a:pPr marL="0" indent="0">
+              <a:buNone/>
+            </a:pPr>
+            <a:r>
+              <a:rPr lang="en-US" sz="1100" b="1" dirty="0">
+                <a:solidFill>
+                  <a:srgbClr val="6B82B5"/>
+                </a:solidFill>
+                <a:latin typeface="Aptos" pitchFamily="34" charset="0"/>
+                <a:ea typeface="Aptos" pitchFamily="34" charset="-122"/>
+                <a:cs typeface="Aptos" pitchFamily="34" charset="-120"/>
+              </a:rPr>
+              <a:t>Process pipeline</a:t>
+            </a:r>
+            <a:endParaRPr lang="en-US" sz="1100" dirty="0"/>
+          </a:p>
+        </p:txBody>
+      </p:sp>
+      <p:sp>
+        <p:nvSpPr>
+          <p:cNvPr id="28" name="Shape 26"/>
+          <p:cNvSpPr/>
+          <p:nvPr/>
+        </p:nvSpPr>
+        <p:spPr>
+          <a:xfrm>
+            <a:off x="365760" y="1170432"/>
+            <a:ext cx="4206240" cy="402336"/>
+          </a:xfrm>
+          <a:prstGeom prst="rect">
+            <a:avLst/>
+          </a:prstGeom>
+          <a:solidFill>
+            <a:srgbClr val="0A1430"/>
+          </a:solidFill>
+          <a:ln w="10160">
+            <a:solidFill>
+              <a:srgbClr val="6B82B5">
+                <a:alpha val="60000"/>
+              </a:srgbClr>
+            </a:solidFill>
+            <a:prstDash val="solid"/>
+          </a:ln>
+        </p:spPr>
+        <p:txBody>
+          <a:bodyPr/>
+          <a:lstStyle/>
+          <a:p>
+            <a:endParaRPr lang="en-US"/>
+          </a:p>
+        </p:txBody>
+      </p:sp>
+      <p:sp>
+        <p:nvSpPr>
+          <p:cNvPr id="29" name="Shape 27"/>
+          <p:cNvSpPr/>
+          <p:nvPr/>
+        </p:nvSpPr>
+        <p:spPr>
+          <a:xfrm>
+            <a:off x="530352" y="1307592"/>
+            <a:ext cx="128016" cy="128016"/>
+          </a:xfrm>
+          <a:prstGeom prst="ellipse">
+            <a:avLst/>
+          </a:prstGeom>
+          <a:solidFill>
+            <a:srgbClr val="6B82B5"/>
+          </a:solidFill>
+          <a:ln w="6350">
+            <a:solidFill>
+              <a:srgbClr val="6B82B5"/>
+            </a:solidFill>
+            <a:prstDash val="solid"/>
+          </a:ln>
+          <a:effectLst>
+            <a:outerShdw blurRad="139700" dist="50800" dir="16200000" algn="bl" rotWithShape="0">
+              <a:srgbClr val="6B82B5">
+                <a:alpha val="70000"/>
+              </a:srgbClr>
+            </a:outerShdw>
+          </a:effectLst>
+        </p:spPr>
+        <p:txBody>
+          <a:bodyPr/>
+          <a:lstStyle/>
+          <a:p>
+            <a:endParaRPr lang="en-US"/>
+          </a:p>
+        </p:txBody>
+      </p:sp>
+      <p:sp>
+        <p:nvSpPr>
+          <p:cNvPr id="30" name="Shape 28"/>
+          <p:cNvSpPr/>
+          <p:nvPr/>
+        </p:nvSpPr>
+        <p:spPr>
+          <a:xfrm>
+            <a:off x="567477" y="1344717"/>
+            <a:ext cx="53767" cy="53767"/>
+          </a:xfrm>
+          <a:prstGeom prst="ellipse">
+            <a:avLst/>
+          </a:prstGeom>
+          <a:solidFill>
+            <a:srgbClr val="DCE9FF"/>
+          </a:solidFill>
+          <a:ln w="12700">
+            <a:solidFill>
+              <a:srgbClr val="DCE9FF"/>
+            </a:solidFill>
+            <a:prstDash val="solid"/>
+          </a:ln>
+        </p:spPr>
+        <p:txBody>
+          <a:bodyPr/>
+          <a:lstStyle/>
+          <a:p>
+            <a:endParaRPr lang="en-US"/>
+          </a:p>
+        </p:txBody>
+      </p:sp>
+      <p:sp>
+        <p:nvSpPr>
+          <p:cNvPr id="31" name="Text 29"/>
+          <p:cNvSpPr/>
+          <p:nvPr/>
+        </p:nvSpPr>
+        <p:spPr>
+          <a:xfrm>
+            <a:off x="457200" y="1234440"/>
+            <a:ext cx="274320" cy="274320"/>
+          </a:xfrm>
+          <a:prstGeom prst="rect">
+            <a:avLst/>
+          </a:prstGeom>
+          <a:noFill/>
+          <a:ln/>
+        </p:spPr>
+        <p:txBody>
+          <a:bodyPr wrap="square" lIns="0" tIns="0" rIns="0" bIns="0" rtlCol="0" anchor="ctr"/>
+          <a:lstStyle/>
+          <a:p>
+            <a:pPr marL="0" indent="0" algn="ctr">
+              <a:buNone/>
+            </a:pPr>
+            <a:r>
+              <a:rPr lang="en-US" sz="900" b="1" dirty="0">
+                <a:solidFill>
+                  <a:srgbClr val="03060F"/>
+                </a:solidFill>
+                <a:latin typeface="Aptos" pitchFamily="34" charset="0"/>
+                <a:ea typeface="Aptos" pitchFamily="34" charset="-122"/>
+                <a:cs typeface="Aptos" pitchFamily="34" charset="-120"/>
+              </a:rPr>
+              <a:t>1</a:t>
+            </a:r>
+            <a:endParaRPr lang="en-US" sz="900" dirty="0"/>
+          </a:p>
+        </p:txBody>
+      </p:sp>
+      <p:sp>
+        <p:nvSpPr>
+          <p:cNvPr id="32" name="Text 30"/>
+          <p:cNvSpPr/>
+          <p:nvPr/>
+        </p:nvSpPr>
+        <p:spPr>
+          <a:xfrm>
+            <a:off x="841248" y="1170432"/>
+            <a:ext cx="3657600" cy="402336"/>
+          </a:xfrm>
+          <a:prstGeom prst="rect">
+            <a:avLst/>
+          </a:prstGeom>
+          <a:noFill/>
+          <a:ln/>
+        </p:spPr>
+        <p:txBody>
+          <a:bodyPr wrap="square" rtlCol="0" anchor="ctr"/>
+          <a:lstStyle/>
+          <a:p>
+            <a:pPr marL="0" indent="0">
+              <a:buNone/>
+            </a:pPr>
+            <a:r>
+              <a:rPr lang="en-US" sz="1100" dirty="0">
+                <a:solidFill>
+                  <a:srgbClr val="EAF2FF"/>
+                </a:solidFill>
+                <a:latin typeface="Aptos" pitchFamily="34" charset="0"/>
+                <a:ea typeface="Aptos" pitchFamily="34" charset="-122"/>
+                <a:cs typeface="Aptos" pitchFamily="34" charset="-120"/>
+              </a:rPr>
+              <a:t>User Question	</a:t>
+            </a:r>
+            <a:endParaRPr lang="en-US" sz="1100" dirty="0"/>
+          </a:p>
+        </p:txBody>
+      </p:sp>
+      <p:sp>
+        <p:nvSpPr>
+          <p:cNvPr id="33" name="Shape 31"/>
+          <p:cNvSpPr/>
+          <p:nvPr/>
+        </p:nvSpPr>
+        <p:spPr>
+          <a:xfrm>
+            <a:off x="594360" y="1572768"/>
+            <a:ext cx="0" cy="109728"/>
+          </a:xfrm>
+          <a:prstGeom prst="line">
+            <a:avLst/>
+          </a:prstGeom>
+          <a:noFill/>
+          <a:ln w="12700">
+            <a:solidFill>
+              <a:srgbClr val="6B82B5">
+                <a:alpha val="65000"/>
+              </a:srgbClr>
+            </a:solidFill>
+            <a:prstDash val="solid"/>
+          </a:ln>
+        </p:spPr>
+        <p:txBody>
+          <a:bodyPr/>
+          <a:lstStyle/>
+          <a:p>
+            <a:endParaRPr lang="en-US"/>
+          </a:p>
+        </p:txBody>
+      </p:sp>
+      <p:sp>
+        <p:nvSpPr>
+          <p:cNvPr id="34" name="Shape 32"/>
+          <p:cNvSpPr/>
+          <p:nvPr/>
+        </p:nvSpPr>
+        <p:spPr>
+          <a:xfrm>
+            <a:off x="365760" y="1682496"/>
+            <a:ext cx="4206240" cy="402336"/>
+          </a:xfrm>
+          <a:prstGeom prst="rect">
+            <a:avLst/>
+          </a:prstGeom>
+          <a:solidFill>
+            <a:srgbClr val="0A1430"/>
+          </a:solidFill>
+          <a:ln w="10160">
+            <a:solidFill>
+              <a:srgbClr val="FF5FA8">
+                <a:alpha val="60000"/>
+              </a:srgbClr>
+            </a:solidFill>
+            <a:prstDash val="solid"/>
+          </a:ln>
+        </p:spPr>
+        <p:txBody>
+          <a:bodyPr/>
+          <a:lstStyle/>
+          <a:p>
+            <a:endParaRPr lang="en-US"/>
+          </a:p>
+        </p:txBody>
+      </p:sp>
+      <p:sp>
+        <p:nvSpPr>
+          <p:cNvPr id="35" name="Shape 33"/>
+          <p:cNvSpPr/>
+          <p:nvPr/>
+        </p:nvSpPr>
+        <p:spPr>
+          <a:xfrm>
+            <a:off x="530352" y="1819656"/>
+            <a:ext cx="128016" cy="128016"/>
+          </a:xfrm>
+          <a:prstGeom prst="ellipse">
+            <a:avLst/>
+          </a:prstGeom>
+          <a:solidFill>
+            <a:srgbClr val="FF5FA8"/>
+          </a:solidFill>
+          <a:ln w="6350">
+            <a:solidFill>
+              <a:srgbClr val="FF5FA8"/>
+            </a:solidFill>
+            <a:prstDash val="solid"/>
+          </a:ln>
+          <a:effectLst>
+            <a:outerShdw blurRad="139700" dist="50800" dir="16200000" algn="bl" rotWithShape="0">
+              <a:srgbClr val="FF5FA8">
+                <a:alpha val="70000"/>
+              </a:srgbClr>
+            </a:outerShdw>
+          </a:effectLst>
+        </p:spPr>
+        <p:txBody>
+          <a:bodyPr/>
+          <a:lstStyle/>
+          <a:p>
+            <a:endParaRPr lang="en-US"/>
+          </a:p>
+        </p:txBody>
+      </p:sp>
+      <p:sp>
+        <p:nvSpPr>
+          <p:cNvPr id="36" name="Shape 34"/>
+          <p:cNvSpPr/>
+          <p:nvPr/>
+        </p:nvSpPr>
+        <p:spPr>
+          <a:xfrm>
+            <a:off x="567477" y="1856781"/>
+            <a:ext cx="53767" cy="53767"/>
+          </a:xfrm>
+          <a:prstGeom prst="ellipse">
+            <a:avLst/>
+          </a:prstGeom>
+          <a:solidFill>
+            <a:srgbClr val="DCE9FF"/>
+          </a:solidFill>
+          <a:ln w="12700">
+            <a:solidFill>
+              <a:srgbClr val="DCE9FF"/>
+            </a:solidFill>
+            <a:prstDash val="solid"/>
+          </a:ln>
+        </p:spPr>
+        <p:txBody>
+          <a:bodyPr/>
+          <a:lstStyle/>
+          <a:p>
+            <a:endParaRPr lang="en-US"/>
+          </a:p>
+        </p:txBody>
+      </p:sp>
+      <p:sp>
+        <p:nvSpPr>
+          <p:cNvPr id="37" name="Text 35"/>
+          <p:cNvSpPr/>
+          <p:nvPr/>
+        </p:nvSpPr>
+        <p:spPr>
+          <a:xfrm>
+            <a:off x="457200" y="1746504"/>
+            <a:ext cx="274320" cy="274320"/>
+          </a:xfrm>
+          <a:prstGeom prst="rect">
+            <a:avLst/>
+          </a:prstGeom>
+          <a:noFill/>
+          <a:ln/>
+        </p:spPr>
+        <p:txBody>
+          <a:bodyPr wrap="square" lIns="0" tIns="0" rIns="0" bIns="0" rtlCol="0" anchor="ctr"/>
+          <a:lstStyle/>
+          <a:p>
+            <a:pPr marL="0" indent="0" algn="ctr">
+              <a:buNone/>
+            </a:pPr>
+            <a:r>
+              <a:rPr lang="en-US" sz="900" b="1" dirty="0">
+                <a:solidFill>
+                  <a:srgbClr val="03060F"/>
+                </a:solidFill>
+                <a:latin typeface="Aptos" pitchFamily="34" charset="0"/>
+                <a:ea typeface="Aptos" pitchFamily="34" charset="-122"/>
+                <a:cs typeface="Aptos" pitchFamily="34" charset="-120"/>
+              </a:rPr>
+              <a:t>2</a:t>
+            </a:r>
+            <a:endParaRPr lang="en-US" sz="900" dirty="0"/>
+          </a:p>
+        </p:txBody>
+      </p:sp>
+      <p:sp>
+        <p:nvSpPr>
+          <p:cNvPr id="38" name="Text 36"/>
+          <p:cNvSpPr/>
+          <p:nvPr/>
+        </p:nvSpPr>
+        <p:spPr>
+          <a:xfrm>
+            <a:off x="841248" y="1682496"/>
+            <a:ext cx="3657600" cy="402336"/>
+          </a:xfrm>
+          <a:prstGeom prst="rect">
+            <a:avLst/>
+          </a:prstGeom>
+          <a:noFill/>
+          <a:ln/>
+        </p:spPr>
+        <p:txBody>
+          <a:bodyPr wrap="square" rtlCol="0" anchor="ctr"/>
+          <a:lstStyle/>
+          <a:p>
+            <a:r>
+              <a:rPr lang="en-US" sz="1100" dirty="0">
+                <a:solidFill>
+                  <a:srgbClr val="EAF2FF"/>
+                </a:solidFill>
+                <a:latin typeface="Aptos" pitchFamily="34" charset="0"/>
+                <a:ea typeface="Aptos" pitchFamily="34" charset="-122"/>
+                <a:cs typeface="Aptos" pitchFamily="34" charset="-120"/>
+              </a:rPr>
+              <a:t>Permission Check</a:t>
+            </a:r>
+            <a:endParaRPr lang="en-US" sz="1100" dirty="0"/>
+          </a:p>
+        </p:txBody>
+      </p:sp>
+      <p:sp>
+        <p:nvSpPr>
+          <p:cNvPr id="39" name="Shape 37"/>
+          <p:cNvSpPr/>
+          <p:nvPr/>
+        </p:nvSpPr>
+        <p:spPr>
+          <a:xfrm>
+            <a:off x="594360" y="2084832"/>
+            <a:ext cx="0" cy="109728"/>
+          </a:xfrm>
+          <a:prstGeom prst="line">
+            <a:avLst/>
+          </a:prstGeom>
+          <a:noFill/>
+          <a:ln w="12700">
+            <a:solidFill>
+              <a:srgbClr val="FF5FA8">
+                <a:alpha val="65000"/>
+              </a:srgbClr>
+            </a:solidFill>
+            <a:prstDash val="solid"/>
+          </a:ln>
+        </p:spPr>
+        <p:txBody>
+          <a:bodyPr/>
+          <a:lstStyle/>
+          <a:p>
+            <a:endParaRPr lang="en-US"/>
+          </a:p>
+        </p:txBody>
+      </p:sp>
+      <p:sp>
+        <p:nvSpPr>
+          <p:cNvPr id="40" name="Shape 38"/>
+          <p:cNvSpPr/>
+          <p:nvPr/>
+        </p:nvSpPr>
+        <p:spPr>
+          <a:xfrm>
+            <a:off x="365760" y="2194560"/>
+            <a:ext cx="4206240" cy="402336"/>
+          </a:xfrm>
+          <a:prstGeom prst="rect">
+            <a:avLst/>
+          </a:prstGeom>
+          <a:solidFill>
+            <a:srgbClr val="0A1430"/>
+          </a:solidFill>
+          <a:ln w="10160">
+            <a:solidFill>
+              <a:srgbClr val="36E0FF">
+                <a:alpha val="60000"/>
+              </a:srgbClr>
+            </a:solidFill>
+            <a:prstDash val="solid"/>
+          </a:ln>
+        </p:spPr>
+        <p:txBody>
+          <a:bodyPr/>
+          <a:lstStyle/>
+          <a:p>
+            <a:endParaRPr lang="en-US"/>
+          </a:p>
+        </p:txBody>
+      </p:sp>
+      <p:sp>
+        <p:nvSpPr>
+          <p:cNvPr id="41" name="Shape 39"/>
+          <p:cNvSpPr/>
+          <p:nvPr/>
+        </p:nvSpPr>
+        <p:spPr>
+          <a:xfrm>
+            <a:off x="530352" y="2331720"/>
+            <a:ext cx="128016" cy="128016"/>
+          </a:xfrm>
+          <a:prstGeom prst="ellipse">
+            <a:avLst/>
+          </a:prstGeom>
+          <a:solidFill>
+            <a:srgbClr val="36E0FF"/>
+          </a:solidFill>
+          <a:ln w="6350">
+            <a:solidFill>
+              <a:srgbClr val="36E0FF"/>
+            </a:solidFill>
+            <a:prstDash val="solid"/>
+          </a:ln>
+          <a:effectLst>
+            <a:outerShdw blurRad="139700" dist="50800" dir="16200000" algn="bl" rotWithShape="0">
+              <a:srgbClr val="36E0FF">
+                <a:alpha val="70000"/>
+              </a:srgbClr>
+            </a:outerShdw>
+          </a:effectLst>
+        </p:spPr>
+        <p:txBody>
+          <a:bodyPr/>
+          <a:lstStyle/>
+          <a:p>
+            <a:endParaRPr lang="en-US"/>
+          </a:p>
+        </p:txBody>
+      </p:sp>
+      <p:sp>
+        <p:nvSpPr>
+          <p:cNvPr id="42" name="Shape 40"/>
+          <p:cNvSpPr/>
+          <p:nvPr/>
+        </p:nvSpPr>
+        <p:spPr>
+          <a:xfrm>
+            <a:off x="567477" y="2368845"/>
+            <a:ext cx="53767" cy="53767"/>
+          </a:xfrm>
+          <a:prstGeom prst="ellipse">
+            <a:avLst/>
+          </a:prstGeom>
+          <a:solidFill>
+            <a:srgbClr val="DCE9FF"/>
+          </a:solidFill>
+          <a:ln w="12700">
+            <a:solidFill>
+              <a:srgbClr val="DCE9FF"/>
+            </a:solidFill>
+            <a:prstDash val="solid"/>
+          </a:ln>
+        </p:spPr>
+        <p:txBody>
+          <a:bodyPr/>
+          <a:lstStyle/>
+          <a:p>
+            <a:endParaRPr lang="en-US"/>
+          </a:p>
+        </p:txBody>
+      </p:sp>
+      <p:sp>
+        <p:nvSpPr>
+          <p:cNvPr id="43" name="Text 41"/>
+          <p:cNvSpPr/>
+          <p:nvPr/>
+        </p:nvSpPr>
+        <p:spPr>
+          <a:xfrm>
+            <a:off x="457200" y="2258568"/>
+            <a:ext cx="274320" cy="274320"/>
+          </a:xfrm>
+          <a:prstGeom prst="rect">
+            <a:avLst/>
+          </a:prstGeom>
+          <a:noFill/>
+          <a:ln/>
+        </p:spPr>
+        <p:txBody>
+          <a:bodyPr wrap="square" lIns="0" tIns="0" rIns="0" bIns="0" rtlCol="0" anchor="ctr"/>
+          <a:lstStyle/>
+          <a:p>
+            <a:pPr marL="0" indent="0" algn="ctr">
+              <a:buNone/>
+            </a:pPr>
+            <a:r>
+              <a:rPr lang="en-US" sz="900" b="1" dirty="0">
+                <a:solidFill>
+                  <a:srgbClr val="03060F"/>
+                </a:solidFill>
+                <a:latin typeface="Aptos" pitchFamily="34" charset="0"/>
+                <a:ea typeface="Aptos" pitchFamily="34" charset="-122"/>
+                <a:cs typeface="Aptos" pitchFamily="34" charset="-120"/>
+              </a:rPr>
+              <a:t>3</a:t>
+            </a:r>
+            <a:endParaRPr lang="en-US" sz="900" dirty="0"/>
+          </a:p>
+        </p:txBody>
+      </p:sp>
+      <p:sp>
+        <p:nvSpPr>
+          <p:cNvPr id="44" name="Text 42"/>
+          <p:cNvSpPr/>
+          <p:nvPr/>
+        </p:nvSpPr>
+        <p:spPr>
+          <a:xfrm>
+            <a:off x="841248" y="2194560"/>
+            <a:ext cx="3657600" cy="402336"/>
+          </a:xfrm>
+          <a:prstGeom prst="rect">
+            <a:avLst/>
+          </a:prstGeom>
+          <a:noFill/>
+          <a:ln/>
+        </p:spPr>
+        <p:txBody>
+          <a:bodyPr wrap="square" rtlCol="0" anchor="ctr"/>
+          <a:lstStyle/>
+          <a:p>
+            <a:pPr marL="0" indent="0">
+              <a:buNone/>
+            </a:pPr>
+            <a:r>
+              <a:rPr lang="en-US" sz="1100" dirty="0">
+                <a:solidFill>
+                  <a:srgbClr val="EAF2FF"/>
+                </a:solidFill>
+                <a:latin typeface="Aptos" pitchFamily="34" charset="0"/>
+                <a:ea typeface="Aptos" pitchFamily="34" charset="-122"/>
+                <a:cs typeface="Aptos" pitchFamily="34" charset="-120"/>
+              </a:rPr>
+              <a:t>Relevant Data Selection</a:t>
+            </a:r>
+            <a:endParaRPr lang="en-US" sz="1100" dirty="0"/>
+          </a:p>
+        </p:txBody>
+      </p:sp>
+      <p:sp>
+        <p:nvSpPr>
+          <p:cNvPr id="45" name="Shape 43"/>
+          <p:cNvSpPr/>
+          <p:nvPr/>
+        </p:nvSpPr>
+        <p:spPr>
+          <a:xfrm>
+            <a:off x="594360" y="2596896"/>
+            <a:ext cx="0" cy="109728"/>
+          </a:xfrm>
+          <a:prstGeom prst="line">
+            <a:avLst/>
+          </a:prstGeom>
+          <a:noFill/>
+          <a:ln w="12700">
+            <a:solidFill>
+              <a:srgbClr val="36E0FF">
+                <a:alpha val="65000"/>
+              </a:srgbClr>
+            </a:solidFill>
+            <a:prstDash val="solid"/>
+          </a:ln>
+        </p:spPr>
+        <p:txBody>
+          <a:bodyPr/>
+          <a:lstStyle/>
+          <a:p>
+            <a:endParaRPr lang="en-US"/>
+          </a:p>
+        </p:txBody>
+      </p:sp>
+      <p:sp>
+        <p:nvSpPr>
+          <p:cNvPr id="46" name="Shape 44"/>
+          <p:cNvSpPr/>
+          <p:nvPr/>
+        </p:nvSpPr>
+        <p:spPr>
+          <a:xfrm>
+            <a:off x="365760" y="2706624"/>
+            <a:ext cx="4206240" cy="402336"/>
+          </a:xfrm>
+          <a:prstGeom prst="rect">
+            <a:avLst/>
+          </a:prstGeom>
+          <a:solidFill>
+            <a:srgbClr val="0A1430"/>
+          </a:solidFill>
+          <a:ln w="10160">
+            <a:solidFill>
+              <a:srgbClr val="FFC23D">
+                <a:alpha val="60000"/>
+              </a:srgbClr>
+            </a:solidFill>
+            <a:prstDash val="solid"/>
+          </a:ln>
+        </p:spPr>
+        <p:txBody>
+          <a:bodyPr/>
+          <a:lstStyle/>
+          <a:p>
+            <a:endParaRPr lang="en-US"/>
+          </a:p>
+        </p:txBody>
+      </p:sp>
+      <p:sp>
+        <p:nvSpPr>
+          <p:cNvPr id="47" name="Shape 45"/>
+          <p:cNvSpPr/>
+          <p:nvPr/>
+        </p:nvSpPr>
+        <p:spPr>
+          <a:xfrm>
+            <a:off x="530352" y="2843784"/>
+            <a:ext cx="128016" cy="128016"/>
+          </a:xfrm>
+          <a:prstGeom prst="ellipse">
+            <a:avLst/>
+          </a:prstGeom>
+          <a:solidFill>
+            <a:srgbClr val="FFC23D"/>
+          </a:solidFill>
+          <a:ln w="6350">
+            <a:solidFill>
+              <a:srgbClr val="FFC23D"/>
+            </a:solidFill>
+            <a:prstDash val="solid"/>
+          </a:ln>
+          <a:effectLst>
+            <a:outerShdw blurRad="139700" dist="50800" dir="16200000" algn="bl" rotWithShape="0">
+              <a:srgbClr val="FFC23D">
+                <a:alpha val="70000"/>
+              </a:srgbClr>
+            </a:outerShdw>
+          </a:effectLst>
+        </p:spPr>
+        <p:txBody>
+          <a:bodyPr/>
+          <a:lstStyle/>
+          <a:p>
+            <a:endParaRPr lang="en-US"/>
+          </a:p>
+        </p:txBody>
+      </p:sp>
+      <p:sp>
+        <p:nvSpPr>
+          <p:cNvPr id="48" name="Shape 46"/>
+          <p:cNvSpPr/>
+          <p:nvPr/>
+        </p:nvSpPr>
+        <p:spPr>
+          <a:xfrm>
+            <a:off x="567477" y="2880909"/>
+            <a:ext cx="53767" cy="53767"/>
+          </a:xfrm>
+          <a:prstGeom prst="ellipse">
+            <a:avLst/>
+          </a:prstGeom>
+          <a:solidFill>
+            <a:srgbClr val="DCE9FF"/>
+          </a:solidFill>
+          <a:ln w="12700">
+            <a:solidFill>
+              <a:srgbClr val="DCE9FF"/>
+            </a:solidFill>
+            <a:prstDash val="solid"/>
+          </a:ln>
+        </p:spPr>
+        <p:txBody>
+          <a:bodyPr/>
+          <a:lstStyle/>
+          <a:p>
+            <a:endParaRPr lang="en-US"/>
+          </a:p>
+        </p:txBody>
+      </p:sp>
+      <p:sp>
+        <p:nvSpPr>
+          <p:cNvPr id="49" name="Text 47"/>
+          <p:cNvSpPr/>
+          <p:nvPr/>
+        </p:nvSpPr>
+        <p:spPr>
+          <a:xfrm>
+            <a:off x="457200" y="2770632"/>
+            <a:ext cx="274320" cy="274320"/>
+          </a:xfrm>
+          <a:prstGeom prst="rect">
+            <a:avLst/>
+          </a:prstGeom>
+          <a:noFill/>
+          <a:ln/>
+        </p:spPr>
+        <p:txBody>
+          <a:bodyPr wrap="square" lIns="0" tIns="0" rIns="0" bIns="0" rtlCol="0" anchor="ctr"/>
+          <a:lstStyle/>
+          <a:p>
+            <a:pPr marL="0" indent="0" algn="ctr">
+              <a:buNone/>
+            </a:pPr>
+            <a:r>
+              <a:rPr lang="en-US" sz="900" b="1" dirty="0">
+                <a:solidFill>
+                  <a:srgbClr val="03060F"/>
+                </a:solidFill>
+                <a:latin typeface="Aptos" pitchFamily="34" charset="0"/>
+                <a:ea typeface="Aptos" pitchFamily="34" charset="-122"/>
+                <a:cs typeface="Aptos" pitchFamily="34" charset="-120"/>
+              </a:rPr>
+              <a:t>4</a:t>
+            </a:r>
+            <a:endParaRPr lang="en-US" sz="900" dirty="0"/>
+          </a:p>
+        </p:txBody>
+      </p:sp>
+      <p:sp>
+        <p:nvSpPr>
+          <p:cNvPr id="50" name="Text 48"/>
+          <p:cNvSpPr/>
+          <p:nvPr/>
+        </p:nvSpPr>
+        <p:spPr>
+          <a:xfrm>
+            <a:off x="841248" y="2706624"/>
+            <a:ext cx="3657600" cy="402336"/>
+          </a:xfrm>
+          <a:prstGeom prst="rect">
+            <a:avLst/>
+          </a:prstGeom>
+          <a:noFill/>
+          <a:ln/>
+        </p:spPr>
+        <p:txBody>
+          <a:bodyPr wrap="square" rtlCol="0" anchor="ctr"/>
+          <a:lstStyle/>
+          <a:p>
+            <a:pPr marL="0" indent="0">
+              <a:buNone/>
+            </a:pPr>
+            <a:r>
+              <a:rPr lang="en-US" sz="1100" dirty="0">
+                <a:solidFill>
+                  <a:srgbClr val="EAF2FF"/>
+                </a:solidFill>
+                <a:latin typeface="Aptos" pitchFamily="34" charset="0"/>
+                <a:ea typeface="Aptos" pitchFamily="34" charset="-122"/>
+                <a:cs typeface="Aptos" pitchFamily="34" charset="-120"/>
+              </a:rPr>
+              <a:t>KPI Calculation</a:t>
+            </a:r>
+            <a:endParaRPr lang="en-US" sz="1100" dirty="0"/>
+          </a:p>
+        </p:txBody>
+      </p:sp>
+      <p:sp>
+        <p:nvSpPr>
+          <p:cNvPr id="51" name="Shape 49"/>
+          <p:cNvSpPr/>
+          <p:nvPr/>
+        </p:nvSpPr>
+        <p:spPr>
+          <a:xfrm>
+            <a:off x="594360" y="3108960"/>
+            <a:ext cx="0" cy="109728"/>
+          </a:xfrm>
+          <a:prstGeom prst="line">
+            <a:avLst/>
+          </a:prstGeom>
+          <a:noFill/>
+          <a:ln w="12700">
+            <a:solidFill>
+              <a:srgbClr val="FFC23D">
+                <a:alpha val="65000"/>
+              </a:srgbClr>
+            </a:solidFill>
+            <a:prstDash val="solid"/>
+          </a:ln>
+        </p:spPr>
+        <p:txBody>
+          <a:bodyPr/>
+          <a:lstStyle/>
+          <a:p>
+            <a:endParaRPr lang="en-US"/>
+          </a:p>
+        </p:txBody>
+      </p:sp>
+      <p:sp>
+        <p:nvSpPr>
+          <p:cNvPr id="52" name="Shape 50"/>
+          <p:cNvSpPr/>
+          <p:nvPr/>
+        </p:nvSpPr>
+        <p:spPr>
+          <a:xfrm>
+            <a:off x="365760" y="3218688"/>
+            <a:ext cx="4206240" cy="402336"/>
+          </a:xfrm>
+          <a:prstGeom prst="rect">
+            <a:avLst/>
+          </a:prstGeom>
+          <a:solidFill>
+            <a:srgbClr val="0A1430"/>
+          </a:solidFill>
+          <a:ln w="10160">
+            <a:solidFill>
+              <a:srgbClr val="5B9BFF">
+                <a:alpha val="60000"/>
+              </a:srgbClr>
+            </a:solidFill>
+            <a:prstDash val="solid"/>
+          </a:ln>
+        </p:spPr>
+        <p:txBody>
+          <a:bodyPr/>
+          <a:lstStyle/>
+          <a:p>
+            <a:endParaRPr lang="en-US"/>
+          </a:p>
+        </p:txBody>
+      </p:sp>
+      <p:sp>
+        <p:nvSpPr>
+          <p:cNvPr id="53" name="Shape 51"/>
+          <p:cNvSpPr/>
+          <p:nvPr/>
+        </p:nvSpPr>
+        <p:spPr>
+          <a:xfrm>
+            <a:off x="530352" y="3355848"/>
+            <a:ext cx="128016" cy="128016"/>
+          </a:xfrm>
+          <a:prstGeom prst="ellipse">
+            <a:avLst/>
+          </a:prstGeom>
+          <a:solidFill>
+            <a:srgbClr val="5B9BFF"/>
+          </a:solidFill>
+          <a:ln w="6350">
+            <a:solidFill>
+              <a:srgbClr val="5B9BFF"/>
+            </a:solidFill>
+            <a:prstDash val="solid"/>
+          </a:ln>
+          <a:effectLst>
+            <a:outerShdw blurRad="139700" dist="50800" dir="16200000" algn="bl" rotWithShape="0">
+              <a:srgbClr val="5B9BFF">
+                <a:alpha val="70000"/>
+              </a:srgbClr>
+            </a:outerShdw>
+          </a:effectLst>
+        </p:spPr>
+        <p:txBody>
+          <a:bodyPr/>
+          <a:lstStyle/>
+          <a:p>
+            <a:endParaRPr lang="en-US"/>
+          </a:p>
+        </p:txBody>
+      </p:sp>
+      <p:sp>
+        <p:nvSpPr>
+          <p:cNvPr id="54" name="Shape 52"/>
+          <p:cNvSpPr/>
+          <p:nvPr/>
+        </p:nvSpPr>
+        <p:spPr>
+          <a:xfrm>
+            <a:off x="567477" y="3392973"/>
+            <a:ext cx="53767" cy="53767"/>
+          </a:xfrm>
+          <a:prstGeom prst="ellipse">
+            <a:avLst/>
+          </a:prstGeom>
+          <a:solidFill>
+            <a:srgbClr val="DCE9FF"/>
+          </a:solidFill>
+          <a:ln w="12700">
+            <a:solidFill>
+              <a:srgbClr val="DCE9FF"/>
+            </a:solidFill>
+            <a:prstDash val="solid"/>
+          </a:ln>
+        </p:spPr>
+        <p:txBody>
+          <a:bodyPr/>
+          <a:lstStyle/>
+          <a:p>
+            <a:endParaRPr lang="en-US"/>
+          </a:p>
+        </p:txBody>
+      </p:sp>
+      <p:sp>
+        <p:nvSpPr>
+          <p:cNvPr id="55" name="Text 53"/>
+          <p:cNvSpPr/>
+          <p:nvPr/>
+        </p:nvSpPr>
+        <p:spPr>
+          <a:xfrm>
+            <a:off x="457200" y="3282696"/>
+            <a:ext cx="274320" cy="274320"/>
+          </a:xfrm>
+          <a:prstGeom prst="rect">
+            <a:avLst/>
+          </a:prstGeom>
+          <a:noFill/>
+          <a:ln/>
+        </p:spPr>
+        <p:txBody>
+          <a:bodyPr wrap="square" lIns="0" tIns="0" rIns="0" bIns="0" rtlCol="0" anchor="ctr"/>
+          <a:lstStyle/>
+          <a:p>
+            <a:pPr marL="0" indent="0" algn="ctr">
+              <a:buNone/>
+            </a:pPr>
+            <a:r>
+              <a:rPr lang="en-US" sz="900" b="1" dirty="0">
+                <a:solidFill>
+                  <a:srgbClr val="03060F"/>
+                </a:solidFill>
+                <a:latin typeface="Aptos" pitchFamily="34" charset="0"/>
+                <a:ea typeface="Aptos" pitchFamily="34" charset="-122"/>
+                <a:cs typeface="Aptos" pitchFamily="34" charset="-120"/>
+              </a:rPr>
+              <a:t>5</a:t>
+            </a:r>
+            <a:endParaRPr lang="en-US" sz="900" dirty="0"/>
+          </a:p>
+        </p:txBody>
+      </p:sp>
+      <p:sp>
+        <p:nvSpPr>
+          <p:cNvPr id="56" name="Text 54"/>
+          <p:cNvSpPr/>
+          <p:nvPr/>
+        </p:nvSpPr>
+        <p:spPr>
+          <a:xfrm>
+            <a:off x="841248" y="3218688"/>
+            <a:ext cx="3657600" cy="402336"/>
+          </a:xfrm>
+          <a:prstGeom prst="rect">
+            <a:avLst/>
+          </a:prstGeom>
+          <a:noFill/>
+          <a:ln/>
+        </p:spPr>
+        <p:txBody>
+          <a:bodyPr wrap="square" rtlCol="0" anchor="ctr"/>
+          <a:lstStyle/>
+          <a:p>
+            <a:r>
+              <a:rPr lang="en-US" sz="1100" dirty="0">
+                <a:solidFill>
+                  <a:srgbClr val="EAF2FF"/>
+                </a:solidFill>
+                <a:latin typeface="Aptos" pitchFamily="34" charset="0"/>
+                <a:ea typeface="Aptos" pitchFamily="34" charset="-122"/>
+                <a:cs typeface="Aptos" pitchFamily="34" charset="-120"/>
+              </a:rPr>
+              <a:t>Context Package</a:t>
+            </a:r>
+            <a:endParaRPr lang="en-US" sz="1100" dirty="0"/>
+          </a:p>
+        </p:txBody>
+      </p:sp>
+      <p:sp>
+        <p:nvSpPr>
+          <p:cNvPr id="57" name="Shape 55"/>
+          <p:cNvSpPr/>
+          <p:nvPr/>
+        </p:nvSpPr>
+        <p:spPr>
+          <a:xfrm>
+            <a:off x="594360" y="3621024"/>
+            <a:ext cx="0" cy="109728"/>
+          </a:xfrm>
+          <a:prstGeom prst="line">
+            <a:avLst/>
+          </a:prstGeom>
+          <a:noFill/>
+          <a:ln w="12700">
+            <a:solidFill>
+              <a:srgbClr val="5B9BFF">
+                <a:alpha val="65000"/>
+              </a:srgbClr>
+            </a:solidFill>
+            <a:prstDash val="solid"/>
+          </a:ln>
+        </p:spPr>
+        <p:txBody>
+          <a:bodyPr/>
+          <a:lstStyle/>
+          <a:p>
+            <a:endParaRPr lang="en-US"/>
+          </a:p>
+        </p:txBody>
+      </p:sp>
+      <p:sp>
+        <p:nvSpPr>
+          <p:cNvPr id="58" name="Shape 56"/>
+          <p:cNvSpPr/>
+          <p:nvPr/>
+        </p:nvSpPr>
+        <p:spPr>
+          <a:xfrm>
+            <a:off x="365760" y="3730752"/>
+            <a:ext cx="4206240" cy="402336"/>
+          </a:xfrm>
+          <a:prstGeom prst="rect">
+            <a:avLst/>
+          </a:prstGeom>
+          <a:solidFill>
+            <a:srgbClr val="0A1430"/>
+          </a:solidFill>
+          <a:ln w="10160">
+            <a:solidFill>
+              <a:srgbClr val="3DEFC4">
+                <a:alpha val="60000"/>
+              </a:srgbClr>
+            </a:solidFill>
+            <a:prstDash val="solid"/>
+          </a:ln>
+        </p:spPr>
+        <p:txBody>
+          <a:bodyPr/>
+          <a:lstStyle/>
+          <a:p>
+            <a:endParaRPr lang="en-US"/>
+          </a:p>
+        </p:txBody>
+      </p:sp>
+      <p:sp>
+        <p:nvSpPr>
+          <p:cNvPr id="59" name="Shape 57"/>
+          <p:cNvSpPr/>
+          <p:nvPr/>
+        </p:nvSpPr>
+        <p:spPr>
+          <a:xfrm>
+            <a:off x="530352" y="3867912"/>
+            <a:ext cx="128016" cy="128016"/>
+          </a:xfrm>
+          <a:prstGeom prst="ellipse">
+            <a:avLst/>
+          </a:prstGeom>
+          <a:solidFill>
+            <a:srgbClr val="3DEFC4"/>
+          </a:solidFill>
+          <a:ln w="6350">
+            <a:solidFill>
+              <a:srgbClr val="3DEFC4"/>
+            </a:solidFill>
+            <a:prstDash val="solid"/>
+          </a:ln>
+          <a:effectLst>
+            <a:outerShdw blurRad="139700" dist="50800" dir="16200000" algn="bl" rotWithShape="0">
+              <a:srgbClr val="3DEFC4">
+                <a:alpha val="70000"/>
+              </a:srgbClr>
+            </a:outerShdw>
+          </a:effectLst>
+        </p:spPr>
+        <p:txBody>
+          <a:bodyPr/>
+          <a:lstStyle/>
+          <a:p>
+            <a:endParaRPr lang="en-US"/>
+          </a:p>
+        </p:txBody>
+      </p:sp>
+      <p:sp>
+        <p:nvSpPr>
+          <p:cNvPr id="60" name="Shape 58"/>
+          <p:cNvSpPr/>
+          <p:nvPr/>
+        </p:nvSpPr>
+        <p:spPr>
+          <a:xfrm>
+            <a:off x="567477" y="3905037"/>
+            <a:ext cx="53767" cy="53767"/>
+          </a:xfrm>
+          <a:prstGeom prst="ellipse">
+            <a:avLst/>
+          </a:prstGeom>
+          <a:solidFill>
+            <a:srgbClr val="DCE9FF"/>
+          </a:solidFill>
+          <a:ln w="12700">
+            <a:solidFill>
+              <a:srgbClr val="DCE9FF"/>
+            </a:solidFill>
+            <a:prstDash val="solid"/>
+          </a:ln>
+        </p:spPr>
+        <p:txBody>
+          <a:bodyPr/>
+          <a:lstStyle/>
+          <a:p>
+            <a:endParaRPr lang="en-US"/>
+          </a:p>
+        </p:txBody>
+      </p:sp>
+      <p:sp>
+        <p:nvSpPr>
+          <p:cNvPr id="61" name="Text 59"/>
+          <p:cNvSpPr/>
+          <p:nvPr/>
+        </p:nvSpPr>
+        <p:spPr>
+          <a:xfrm>
+            <a:off x="457200" y="3794760"/>
+            <a:ext cx="274320" cy="274320"/>
+          </a:xfrm>
+          <a:prstGeom prst="rect">
+            <a:avLst/>
+          </a:prstGeom>
+          <a:noFill/>
+          <a:ln/>
+        </p:spPr>
+        <p:txBody>
+          <a:bodyPr wrap="square" lIns="0" tIns="0" rIns="0" bIns="0" rtlCol="0" anchor="ctr"/>
+          <a:lstStyle/>
+          <a:p>
+            <a:pPr marL="0" indent="0" algn="ctr">
+              <a:buNone/>
+            </a:pPr>
+            <a:r>
+              <a:rPr lang="en-US" sz="900" b="1" dirty="0">
+                <a:solidFill>
+                  <a:srgbClr val="03060F"/>
+                </a:solidFill>
+                <a:latin typeface="Aptos" pitchFamily="34" charset="0"/>
+                <a:ea typeface="Aptos" pitchFamily="34" charset="-122"/>
+                <a:cs typeface="Aptos" pitchFamily="34" charset="-120"/>
+              </a:rPr>
+              <a:t>6</a:t>
+            </a:r>
+            <a:endParaRPr lang="en-US" sz="900" dirty="0"/>
+          </a:p>
+        </p:txBody>
+      </p:sp>
+      <p:sp>
+        <p:nvSpPr>
+          <p:cNvPr id="62" name="Text 60"/>
+          <p:cNvSpPr/>
+          <p:nvPr/>
+        </p:nvSpPr>
+        <p:spPr>
+          <a:xfrm>
+            <a:off x="841248" y="3730752"/>
+            <a:ext cx="3657600" cy="402336"/>
+          </a:xfrm>
+          <a:prstGeom prst="rect">
+            <a:avLst/>
+          </a:prstGeom>
+          <a:noFill/>
+          <a:ln/>
+        </p:spPr>
+        <p:txBody>
+          <a:bodyPr wrap="square" rtlCol="0" anchor="ctr"/>
+          <a:lstStyle/>
+          <a:p>
+            <a:r>
+              <a:rPr lang="en-US" sz="1100" dirty="0">
+                <a:solidFill>
+                  <a:srgbClr val="EAF2FF"/>
+                </a:solidFill>
+                <a:latin typeface="Aptos" pitchFamily="34" charset="0"/>
+                <a:ea typeface="Aptos" pitchFamily="34" charset="-122"/>
+                <a:cs typeface="Aptos" pitchFamily="34" charset="-120"/>
+              </a:rPr>
+              <a:t>LLM Analysis</a:t>
+            </a:r>
+            <a:endParaRPr lang="en-US" sz="1100" dirty="0"/>
+          </a:p>
+        </p:txBody>
+      </p:sp>
+      <p:sp>
+        <p:nvSpPr>
+          <p:cNvPr id="63" name="Shape 61"/>
+          <p:cNvSpPr/>
+          <p:nvPr/>
+        </p:nvSpPr>
+        <p:spPr>
+          <a:xfrm>
+            <a:off x="594360" y="4133088"/>
+            <a:ext cx="0" cy="109728"/>
+          </a:xfrm>
+          <a:prstGeom prst="line">
+            <a:avLst/>
+          </a:prstGeom>
+          <a:noFill/>
+          <a:ln w="12700">
+            <a:solidFill>
+              <a:srgbClr val="3DEFC4">
+                <a:alpha val="65000"/>
+              </a:srgbClr>
+            </a:solidFill>
+            <a:prstDash val="solid"/>
+          </a:ln>
+        </p:spPr>
+        <p:txBody>
+          <a:bodyPr/>
+          <a:lstStyle/>
+          <a:p>
+            <a:endParaRPr lang="en-US"/>
+          </a:p>
+        </p:txBody>
+      </p:sp>
+      <p:sp>
+        <p:nvSpPr>
+          <p:cNvPr id="64" name="Shape 62"/>
+          <p:cNvSpPr/>
+          <p:nvPr/>
+        </p:nvSpPr>
+        <p:spPr>
+          <a:xfrm>
+            <a:off x="365760" y="4242816"/>
+            <a:ext cx="4206240" cy="402336"/>
+          </a:xfrm>
+          <a:prstGeom prst="rect">
+            <a:avLst/>
+          </a:prstGeom>
+          <a:solidFill>
+            <a:srgbClr val="0A1430"/>
+          </a:solidFill>
+          <a:ln w="10160">
+            <a:solidFill>
+              <a:srgbClr val="A78BFF">
+                <a:alpha val="60000"/>
+              </a:srgbClr>
+            </a:solidFill>
+            <a:prstDash val="solid"/>
+          </a:ln>
+        </p:spPr>
+        <p:txBody>
+          <a:bodyPr/>
+          <a:lstStyle/>
+          <a:p>
+            <a:endParaRPr lang="en-US"/>
+          </a:p>
+        </p:txBody>
+      </p:sp>
+      <p:sp>
+        <p:nvSpPr>
+          <p:cNvPr id="65" name="Shape 63"/>
+          <p:cNvSpPr/>
+          <p:nvPr/>
+        </p:nvSpPr>
+        <p:spPr>
+          <a:xfrm>
+            <a:off x="530352" y="4379976"/>
+            <a:ext cx="128016" cy="128016"/>
+          </a:xfrm>
+          <a:prstGeom prst="ellipse">
+            <a:avLst/>
+          </a:prstGeom>
+          <a:solidFill>
+            <a:srgbClr val="A78BFF"/>
+          </a:solidFill>
+          <a:ln w="6350">
+            <a:solidFill>
+              <a:srgbClr val="A78BFF"/>
+            </a:solidFill>
+            <a:prstDash val="solid"/>
+          </a:ln>
+          <a:effectLst>
+            <a:outerShdw blurRad="139700" dist="50800" dir="16200000" algn="bl" rotWithShape="0">
+              <a:srgbClr val="A78BFF">
+                <a:alpha val="70000"/>
+              </a:srgbClr>
+            </a:outerShdw>
+          </a:effectLst>
+        </p:spPr>
+        <p:txBody>
+          <a:bodyPr/>
+          <a:lstStyle/>
+          <a:p>
+            <a:endParaRPr lang="en-US"/>
+          </a:p>
+        </p:txBody>
+      </p:sp>
+      <p:sp>
+        <p:nvSpPr>
+          <p:cNvPr id="66" name="Shape 64"/>
+          <p:cNvSpPr/>
+          <p:nvPr/>
+        </p:nvSpPr>
+        <p:spPr>
+          <a:xfrm>
+            <a:off x="567477" y="4417101"/>
+            <a:ext cx="53767" cy="53767"/>
+          </a:xfrm>
+          <a:prstGeom prst="ellipse">
+            <a:avLst/>
+          </a:prstGeom>
+          <a:solidFill>
+            <a:srgbClr val="DCE9FF"/>
+          </a:solidFill>
+          <a:ln w="12700">
+            <a:solidFill>
+              <a:srgbClr val="DCE9FF"/>
+            </a:solidFill>
+            <a:prstDash val="solid"/>
+          </a:ln>
+        </p:spPr>
+        <p:txBody>
+          <a:bodyPr/>
+          <a:lstStyle/>
+          <a:p>
+            <a:endParaRPr lang="en-US"/>
+          </a:p>
+        </p:txBody>
+      </p:sp>
+      <p:sp>
+        <p:nvSpPr>
+          <p:cNvPr id="67" name="Text 65"/>
+          <p:cNvSpPr/>
+          <p:nvPr/>
+        </p:nvSpPr>
+        <p:spPr>
+          <a:xfrm>
+            <a:off x="457200" y="4306824"/>
+            <a:ext cx="274320" cy="274320"/>
+          </a:xfrm>
+          <a:prstGeom prst="rect">
+            <a:avLst/>
+          </a:prstGeom>
+          <a:noFill/>
+          <a:ln/>
+        </p:spPr>
+        <p:txBody>
+          <a:bodyPr wrap="square" lIns="0" tIns="0" rIns="0" bIns="0" rtlCol="0" anchor="ctr"/>
+          <a:lstStyle/>
+          <a:p>
+            <a:pPr marL="0" indent="0" algn="ctr">
+              <a:buNone/>
+            </a:pPr>
+            <a:r>
+              <a:rPr lang="en-US" sz="900" b="1" dirty="0">
+                <a:solidFill>
+                  <a:srgbClr val="03060F"/>
+                </a:solidFill>
+                <a:latin typeface="Aptos" pitchFamily="34" charset="0"/>
+                <a:ea typeface="Aptos" pitchFamily="34" charset="-122"/>
+                <a:cs typeface="Aptos" pitchFamily="34" charset="-120"/>
+              </a:rPr>
+              <a:t>7</a:t>
+            </a:r>
+            <a:endParaRPr lang="en-US" sz="900" dirty="0"/>
+          </a:p>
+        </p:txBody>
+      </p:sp>
+      <p:sp>
+        <p:nvSpPr>
+          <p:cNvPr id="68" name="Text 66"/>
+          <p:cNvSpPr/>
+          <p:nvPr/>
+        </p:nvSpPr>
+        <p:spPr>
+          <a:xfrm>
+            <a:off x="841248" y="4242816"/>
+            <a:ext cx="3657600" cy="402336"/>
+          </a:xfrm>
+          <a:prstGeom prst="rect">
+            <a:avLst/>
+          </a:prstGeom>
+          <a:noFill/>
+          <a:ln/>
+        </p:spPr>
+        <p:txBody>
+          <a:bodyPr wrap="square" rtlCol="0" anchor="ctr"/>
+          <a:lstStyle/>
+          <a:p>
+            <a:r>
+              <a:rPr lang="en-US" sz="1100" dirty="0">
+                <a:solidFill>
+                  <a:srgbClr val="EAF2FF"/>
+                </a:solidFill>
+                <a:latin typeface="Aptos" pitchFamily="34" charset="0"/>
+                <a:ea typeface="Aptos" pitchFamily="34" charset="-122"/>
+                <a:cs typeface="Aptos" pitchFamily="34" charset="-120"/>
+              </a:rPr>
+              <a:t>Human Review → Final Decision</a:t>
+            </a:r>
+            <a:endParaRPr lang="en-US" sz="1100" dirty="0"/>
+          </a:p>
+        </p:txBody>
+      </p:sp>
+      <p:sp>
+        <p:nvSpPr>
+          <p:cNvPr id="69" name="Shape 67"/>
+          <p:cNvSpPr/>
+          <p:nvPr/>
+        </p:nvSpPr>
+        <p:spPr>
+          <a:xfrm>
+            <a:off x="4892040" y="841248"/>
+            <a:ext cx="3995928" cy="3913632"/>
+          </a:xfrm>
+          <a:prstGeom prst="rect">
+            <a:avLst/>
+          </a:prstGeom>
+          <a:solidFill>
+            <a:srgbClr val="0A1430"/>
+          </a:solidFill>
+          <a:ln w="12700">
+            <a:solidFill>
+              <a:srgbClr val="36E0FF">
+                <a:alpha val="65000"/>
+              </a:srgbClr>
+            </a:solidFill>
+            <a:prstDash val="solid"/>
+          </a:ln>
+          <a:effectLst>
+            <a:outerShdw blurRad="88900" dist="38100" dir="8100000" algn="bl" rotWithShape="0">
+              <a:srgbClr val="000000">
+                <a:alpha val="40000"/>
+              </a:srgbClr>
+            </a:outerShdw>
+          </a:effectLst>
+        </p:spPr>
+        <p:txBody>
+          <a:bodyPr/>
+          <a:lstStyle/>
+          <a:p>
+            <a:endParaRPr lang="en-US"/>
+          </a:p>
+        </p:txBody>
+      </p:sp>
+      <p:sp>
+        <p:nvSpPr>
+          <p:cNvPr id="70" name="Shape 68"/>
+          <p:cNvSpPr/>
+          <p:nvPr/>
+        </p:nvSpPr>
+        <p:spPr>
+          <a:xfrm>
+            <a:off x="4892040" y="841248"/>
+            <a:ext cx="3995928" cy="54864"/>
+          </a:xfrm>
+          <a:prstGeom prst="rect">
+            <a:avLst/>
+          </a:prstGeom>
+          <a:solidFill>
+            <a:srgbClr val="36E0FF">
+              <a:alpha val="18000"/>
+            </a:srgbClr>
+          </a:solidFill>
+          <a:ln w="12700">
+            <a:solidFill>
+              <a:srgbClr val="36E0FF">
+                <a:alpha val="18000"/>
+              </a:srgbClr>
+            </a:solidFill>
+            <a:prstDash val="solid"/>
+          </a:ln>
+        </p:spPr>
+        <p:txBody>
+          <a:bodyPr/>
+          <a:lstStyle/>
+          <a:p>
+            <a:endParaRPr lang="en-US"/>
+          </a:p>
+        </p:txBody>
+      </p:sp>
+      <p:sp>
+        <p:nvSpPr>
+          <p:cNvPr id="71" name="Text 69"/>
+          <p:cNvSpPr/>
+          <p:nvPr/>
+        </p:nvSpPr>
+        <p:spPr>
+          <a:xfrm>
+            <a:off x="5074920" y="1005840"/>
+            <a:ext cx="3657600" cy="274320"/>
+          </a:xfrm>
+          <a:prstGeom prst="rect">
+            <a:avLst/>
+          </a:prstGeom>
+          <a:noFill/>
+          <a:ln/>
+        </p:spPr>
+        <p:txBody>
+          <a:bodyPr wrap="square" rtlCol="0" anchor="ctr"/>
+          <a:lstStyle/>
+          <a:p>
+            <a:pPr marL="0" indent="0">
+              <a:buNone/>
+            </a:pPr>
+            <a:r>
+              <a:rPr lang="en-US" sz="1100" b="1" dirty="0">
+                <a:solidFill>
+                  <a:srgbClr val="36E0FF"/>
+                </a:solidFill>
+                <a:latin typeface="Aptos" pitchFamily="34" charset="0"/>
+                <a:ea typeface="Aptos" pitchFamily="34" charset="-122"/>
+                <a:cs typeface="Aptos" pitchFamily="34" charset="-120"/>
+              </a:rPr>
+              <a:t>Worked example</a:t>
+            </a:r>
+            <a:endParaRPr lang="en-US" sz="1100" dirty="0"/>
+          </a:p>
+        </p:txBody>
+      </p:sp>
+      <p:sp>
+        <p:nvSpPr>
+          <p:cNvPr id="72" name="Shape 70"/>
+          <p:cNvSpPr/>
+          <p:nvPr/>
+        </p:nvSpPr>
+        <p:spPr>
+          <a:xfrm>
+            <a:off x="5074920" y="1335024"/>
+            <a:ext cx="3630168" cy="548640"/>
+          </a:xfrm>
+          <a:prstGeom prst="rect">
+            <a:avLst/>
+          </a:prstGeom>
+          <a:solidFill>
+            <a:srgbClr val="08112A"/>
+          </a:solidFill>
+          <a:ln w="10160">
+            <a:solidFill>
+              <a:srgbClr val="36E0FF">
+                <a:alpha val="50000"/>
+              </a:srgbClr>
+            </a:solidFill>
+            <a:prstDash val="solid"/>
+          </a:ln>
+        </p:spPr>
+        <p:txBody>
+          <a:bodyPr/>
+          <a:lstStyle/>
+          <a:p>
+            <a:endParaRPr lang="en-US"/>
+          </a:p>
+        </p:txBody>
+      </p:sp>
+      <p:sp>
+        <p:nvSpPr>
+          <p:cNvPr id="73" name="Text 71"/>
+          <p:cNvSpPr/>
+          <p:nvPr/>
+        </p:nvSpPr>
+        <p:spPr>
+          <a:xfrm>
+            <a:off x="5184648" y="1335024"/>
+            <a:ext cx="3410712" cy="548640"/>
+          </a:xfrm>
+          <a:prstGeom prst="rect">
+            <a:avLst/>
+          </a:prstGeom>
+          <a:noFill/>
+          <a:ln/>
+        </p:spPr>
+        <p:txBody>
+          <a:bodyPr wrap="square" rtlCol="0" anchor="ctr"/>
+          <a:lstStyle/>
+          <a:p>
+            <a:pPr marL="0" indent="0">
+              <a:buNone/>
+            </a:pPr>
+            <a:r>
+              <a:rPr lang="en-US" sz="1150" b="1" i="1" dirty="0">
+                <a:solidFill>
+                  <a:srgbClr val="EAF2FF"/>
+                </a:solidFill>
+                <a:latin typeface="Aptos" pitchFamily="34" charset="0"/>
+                <a:ea typeface="Aptos" pitchFamily="34" charset="-122"/>
+                <a:cs typeface="Aptos" pitchFamily="34" charset="-120"/>
+              </a:rPr>
+              <a:t>"Why did rework increase on Line 3 last week?"</a:t>
+            </a:r>
+            <a:endParaRPr lang="en-US" sz="1150" dirty="0"/>
+          </a:p>
+        </p:txBody>
+      </p:sp>
+      <p:sp>
+        <p:nvSpPr>
+          <p:cNvPr id="74" name="Text 72"/>
+          <p:cNvSpPr/>
+          <p:nvPr/>
+        </p:nvSpPr>
+        <p:spPr>
+          <a:xfrm>
+            <a:off x="5074920" y="2029968"/>
+            <a:ext cx="3657600" cy="237744"/>
+          </a:xfrm>
+          <a:prstGeom prst="rect">
+            <a:avLst/>
+          </a:prstGeom>
+          <a:noFill/>
+          <a:ln/>
+        </p:spPr>
+        <p:txBody>
+          <a:bodyPr wrap="square" rtlCol="0" anchor="ctr"/>
+          <a:lstStyle/>
+          <a:p>
+            <a:pPr marL="0" indent="0">
+              <a:buNone/>
+            </a:pPr>
+            <a:r>
+              <a:rPr lang="en-US" sz="950" b="1" dirty="0">
+                <a:solidFill>
+                  <a:srgbClr val="6B82B5"/>
+                </a:solidFill>
+                <a:latin typeface="Aptos" pitchFamily="34" charset="0"/>
+                <a:ea typeface="Aptos" pitchFamily="34" charset="-122"/>
+                <a:cs typeface="Aptos" pitchFamily="34" charset="-120"/>
+              </a:rPr>
+              <a:t>Context package sent to the AI</a:t>
+            </a:r>
+            <a:endParaRPr lang="en-US" sz="950" dirty="0"/>
+          </a:p>
+        </p:txBody>
+      </p:sp>
+      <p:sp>
+        <p:nvSpPr>
+          <p:cNvPr id="75" name="Shape 73"/>
+          <p:cNvSpPr/>
+          <p:nvPr/>
+        </p:nvSpPr>
+        <p:spPr>
+          <a:xfrm>
+            <a:off x="5074920" y="2340864"/>
+            <a:ext cx="3630168" cy="384048"/>
+          </a:xfrm>
+          <a:prstGeom prst="rect">
+            <a:avLst/>
+          </a:prstGeom>
+          <a:solidFill>
+            <a:srgbClr val="08112A"/>
+          </a:solidFill>
+          <a:ln w="6350">
+            <a:solidFill>
+              <a:srgbClr val="3DEFC4">
+                <a:alpha val="40000"/>
+              </a:srgbClr>
+            </a:solidFill>
+            <a:prstDash val="solid"/>
+          </a:ln>
+        </p:spPr>
+        <p:txBody>
+          <a:bodyPr/>
+          <a:lstStyle/>
+          <a:p>
+            <a:endParaRPr lang="en-US"/>
+          </a:p>
+        </p:txBody>
+      </p:sp>
+      <p:sp>
+        <p:nvSpPr>
+          <p:cNvPr id="76" name="Shape 74"/>
+          <p:cNvSpPr/>
+          <p:nvPr/>
+        </p:nvSpPr>
+        <p:spPr>
+          <a:xfrm>
+            <a:off x="5074920" y="2340864"/>
+            <a:ext cx="54864" cy="384048"/>
+          </a:xfrm>
+          <a:prstGeom prst="rect">
+            <a:avLst/>
+          </a:prstGeom>
+          <a:solidFill>
+            <a:srgbClr val="3DEFC4"/>
+          </a:solidFill>
+          <a:ln w="12700">
+            <a:solidFill>
+              <a:srgbClr val="3DEFC4"/>
+            </a:solidFill>
+            <a:prstDash val="solid"/>
+          </a:ln>
+          <a:effectLst>
+            <a:outerShdw blurRad="63500" dist="50800" dir="16200000" algn="bl" rotWithShape="0">
+              <a:srgbClr val="3DEFC4">
+                <a:alpha val="60000"/>
+              </a:srgbClr>
+            </a:outerShdw>
+          </a:effectLst>
+        </p:spPr>
+        <p:txBody>
+          <a:bodyPr/>
+          <a:lstStyle/>
+          <a:p>
+            <a:endParaRPr lang="en-US"/>
+          </a:p>
+        </p:txBody>
+      </p:sp>
+      <p:sp>
+        <p:nvSpPr>
+          <p:cNvPr id="77" name="Text 75"/>
+          <p:cNvSpPr/>
+          <p:nvPr/>
+        </p:nvSpPr>
+        <p:spPr>
+          <a:xfrm>
+            <a:off x="5239512" y="2340864"/>
+            <a:ext cx="3401568" cy="384048"/>
+          </a:xfrm>
+          <a:prstGeom prst="rect">
+            <a:avLst/>
+          </a:prstGeom>
+          <a:noFill/>
+          <a:ln/>
+        </p:spPr>
+        <p:txBody>
+          <a:bodyPr wrap="square" rtlCol="0" anchor="ctr"/>
+          <a:lstStyle/>
+          <a:p>
+            <a:pPr marL="0" indent="0">
+              <a:buNone/>
+            </a:pPr>
+            <a:r>
+              <a:rPr lang="en-US" sz="1000" dirty="0">
+                <a:solidFill>
+                  <a:srgbClr val="9DBEF0"/>
+                </a:solidFill>
+                <a:latin typeface="Aptos" pitchFamily="34" charset="0"/>
+                <a:ea typeface="Aptos" pitchFamily="34" charset="-122"/>
+                <a:cs typeface="Aptos" pitchFamily="34" charset="-120"/>
+              </a:rPr>
+              <a:t>Rework increased from 3.2% to 7.4%</a:t>
+            </a:r>
+            <a:endParaRPr lang="en-US" sz="1000" dirty="0"/>
+          </a:p>
+        </p:txBody>
+      </p:sp>
+      <p:sp>
+        <p:nvSpPr>
+          <p:cNvPr id="78" name="Shape 76"/>
+          <p:cNvSpPr/>
+          <p:nvPr/>
+        </p:nvSpPr>
+        <p:spPr>
+          <a:xfrm>
+            <a:off x="5074920" y="2798064"/>
+            <a:ext cx="3630168" cy="384048"/>
+          </a:xfrm>
+          <a:prstGeom prst="rect">
+            <a:avLst/>
+          </a:prstGeom>
+          <a:solidFill>
+            <a:srgbClr val="08112A"/>
+          </a:solidFill>
+          <a:ln w="6350">
+            <a:solidFill>
+              <a:srgbClr val="3DEFC4">
+                <a:alpha val="40000"/>
+              </a:srgbClr>
+            </a:solidFill>
+            <a:prstDash val="solid"/>
+          </a:ln>
+        </p:spPr>
+        <p:txBody>
+          <a:bodyPr/>
+          <a:lstStyle/>
+          <a:p>
+            <a:endParaRPr lang="en-US"/>
+          </a:p>
+        </p:txBody>
+      </p:sp>
+      <p:sp>
+        <p:nvSpPr>
+          <p:cNvPr id="79" name="Shape 77"/>
+          <p:cNvSpPr/>
+          <p:nvPr/>
+        </p:nvSpPr>
+        <p:spPr>
+          <a:xfrm>
+            <a:off x="5074920" y="2798064"/>
+            <a:ext cx="54864" cy="384048"/>
+          </a:xfrm>
+          <a:prstGeom prst="rect">
+            <a:avLst/>
+          </a:prstGeom>
+          <a:solidFill>
+            <a:srgbClr val="3DEFC4"/>
+          </a:solidFill>
+          <a:ln w="12700">
+            <a:solidFill>
+              <a:srgbClr val="3DEFC4"/>
+            </a:solidFill>
+            <a:prstDash val="solid"/>
+          </a:ln>
+          <a:effectLst>
+            <a:outerShdw blurRad="63500" dist="50800" dir="16200000" algn="bl" rotWithShape="0">
+              <a:srgbClr val="3DEFC4">
+                <a:alpha val="60000"/>
+              </a:srgbClr>
+            </a:outerShdw>
+          </a:effectLst>
+        </p:spPr>
+        <p:txBody>
+          <a:bodyPr/>
+          <a:lstStyle/>
+          <a:p>
+            <a:endParaRPr lang="en-US"/>
+          </a:p>
+        </p:txBody>
+      </p:sp>
+      <p:sp>
+        <p:nvSpPr>
+          <p:cNvPr id="80" name="Text 78"/>
+          <p:cNvSpPr/>
+          <p:nvPr/>
+        </p:nvSpPr>
+        <p:spPr>
+          <a:xfrm>
+            <a:off x="5239512" y="2798064"/>
+            <a:ext cx="3401568" cy="384048"/>
+          </a:xfrm>
+          <a:prstGeom prst="rect">
+            <a:avLst/>
+          </a:prstGeom>
+          <a:noFill/>
+          <a:ln/>
+        </p:spPr>
+        <p:txBody>
+          <a:bodyPr wrap="square" rtlCol="0" anchor="ctr"/>
+          <a:lstStyle/>
+          <a:p>
+            <a:pPr marL="0" indent="0">
+              <a:buNone/>
+            </a:pPr>
+            <a:r>
+              <a:rPr lang="en-US" sz="1000" dirty="0">
+                <a:solidFill>
+                  <a:srgbClr val="9DBEF0"/>
+                </a:solidFill>
+                <a:latin typeface="Aptos" pitchFamily="34" charset="0"/>
+                <a:ea typeface="Aptos" pitchFamily="34" charset="-122"/>
+                <a:cs typeface="Aptos" pitchFamily="34" charset="-120"/>
+              </a:rPr>
+              <a:t>Torque station alarms up by 38%</a:t>
+            </a:r>
+            <a:endParaRPr lang="en-US" sz="1000" dirty="0"/>
+          </a:p>
+        </p:txBody>
+      </p:sp>
+      <p:sp>
+        <p:nvSpPr>
+          <p:cNvPr id="81" name="Shape 79"/>
+          <p:cNvSpPr/>
+          <p:nvPr/>
+        </p:nvSpPr>
+        <p:spPr>
+          <a:xfrm>
+            <a:off x="5074920" y="3255264"/>
+            <a:ext cx="3630168" cy="384048"/>
+          </a:xfrm>
+          <a:prstGeom prst="rect">
+            <a:avLst/>
+          </a:prstGeom>
+          <a:solidFill>
+            <a:srgbClr val="08112A"/>
+          </a:solidFill>
+          <a:ln w="6350">
+            <a:solidFill>
+              <a:srgbClr val="3DEFC4">
+                <a:alpha val="40000"/>
+              </a:srgbClr>
+            </a:solidFill>
+            <a:prstDash val="solid"/>
+          </a:ln>
+        </p:spPr>
+        <p:txBody>
+          <a:bodyPr/>
+          <a:lstStyle/>
+          <a:p>
+            <a:endParaRPr lang="en-US"/>
+          </a:p>
+        </p:txBody>
+      </p:sp>
+      <p:sp>
+        <p:nvSpPr>
+          <p:cNvPr id="82" name="Shape 80"/>
+          <p:cNvSpPr/>
+          <p:nvPr/>
+        </p:nvSpPr>
+        <p:spPr>
+          <a:xfrm>
+            <a:off x="5074920" y="3255264"/>
+            <a:ext cx="54864" cy="384048"/>
+          </a:xfrm>
+          <a:prstGeom prst="rect">
+            <a:avLst/>
+          </a:prstGeom>
+          <a:solidFill>
+            <a:srgbClr val="3DEFC4"/>
+          </a:solidFill>
+          <a:ln w="12700">
+            <a:solidFill>
+              <a:srgbClr val="3DEFC4"/>
+            </a:solidFill>
+            <a:prstDash val="solid"/>
+          </a:ln>
+          <a:effectLst>
+            <a:outerShdw blurRad="63500" dist="50800" dir="16200000" algn="bl" rotWithShape="0">
+              <a:srgbClr val="3DEFC4">
+                <a:alpha val="60000"/>
+              </a:srgbClr>
+            </a:outerShdw>
+          </a:effectLst>
+        </p:spPr>
+        <p:txBody>
+          <a:bodyPr/>
+          <a:lstStyle/>
+          <a:p>
+            <a:endParaRPr lang="en-US"/>
+          </a:p>
+        </p:txBody>
+      </p:sp>
+      <p:sp>
+        <p:nvSpPr>
+          <p:cNvPr id="83" name="Text 81"/>
+          <p:cNvSpPr/>
+          <p:nvPr/>
+        </p:nvSpPr>
+        <p:spPr>
+          <a:xfrm>
+            <a:off x="5239512" y="3255264"/>
+            <a:ext cx="3401568" cy="384048"/>
+          </a:xfrm>
+          <a:prstGeom prst="rect">
+            <a:avLst/>
+          </a:prstGeom>
+          <a:noFill/>
+          <a:ln/>
+        </p:spPr>
+        <p:txBody>
+          <a:bodyPr wrap="square" rtlCol="0" anchor="ctr"/>
+          <a:lstStyle/>
+          <a:p>
+            <a:pPr marL="0" indent="0">
+              <a:buNone/>
+            </a:pPr>
+            <a:r>
+              <a:rPr lang="en-US" sz="1000" dirty="0">
+                <a:solidFill>
+                  <a:srgbClr val="9DBEF0"/>
+                </a:solidFill>
+                <a:latin typeface="Aptos" pitchFamily="34" charset="0"/>
+                <a:ea typeface="Aptos" pitchFamily="34" charset="-122"/>
+                <a:cs typeface="Aptos" pitchFamily="34" charset="-120"/>
+              </a:rPr>
+              <a:t>Maintenance intervention occurred Tuesday</a:t>
+            </a:r>
+            <a:endParaRPr lang="en-US" sz="1000" dirty="0"/>
+          </a:p>
+        </p:txBody>
+      </p:sp>
+      <p:sp>
+        <p:nvSpPr>
+          <p:cNvPr id="84" name="Shape 82"/>
+          <p:cNvSpPr/>
+          <p:nvPr/>
+        </p:nvSpPr>
+        <p:spPr>
+          <a:xfrm>
+            <a:off x="5074920" y="3712464"/>
+            <a:ext cx="3630168" cy="384048"/>
+          </a:xfrm>
+          <a:prstGeom prst="rect">
+            <a:avLst/>
+          </a:prstGeom>
+          <a:solidFill>
+            <a:srgbClr val="08112A"/>
+          </a:solidFill>
+          <a:ln w="6350">
+            <a:solidFill>
+              <a:srgbClr val="3DEFC4">
+                <a:alpha val="40000"/>
+              </a:srgbClr>
+            </a:solidFill>
+            <a:prstDash val="solid"/>
+          </a:ln>
+        </p:spPr>
+        <p:txBody>
+          <a:bodyPr/>
+          <a:lstStyle/>
+          <a:p>
+            <a:endParaRPr lang="en-US"/>
+          </a:p>
+        </p:txBody>
+      </p:sp>
+      <p:sp>
+        <p:nvSpPr>
+          <p:cNvPr id="85" name="Shape 83"/>
+          <p:cNvSpPr/>
+          <p:nvPr/>
+        </p:nvSpPr>
+        <p:spPr>
+          <a:xfrm>
+            <a:off x="5074920" y="3712464"/>
+            <a:ext cx="54864" cy="384048"/>
+          </a:xfrm>
+          <a:prstGeom prst="rect">
+            <a:avLst/>
+          </a:prstGeom>
+          <a:solidFill>
+            <a:srgbClr val="3DEFC4"/>
+          </a:solidFill>
+          <a:ln w="12700">
+            <a:solidFill>
+              <a:srgbClr val="3DEFC4"/>
+            </a:solidFill>
+            <a:prstDash val="solid"/>
+          </a:ln>
+          <a:effectLst>
+            <a:outerShdw blurRad="63500" dist="50800" dir="16200000" algn="bl" rotWithShape="0">
+              <a:srgbClr val="3DEFC4">
+                <a:alpha val="60000"/>
+              </a:srgbClr>
+            </a:outerShdw>
+          </a:effectLst>
+        </p:spPr>
+        <p:txBody>
+          <a:bodyPr/>
+          <a:lstStyle/>
+          <a:p>
+            <a:endParaRPr lang="en-US"/>
+          </a:p>
+        </p:txBody>
+      </p:sp>
+      <p:sp>
+        <p:nvSpPr>
+          <p:cNvPr id="86" name="Text 84"/>
+          <p:cNvSpPr/>
+          <p:nvPr/>
+        </p:nvSpPr>
+        <p:spPr>
+          <a:xfrm>
+            <a:off x="5239512" y="3712464"/>
+            <a:ext cx="3401568" cy="384048"/>
+          </a:xfrm>
+          <a:prstGeom prst="rect">
+            <a:avLst/>
+          </a:prstGeom>
+          <a:noFill/>
+          <a:ln/>
+        </p:spPr>
+        <p:txBody>
+          <a:bodyPr wrap="square" rtlCol="0" anchor="ctr"/>
+          <a:lstStyle/>
+          <a:p>
+            <a:pPr marL="0" indent="0">
+              <a:buNone/>
+            </a:pPr>
+            <a:r>
+              <a:rPr lang="en-US" sz="1000" dirty="0">
+                <a:solidFill>
+                  <a:srgbClr val="9DBEF0"/>
+                </a:solidFill>
+                <a:latin typeface="Aptos" pitchFamily="34" charset="0"/>
+                <a:ea typeface="Aptos" pitchFamily="34" charset="-122"/>
+                <a:cs typeface="Aptos" pitchFamily="34" charset="-120"/>
+              </a:rPr>
+              <a:t>Similar event recorded in March</a:t>
+            </a:r>
+            <a:endParaRPr lang="en-US" sz="1000" dirty="0"/>
+          </a:p>
+        </p:txBody>
+      </p:sp>
+      <p:sp>
+        <p:nvSpPr>
+          <p:cNvPr id="87" name="Text 85"/>
+          <p:cNvSpPr/>
+          <p:nvPr/>
+        </p:nvSpPr>
+        <p:spPr>
+          <a:xfrm>
+            <a:off x="5074920" y="4224528"/>
+            <a:ext cx="3630168" cy="457200"/>
+          </a:xfrm>
+          <a:prstGeom prst="rect">
+            <a:avLst/>
+          </a:prstGeom>
+          <a:noFill/>
+          <a:ln/>
+        </p:spPr>
+        <p:txBody>
+          <a:bodyPr wrap="square" rtlCol="0" anchor="t"/>
+          <a:lstStyle/>
+          <a:p>
+            <a:pPr marL="0" indent="0">
+              <a:buNone/>
+            </a:pPr>
+            <a:r>
+              <a:rPr lang="en-US" sz="900" i="1" dirty="0">
+                <a:solidFill>
+                  <a:srgbClr val="36E0FF"/>
+                </a:solidFill>
+                <a:latin typeface="Aptos" pitchFamily="34" charset="0"/>
+                <a:ea typeface="Aptos" pitchFamily="34" charset="-122"/>
+                <a:cs typeface="Aptos" pitchFamily="34" charset="-120"/>
+              </a:rPr>
+              <a:t>→ The AI receives only this filtered context — never the full production databases or customer data.</a:t>
+            </a:r>
+            <a:endParaRPr lang="en-US" sz="900" dirty="0"/>
+          </a:p>
+        </p:txBody>
+      </p:sp>
+    </p:spTree>
+  </p:cSld>
+  <p:clrMapOvr>
+    <a:masterClrMapping/>
+  </p:clrMapOvr>
+</p:sld>
+</file>
+
 <file path=ppt/slides/slide8.xml><?xml version="1.0" encoding="utf-8"?>
 <p:sld xmlns:a="http://schemas.openxmlformats.org/drawingml/2006/main" xmlns:r="http://schemas.openxmlformats.org/officeDocument/2006/relationships" xmlns:p="http://schemas.openxmlformats.org/presentationml/2006/main">
   <p:cSld name="Slide 12">
@@ -37739,7 +37767,7 @@
                 <a:ea typeface="Aptos" pitchFamily="34" charset="-122"/>
                 <a:cs typeface="Aptos" pitchFamily="34" charset="-120"/>
               </a:rPr>
-              <a:t>12/13</a:t>
+              <a:t>8/13</a:t>
             </a:r>
             <a:endParaRPr lang="en-US" sz="750" dirty="0"/>
           </a:p>
